--- a/inbox/Application Aware Networking/Book_11_FedAAN_Vulnerability_Management.pptx
+++ b/inbox/Application Aware Networking/Book_11_FedAAN_Vulnerability_Management.pptx
@@ -27,9 +27,12 @@
     <p:sldId id="275" r:id="rId21"/>
     <p:sldId id="276" r:id="rId22"/>
     <p:sldId id="277" r:id="rId23"/>
+    <p:sldId id="278" r:id="rId24"/>
+    <p:sldId id="279" r:id="rId25"/>
+    <p:sldId id="280" r:id="rId26"/>
   </p:sldIdLst>
   <p:notesMasterIdLst>
-    <p:notesMasterId r:id="rId24"/>
+    <p:notesMasterId r:id="rId27"/>
   </p:notesMasterIdLst>
   <p:sldSz cx="9144000" cy="5143500"/>
   <p:notesSz cx="5143500" cy="9144000"/>
@@ -1146,8 +1149,8 @@
           <a:p>
             <a:r>
               <a:rPr lang="en-US" dirty="0"/>
-              <a:t>The enforcement layer — where patch currency stops being advisory and becomes a condition of access. The distinction to draw first: the patch rings control WHEN patches are delivered; the compliance policy controls what COUNTS as current. A machine that is more than 30 days behind the required patch level is marked non-compliant, and that non-compliance triggers the Conditional Access gate — the machine loses access to enterprise applications until patching is completed. This is the same device-compliance-drives-Conditional-Access pattern Book 10 used for PAWs, applied here to patch state: an unpatched machine is treated like a non-compliant device, because it is one. The three-step chain: the compliance policy defines non-compliant as more than 30 days behind, alongside requiring the firewall on, Defender with real-time protection, and Secure Boot; the Conditional Access gate blocks a non-compliant device from enterprise applications, so patching is no longer optional; and — critically — a grace period comes first. The amber bar explains why the grace period is non-negotiable, and it is a lesson learned the hard way in real deployments: when this compliance policy is deployed for the first time against a population that has accumulated patch debt, immediately blocking access on day one generates helpdesk volume that obscures the machines genuinely needing emergency attention — the signal drowns in the noise of every mildly-behind machine failing at once. The correct sequence is a 30-day Conditional Access grace period used to remediate the backlog, then let the non-compliance block take effect against a clean baseline. Enforcement is the goal, but enforcement against an unprepared population is an outage, not a control — the same report-only-first discipline the series applies to every access-blocking change.
-Vendor sources: https://learn.microsoft.com/en-us/mem/intune/protect/windows-update-for-business-configure | https://learn.microsoft.com/en-us/windows/deployment/update/waas-manage-updates-wufb | uiao repo: inbox/Application Aware Networking/Book_11_FedAAN_Vulnerability_Management.qmd</a:t>
+              <a:t>Remediation beyond Windows — the correction to the impression that this is a Windows-only program. The critical framing to state first: the SCANNING side was always OS-agnostic. MDVM covers Linux over the same Azure Monitor Agent channel it uses for Windows, so a Linux CVE flows through the identical KEV cross-reference, the identical six-tier SLA table, and the identical daily compliance record. Nothing about detection, prioritization, or evidence changes by operating system — only the patch-DELIVERY tool changes, because Windows Update for Business is Windows-only. For Linux, the direct analogue on the same Arc channel is Azure Update Manager: assessment plus scheduled patching with maintenance windows for RHEL, Ubuntu, and SUSE, dynamic machine scoping by tag, and an on-demand patch run that serves as the Linux equivalent of the KEV expedite path — no new agent, because it rides the Arc connection already there. Where an agency already operates native package automation (dnf-automatic, unattended-upgrades) or configuration management (Ansible, Red Hat Satellite, Ubuntu Landscape), those remain valid delivery mechanisms; Update Manager is the default because it inherits the Arc inventory gate. The right column covers the rest of the estate so nothing is silently omitted: macOS via Intune update policies and the MDE sensor; network devices and appliances, which are vendor-managed and tracked separately and are frequently the single highest-risk KEV surface (edge VPN and firewall CVEs dominate the KEV catalog's exploited-in-the-wild entries); container images, which are scanned in the registry at build time rather than host-patched; and firmware and BIOS, which sit outside WUfB entirely and follow vendor tooling on their own cadence. The blue bar is the unifying point: WUfB and Azure Update Manager are two delivery examples of one mechanism — the queue and the evidence are constant across the OS surface, which is exactly what the mechanism-not-product slide generalizes.
+Vendor sources: https://learn.microsoft.com/en-us/azure/update-manager/overview | https://learn.microsoft.com/en-us/windows/deployment/update/waas-manage-updates-wufb | uiao repo: inbox/Application Aware Networking/Book_11_FedAAN_Vulnerability_Management.qmd</a:t>
             </a:r>
             <a:endParaRPr lang="en-US" dirty="0"/>
           </a:p>
@@ -1235,8 +1238,8 @@
           <a:p>
             <a:r>
               <a:rPr lang="en-US" dirty="0"/>
-              <a:t>SQL Server patching follows a different cadence than Windows patching, and the difference matters for compliance. The CU-GDR distinction: Microsoft releases Cumulative Updates for each SQL Server version approximately every two months, and a CU addresses both security vulnerabilities and product bugs; between CUs, General Distribution Releases ship for critical security fixes only, and a GDR is narrower. Microsoft's support policy requires that an instance run the current or immediately preceding CU to receive support for issues discovered after that CU's release — so an instance two or more CUs behind may carry known security vulnerabilities that are fixed only in the current CU. And the practical rule: applying the current CU covers all GDR content for that version, so CU currency is the compliance target. The compliance workflow: enumerate every instance's version and CU level, built directly on the Part 8 SQL Server inventory using the Arc-enrolled machine list as the source; flag instances that are behind the current CU or past end-of-support; auto-apply CUs through the Arc SQL Server extension within a defined maintenance window, so patching happens on a schedule without manual intervention; and where a CU cannot be applied immediately because application-compatibility testing is required, apply the targeted GDR to close the specific CVE while the CU testing continues — the GDR is the interim that keeps the instance compliant without waiting on a full regression cycle. The amber bar elevates end-of-support to its own SLA, because it is a distinct failure mode from being behind on patches: SQL Server 2019 mainstream support ended July 2024, with Extended Security Updates available through Arc enrollment; SQL Server 2022 runs through January 2028. An instance past end-of-support cannot be patched current no matter how diligent the CU cadence — it needs upgrade planning, not just patching, and the enumeration script surfaces EOS-breached instances specifically so they enter the upgrade pipeline rather than sitting in a patch queue that can never make them compliant.
-Vendor sources: https://learn.microsoft.com/en-us/sql/database-engine/install-windows/latest-updates-for-microsoft-sql-server | uiao repo: inbox/Application Aware Networking/Book_11_FedAAN_Vulnerability_Management.qmd</a:t>
+              <a:t>The enforcement layer — where patch currency stops being advisory and becomes a condition of access. The distinction to draw first: the patch rings control WHEN patches are delivered; the compliance policy controls what COUNTS as current. A machine that is more than 30 days behind the required patch level is marked non-compliant, and that non-compliance triggers the Conditional Access gate — the machine loses access to enterprise applications until patching is completed. This is the same device-compliance-drives-Conditional-Access pattern Book 10 used for PAWs, applied here to patch state: an unpatched machine is treated like a non-compliant device, because it is one. The three-step chain: the compliance policy defines non-compliant as more than 30 days behind, alongside requiring the firewall on, Defender with real-time protection, and Secure Boot; the Conditional Access gate blocks a non-compliant device from enterprise applications, so patching is no longer optional; and — critically — a grace period comes first. The amber bar explains why the grace period is non-negotiable, and it is a lesson learned the hard way in real deployments: when this compliance policy is deployed for the first time against a population that has accumulated patch debt, immediately blocking access on day one generates helpdesk volume that obscures the machines genuinely needing emergency attention — the signal drowns in the noise of every mildly-behind machine failing at once. The correct sequence is a 30-day Conditional Access grace period used to remediate the backlog, then let the non-compliance block take effect against a clean baseline. Enforcement is the goal, but enforcement against an unprepared population is an outage, not a control — the same report-only-first discipline the series applies to every access-blocking change.
+Vendor sources: https://learn.microsoft.com/en-us/mem/intune/protect/windows-update-for-business-configure | https://learn.microsoft.com/en-us/windows/deployment/update/waas-manage-updates-wufb | uiao repo: inbox/Application Aware Networking/Book_11_FedAAN_Vulnerability_Management.qmd</a:t>
             </a:r>
             <a:endParaRPr lang="en-US" dirty="0"/>
           </a:p>
@@ -1324,8 +1327,8 @@
           <a:p>
             <a:r>
               <a:rPr lang="en-US" dirty="0"/>
-              <a:t>The evidence half — the daily compliance record that is the point of the whole pipeline. The left panel is the compliance-summary JSON produced every day: total findings, KEV findings, the P0 and P1 KEV counts, total SLA breaches, KEV-specific SLA breaches, the patch compliance rate, and the KEV catalog size and version. Its structure is deliberately designed to answer the specific questions an automated KSI engine asks about RA-5 compliance without human assembly — it is not a report a person reads and interprets; it is a data structure a machine queries. Two fields carry the compliance verdict, and they are worth calling out individually. SLABreachedKEV, on the right in teal, must be zero — it is the BOD 22-01 pass/fail, because any KEV finding past its due date is a mandatory reporting event to CISA, so a non-zero value here is not an internal metric slipping, it is a federal reporting obligation triggered. PatchComplianceRate, below it, is the FedRAMP 20x SI-2 target: 95 percent or higher across the active Critical and High finding population, measured on a 30-day rolling window. Those two numbers are what an assessor or an automated KSI check reads first. The blue bar closes the loop back to the patch-SLA-gap slide: this is exactly the artifact the assessor's third question needs — was the SLA met for this CVE on this machine — produced every day with no human assembly, so RA-5 and SI-2 are answered as a query against a file that already exists rather than a scramble to reconstruct a record across disparate tools. The full patch queue sits alongside this summary for the drill-down to a specific CVE-machine pair; the summary is what turns continuous compliance into a single readable number per day.
-Vendor sources: https://www.fedramp.gov/20x/ | https://csrc.nist.gov/pubs/sp/800/53/r5/upd1/final | uiao repo: inbox/Application Aware Networking/Book_11_FedAAN_Vulnerability_Management.qmd</a:t>
+              <a:t>SQL Server patching follows a different cadence than Windows patching, and the difference matters for compliance. The CU-GDR distinction: Microsoft releases Cumulative Updates for each SQL Server version approximately every two months, and a CU addresses both security vulnerabilities and product bugs; between CUs, General Distribution Releases ship for critical security fixes only, and a GDR is narrower. Microsoft's support policy requires that an instance run the current or immediately preceding CU to receive support for issues discovered after that CU's release — so an instance two or more CUs behind may carry known security vulnerabilities that are fixed only in the current CU. And the practical rule: applying the current CU covers all GDR content for that version, so CU currency is the compliance target. The compliance workflow: enumerate every instance's version and CU level, built directly on the Part 8 SQL Server inventory using the Arc-enrolled machine list as the source; flag instances that are behind the current CU or past end-of-support; auto-apply CUs through the Arc SQL Server extension within a defined maintenance window, so patching happens on a schedule without manual intervention; and where a CU cannot be applied immediately because application-compatibility testing is required, apply the targeted GDR to close the specific CVE while the CU testing continues — the GDR is the interim that keeps the instance compliant without waiting on a full regression cycle. The amber bar elevates end-of-support to its own SLA, because it is a distinct failure mode from being behind on patches: SQL Server 2019 mainstream support ended July 2024, with Extended Security Updates available through Arc enrollment; SQL Server 2022 runs through January 2028. An instance past end-of-support cannot be patched current no matter how diligent the CU cadence — it needs upgrade planning, not just patching, and the enumeration script surfaces EOS-breached instances specifically so they enter the upgrade pipeline rather than sitting in a patch queue that can never make them compliant.
+Vendor sources: https://learn.microsoft.com/en-us/sql/database-engine/install-windows/latest-updates-for-microsoft-sql-server | uiao repo: inbox/Application Aware Networking/Book_11_FedAAN_Vulnerability_Management.qmd</a:t>
             </a:r>
             <a:endParaRPr lang="en-US" dirty="0"/>
           </a:p>
@@ -1413,8 +1416,8 @@
           <a:p>
             <a:r>
               <a:rPr lang="en-US" dirty="0"/>
-              <a:t>The retention and operations layer — how the daily record becomes the assessor-facing history and the ops-facing dashboard. First, archive daily: each daily compliance summary is written to Azure Blob Storage authenticated by Managed Identity, building a durable, tamper-evident compliance history — the record accumulates automatically rather than depending on anyone remembering to save it. Second, the 90-day trend on demand: for FedRAMP 20x, assessors typically request a 90-day or 180-day compliance record, and because the daily summaries are already stored, a trend query reads them into a compliance-rate time series — the history is retained continuously, so the 'show me your last 90 days' request is a query, not a reconstruction project. Third, the live operations dashboard: the daily JSON ingests into a Log Analytics custom table, and an Azure Monitor Workbook surfaces the compliance-rate trend, KEV finding counts, and SLA-breach alerts, so the operations team gets a dashboard instead of having to parse JSON files by hand. The blue bar enumerates the five assessment artifacts the book produces, all script-generated, so the reviewer sees the complete evidence package: the daily patch queue (the full CVE-machine finding list with priority and SLA), the daily compliance summary (the primary KSI input), the 90-day rolling trend (assessor-facing), the Arc-enrollment-versus-MDE-onboarding coverage cross-check (proving no enrolled asset is unscanned), and the SQL Server version-and-CU currency record. No manual assembly is required for any assessment request, and the history lives in Blob Storage available on demand — which is the operational definition of continuous monitoring the CA-7 and FedRAMP 20x model calls for.
-Vendor sources: https://www.fedramp.gov/20x/ | https://learn.microsoft.com/en-us/defender-vulnerability-management/defender-vulnerability-management | uiao repo: inbox/Application Aware Networking/Book_11_FedAAN_Vulnerability_Management.qmd</a:t>
+              <a:t>SaaS is a different problem, and the reason it does not appear elsewhere in this book is that it is not a patching problem at all — it is a shared-responsibility problem, so it needs its own treatment rather than being forced into the server model. The vendor's job: for a FedRAMP-authorized SaaS — M365 GCC, Amazon Connect, Oracle OCI — the vendor patches the platform itself, runs its own vulnerability management under its FedRAMP authorization, and publishes ConMon evidence in the form of a monthly POA&amp;M, scan summaries, and deviation reports. The agency does not patch CVEs on the platform; it cannot reach them, and attempting to treat a SaaS tenant like a server it patches is a category error. The agency's job is real but different: consume the vendor's ConMon evidence — track the vendor's POA&amp;M rather than your own patch queue, because the vendor's open findings are the agency's inherited risk — and manage the agency's OWN configuration posture, which is SaaS security posture management (SSPM) and cloud security posture management (CSPM). In the federal M365 world that is specifically SCuBA: CISA's Secure Cloud Business Applications baselines, mandated by BOD 25-01, plus continuous drift monitoring against them; for cloud resources it is Defender for Cloud, or third-party CSPM such as Wiz, Prisma Cloud, or Orca. The blue bar draws the scope boundary explicitly, which also resolves a consistency issue: the series governance model assigns SaaS posture to the Part 11/13 rows, so this slide is where Book 11 hands it off cleanly — Book 11 owns server and endpoint CVE remediation; SaaS configuration posture lives in the SCuBA/ScubaDrift stream and feeds Book 13's detection layer and Book 19's ConMon package. The daily KEV pipeline still ingests findings from any agent-bearing hosts, but a SaaS control plane is governed by configuration baselines, not patch SLAs. The red bar names the two symmetric failure modes: treating SaaS like a server you patch, or ignoring it because the vendor handles it — the truth is in between, and it is posture plus evidence consumption.
+Vendor sources: https://www.cisa.gov/resources-tools/services/secure-cloud-business-applications-scuba | https://learn.microsoft.com/en-us/azure/defender-for-cloud/defender-for-cloud-introduction | uiao repo: inbox/Application Aware Networking/Book_11_FedAAN_Vulnerability_Management.qmd</a:t>
             </a:r>
             <a:endParaRPr lang="en-US" dirty="0"/>
           </a:p>
@@ -1591,8 +1594,8 @@
           <a:p>
             <a:r>
               <a:rPr lang="en-US" dirty="0"/>
-              <a:t>The control-closure table for Part 11, before-and-after by control. RA-5 Vulnerability Monitoring and Scanning: quarterly Nessus runs with cloud assets excluded and no continuous monitoring, replaced by continuous MDVM through the Arc channel covering all enrolled assets with a daily finding export. RA-5(2) Update Vulnerabilities to Be Scanned: the CVE database updated only on the scanner subscription cycle with no KEV cross-reference, replaced by the KEV catalog pulled daily and a scan scope that grows with the Arc inventory automatically. RA-5(5) Privileged Access for Scanning: a per-system privileged scanner account managed by hand, replaced by Managed Identity on the AMA channel with no per-system credential — the credential-elimination win from the integration slide. SI-2 Flaw Remediation: an SLA living in a policy document with no automated tracking, replaced by BOD 22-01 tiers with an SLA computed per CVE-machine pair and a daily breach report. SI-2(2) Automated Flaw Remediation Status: checked only at assessment time, replaced by the daily patch-queue JSON, the Log Analytics workbook, and the 90-day trend on demand. SI-5 Security Alerts, Advisories, and Directives: the CISA KEV consumed manually by email subscription, replaced by the KEV JSON cross-referenced against every finding within 24 hours. CM-7 and CM-7(1) Least Functionality and Periodic Review: software inventory not maintained continuously and an annual review, replaced by continuous MDVM software and configuration inventory with drift flagged in the Defender portal. The red bar is the closure-necessity argument that connects this book to the series' foundation: RA-5 requires vulnerability monitoring of the whole system, not the subset a scanner happens to find. A scanner enumerates only what answers it — it measures drift from an inventory, it cannot author one. The authoritative inventory is CM-8, and CM-8 closes only through the IPAM and DDI plane established in Book 01, where every address, lease, and name a component holds exists before any scan runs. The Arc enrollment gate in this document inherits that same property — scan scope and inventory are the same list — which is why no scan cadence, scanner configuration, or scoring model closes RA-5 over components the inventory cannot enumerate. You cannot scan what you cannot enumerate; this book's continuous scanning is only as complete as Book 01's inventory makes it, and that dependency is a strength, not a gap, because it is explicit and mechanized.
-Vendor sources: https://csrc.nist.gov/pubs/sp/800/53/r5/upd1/final | https://www.cisa.gov/news-events/directives/bod-22-01-reducing-significant-risk-known-exploited-vulnerabilities | uiao repo: inbox/Application Aware Networking/Book_11_FedAAN_Vulnerability_Management.qmd</a:t>
+              <a:t>The doctrine slide — the series' 'mechanism, not product' principle applied to vulnerability management, and the answer to the fair question of why this book leans on the Microsoft stack. The table separates the MECHANISM (the left column, which is fixed and named by NIST control) from the deployed EXAMPLE (the middle, this agency's tooling) and the FedRAMP-authorized ALTERNATIVES (the right). Continuous scanning to satisfy RA-5: the mechanism is inventory-bound continuous vulnerability assessment; Defender Vulnerability Management is the example, and Tenable.io or Nessus, Qualys VMDR, and Rapid7 InsightVM are authorized alternatives that satisfy the same mechanism. Windows remediation for SI-2: Intune WUfB is the example; WSUS, BigFix, and Automox are alternatives. Linux remediation for SI-2: Azure Update Manager is the example; Red Hat Satellite, Ansible, and Ubuntu Landscape are alternatives. Cloud and SaaS posture for CM and RA: Defender for Cloud plus SCuBA is the example; Wiz, Prisma Cloud, Orca, and the ScubaGear/ScubaDrift tooling for M365 are alternatives. Evidence and KSI for CA-7: the daily JSON into Log Analytics is the example; Splunk and Elastic are alternatives, and the KSI format itself is stable regardless of the store. The blue bar is the doctrine in one sentence: the contract does not move — inventory-bound continuous scan, CISA KEV cross-reference, automated remediation, machine-readable evidence — and every product named is a deployed example of a layer in that contract, not the layer itself. The Microsoft stack is this agency's example specifically because it is already deployed on the Arc estate, so it carries no incremental agent or licensing cost; an agency on a different stack implements the same four-layer contract with different products. This is consistent with the series' standing doctrine, and the standing caveat applies: verify each candidate's current authorization on the FedRAMP Marketplace at procurement time, because authorization status changes.
+Vendor sources: https://learn.microsoft.com/en-us/defender-vulnerability-management/defender-vulnerability-management | https://marketplace.fedramp.gov/ | uiao repo: inbox/Application Aware Networking/Book_11_FedAAN_Vulnerability_Management.qmd</a:t>
             </a:r>
             <a:endParaRPr lang="en-US" dirty="0"/>
           </a:p>
@@ -1680,8 +1683,8 @@
           <a:p>
             <a:r>
               <a:rPr lang="en-US" dirty="0"/>
-              <a:t>The federal compliance clock — the series-standard slide; the fully-sourced version with the elapsed baseline lives in the Federal AAN / ConMon Gap Roadmap, the series' single source of truth for dates (verified 2026-07-07). For Book 11 this slide is unusually load-bearing, because vulnerability management is exactly what several of these deadlines regulate. Walk the rows: August 3 and 31, 2026 — FedRAMP 20x submission windows open, the GCC Moderate window. August 7, 2026 — BOD 26-04 (issued June 10, 2026) requires agency vulnerability-management policies to support risk-based remediation under its four-variable model: exposure, KEV listing, exploit automatability, and technical impact — this is the directive that directly governs the prioritization scheme this entire book implements, and the KEV-listing variable is the KEV intersection made federal policy. September 21, 2026 — FIPS 140-2 certificates move to NIST's Historical List. December 7, 2026 — BOD 26-04's remediation timelines take force AND FedRAMP's Vulnerability Detection and Response / Vulnerability Evaluation and Reporting rules become mandatory: SBOM plus vendor disclosure, which extends this book's remediation tracking to the supply-chain surface Book 15 covers. January 1, 2027 — the Consolidated Rules become mandatory for all FedRAMP systems, making the daily compliance record's KSI format required rather than optional. June 11, 2027 — no new Rev5 certifications. Around August 2027 — the next NIST 800-53 release; and note the specific relevance: Release 5.2.0 (August 27, 2025) already added SI-2(7) — automated response to flaws — which lands squarely in this book's flaw-remediation scope and is the tracked, not-yet-mapped control the series is carrying as an action item. 2030/2035 — quantum-vulnerable cryptography deprecated then prohibited. The bottom bar notes BOD 22-01 KEV among the mandates already in force — the binding requirement this book's whole architecture satisfies.
-Vendor sources: https://www.fedramp.gov/20x/ | https://www.cisa.gov/news-events/directives/bod-26-04-prioritizing-security-updates-based-risk | https://csrc.nist.gov/News/2025/nist-releases-revision-to-sp-800-53-controls | uiao repo: inbox/Application Aware Networking/federal-aan-conmon-gap-roadmap.md</a:t>
+              <a:t>The evidence half — the daily compliance record that is the point of the whole pipeline. The left panel is the compliance-summary JSON produced every day: total findings, KEV findings, the P0 and P1 KEV counts, total SLA breaches, KEV-specific SLA breaches, the patch compliance rate, and the KEV catalog size and version. Its structure is deliberately designed to answer the specific questions an automated KSI engine asks about RA-5 compliance without human assembly — it is not a report a person reads and interprets; it is a data structure a machine queries. Two fields carry the compliance verdict, and they are worth calling out individually. SLABreachedKEV, on the right in teal, must be zero — it is the BOD 22-01 pass/fail, because any KEV finding past its due date is a mandatory reporting event to CISA, so a non-zero value here is not an internal metric slipping, it is a federal reporting obligation triggered. PatchComplianceRate, below it, is the FedRAMP 20x SI-2 target: 95 percent or higher across the active Critical and High finding population, measured on a 30-day rolling window. Those two numbers are what an assessor or an automated KSI check reads first. The blue bar closes the loop back to the patch-SLA-gap slide: this is exactly the artifact the assessor's third question needs — was the SLA met for this CVE on this machine — produced every day with no human assembly, so RA-5 and SI-2 are answered as a query against a file that already exists rather than a scramble to reconstruct a record across disparate tools. The full patch queue sits alongside this summary for the drill-down to a specific CVE-machine pair; the summary is what turns continuous compliance into a single readable number per day.
+Vendor sources: https://www.fedramp.gov/20x/ | https://csrc.nist.gov/pubs/sp/800/53/r5/upd1/final | uiao repo: inbox/Application Aware Networking/Book_11_FedAAN_Vulnerability_Management.qmd</a:t>
             </a:r>
             <a:endParaRPr lang="en-US" dirty="0"/>
           </a:p>
@@ -1769,8 +1772,8 @@
           <a:p>
             <a:r>
               <a:rPr lang="en-US" dirty="0"/>
-              <a:t>Closing slide — the book compressed to three bars and six asks. The frame: federal vulnerability management fails at enumeration, prioritization, and evidence; Parts 1 through 8 closed enumeration, and this book closes the other two with tooling already in the environment — Defender Vulnerability Management, the free CISA KEV feed, and Intune — not a new product acquisition. The mechanisms: MDVM rides the Arc AMA channel so the scan scope and the inventory are the same list; the daily KEV cross-reference reorders the queue by real-world exploitation, so the actually-exploited High patches ahead of the theoretical Critical; WUfB rings deliver routine patches with blast-radius control while KEV findings expedite past all rings within 24 hours; and patch currency becomes a Conditional Access condition, so a machine more than 30 days behind loses application access. The evidence: a machine-readable compliance record writes itself every morning — SLABreachedKEV must be zero for BOD 22-01, and PatchComplianceRate must be 95 percent or higher for the Critical and High population under FedRAMP 20x SI-2 — so the assessor's hardest question, was the SLA met for this CVE on this machine, becomes a query against a file that already exists. The six asks: ratify the six-tier KEV-first SLA policy as the agency standard; fund the daily KEV pipeline as an Azure Automation runbook so it runs unattended before every standup; approve the WUfB rings and the KEV expedite path; adopt patch-currency Conditional Access with a mandatory 30-day grace period to clear the backlog first; designate the daily compliance summary as the RA-5 and SI-2 KSI evidence of record; and coordinate with the CDM team to configure automated upload of the summary for the BOD 22-01 reporting obligation. All scoped to FedRAMP Moderate. Next in the series is Book 12 on data protection with Purview, then Book 13, which builds the SIEM and detection layer this book's findings and the Book 10 PIM events both feed. The Date Code identifies this version; newest code wins.
-Vendor sources: https://www.cisa.gov/news-events/directives/bod-22-01-reducing-significant-risk-known-exploited-vulnerabilities | https://www.fedramp.gov/20x/ | uiao repo: inbox/Application Aware Networking/Book_11_FedAAN_Vulnerability_Management.qmd</a:t>
+              <a:t>The retention and operations layer — how the daily record becomes the assessor-facing history and the ops-facing dashboard. First, archive daily: each daily compliance summary is written to Azure Blob Storage authenticated by Managed Identity, building a durable, tamper-evident compliance history — the record accumulates automatically rather than depending on anyone remembering to save it. Second, the 90-day trend on demand: for FedRAMP 20x, assessors typically request a 90-day or 180-day compliance record, and because the daily summaries are already stored, a trend query reads them into a compliance-rate time series — the history is retained continuously, so the 'show me your last 90 days' request is a query, not a reconstruction project. Third, the live operations dashboard: the daily JSON ingests into a Log Analytics custom table, and an Azure Monitor Workbook surfaces the compliance-rate trend, KEV finding counts, and SLA-breach alerts, so the operations team gets a dashboard instead of having to parse JSON files by hand. The blue bar enumerates the five assessment artifacts the book produces, all script-generated, so the reviewer sees the complete evidence package: the daily patch queue (the full CVE-machine finding list with priority and SLA), the daily compliance summary (the primary KSI input), the 90-day rolling trend (assessor-facing), the Arc-enrollment-versus-MDE-onboarding coverage cross-check (proving no enrolled asset is unscanned), and the SQL Server version-and-CU currency record. No manual assembly is required for any assessment request, and the history lives in Blob Storage available on demand — which is the operational definition of continuous monitoring the CA-7 and FedRAMP 20x model calls for.
+Vendor sources: https://www.fedramp.gov/20x/ | https://learn.microsoft.com/en-us/defender-vulnerability-management/defender-vulnerability-management | uiao repo: inbox/Application Aware Networking/Book_11_FedAAN_Vulnerability_Management.qmd</a:t>
             </a:r>
             <a:endParaRPr lang="en-US" dirty="0"/>
           </a:p>
@@ -1794,6 +1797,273 @@
             <a:fld id="{F7021451-1387-4CA6-816F-3879F97B5CBC}" type="slidenum">
               <a:rPr lang="en-US"/>
               <a:t>22</a:t>
+            </a:fld>
+            <a:endParaRPr lang="en-US"/>
+          </a:p>
+        </p:txBody>
+      </p:sp>
+    </p:spTree>
+    <p:extLst>
+      <p:ext uri="{BB962C8B-B14F-4D97-AF65-F5344CB8AC3E}">
+        <p14:creationId xmlns:p14="http://schemas.microsoft.com/office/powerpoint/2010/main" val="1024086991"/>
+      </p:ext>
+    </p:extLst>
+  </p:cSld>
+  <p:clrMapOvr>
+    <a:masterClrMapping/>
+  </p:clrMapOvr>
+</p:notes>
+</file>
+
+<file path=ppt/notesSlides/notesSlide23.xml><?xml version="1.0" encoding="utf-8"?>
+<p:notes xmlns:a="http://schemas.openxmlformats.org/drawingml/2006/main" xmlns:r="http://schemas.openxmlformats.org/officeDocument/2006/relationships" xmlns:p="http://schemas.openxmlformats.org/presentationml/2006/main">
+  <p:cSld>
+    <p:spTree>
+      <p:nvGrpSpPr>
+        <p:cNvPr id="1" name=""/>
+        <p:cNvGrpSpPr/>
+        <p:nvPr/>
+      </p:nvGrpSpPr>
+      <p:grpSpPr>
+        <a:xfrm>
+          <a:off x="0" y="0"/>
+          <a:ext cx="0" cy="0"/>
+          <a:chOff x="0" y="0"/>
+          <a:chExt cx="0" cy="0"/>
+        </a:xfrm>
+      </p:grpSpPr>
+      <p:sp>
+        <p:nvSpPr>
+          <p:cNvPr id="2" name="Slide Image Placeholder 1"/>
+          <p:cNvSpPr>
+            <a:spLocks noGrp="1" noRot="1" noChangeAspect="1"/>
+          </p:cNvSpPr>
+          <p:nvPr>
+            <p:ph type="sldImg"/>
+          </p:nvPr>
+        </p:nvSpPr>
+        <p:spPr/>
+      </p:sp>
+      <p:sp>
+        <p:nvSpPr>
+          <p:cNvPr id="3" name="Notes Placeholder 2"/>
+          <p:cNvSpPr>
+            <a:spLocks noGrp="1"/>
+          </p:cNvSpPr>
+          <p:nvPr>
+            <p:ph type="body" idx="1"/>
+          </p:nvPr>
+        </p:nvSpPr>
+        <p:spPr/>
+        <p:txBody>
+          <a:bodyPr/>
+          <a:lstStyle/>
+          <a:p>
+            <a:r>
+              <a:rPr lang="en-US" dirty="0"/>
+              <a:t>The control-closure table for Part 11, before-and-after by control. RA-5 Vulnerability Monitoring and Scanning: quarterly Nessus runs with cloud assets excluded and no continuous monitoring, replaced by continuous MDVM through the Arc channel covering all enrolled assets with a daily finding export. RA-5(2) Update Vulnerabilities to Be Scanned: the CVE database updated only on the scanner subscription cycle with no KEV cross-reference, replaced by the KEV catalog pulled daily and a scan scope that grows with the Arc inventory automatically. RA-5(5) Privileged Access for Scanning: a per-system privileged scanner account managed by hand, replaced by Managed Identity on the AMA channel with no per-system credential — the credential-elimination win from the integration slide. SI-2 Flaw Remediation: an SLA living in a policy document with no automated tracking, replaced by BOD 22-01 tiers with an SLA computed per CVE-machine pair and a daily breach report. SI-2(2) Automated Flaw Remediation Status: checked only at assessment time, replaced by the daily patch-queue JSON, the Log Analytics workbook, and the 90-day trend on demand. SI-5 Security Alerts, Advisories, and Directives: the CISA KEV consumed manually by email subscription, replaced by the KEV JSON cross-referenced against every finding within 24 hours. CM-7 and CM-7(1) Least Functionality and Periodic Review: software inventory not maintained continuously and an annual review, replaced by continuous MDVM software and configuration inventory with drift flagged in the Defender portal. The red bar is the closure-necessity argument that connects this book to the series' foundation: RA-5 requires vulnerability monitoring of the whole system, not the subset a scanner happens to find. A scanner enumerates only what answers it — it measures drift from an inventory, it cannot author one. The authoritative inventory is CM-8, and CM-8 closes only through the IPAM and DDI plane established in Book 01, where every address, lease, and name a component holds exists before any scan runs. The Arc enrollment gate in this document inherits that same property — scan scope and inventory are the same list — which is why no scan cadence, scanner configuration, or scoring model closes RA-5 over components the inventory cannot enumerate. You cannot scan what you cannot enumerate; this book's continuous scanning is only as complete as Book 01's inventory makes it, and that dependency is a strength, not a gap, because it is explicit and mechanized.
+Vendor sources: https://csrc.nist.gov/pubs/sp/800/53/r5/upd1/final | https://www.cisa.gov/news-events/directives/bod-22-01-reducing-significant-risk-known-exploited-vulnerabilities | uiao repo: inbox/Application Aware Networking/Book_11_FedAAN_Vulnerability_Management.qmd</a:t>
+            </a:r>
+            <a:endParaRPr lang="en-US" dirty="0"/>
+          </a:p>
+        </p:txBody>
+      </p:sp>
+      <p:sp>
+        <p:nvSpPr>
+          <p:cNvPr id="4" name="Slide Number Placeholder 3"/>
+          <p:cNvSpPr>
+            <a:spLocks noGrp="1"/>
+          </p:cNvSpPr>
+          <p:nvPr>
+            <p:ph type="sldNum" sz="quarter" idx="10"/>
+          </p:nvPr>
+        </p:nvSpPr>
+        <p:spPr/>
+        <p:txBody>
+          <a:bodyPr/>
+          <a:lstStyle/>
+          <a:p>
+            <a:fld id="{F7021451-1387-4CA6-816F-3879F97B5CBC}" type="slidenum">
+              <a:rPr lang="en-US"/>
+              <a:t>23</a:t>
+            </a:fld>
+            <a:endParaRPr lang="en-US"/>
+          </a:p>
+        </p:txBody>
+      </p:sp>
+    </p:spTree>
+    <p:extLst>
+      <p:ext uri="{BB962C8B-B14F-4D97-AF65-F5344CB8AC3E}">
+        <p14:creationId xmlns:p14="http://schemas.microsoft.com/office/powerpoint/2010/main" val="1024086991"/>
+      </p:ext>
+    </p:extLst>
+  </p:cSld>
+  <p:clrMapOvr>
+    <a:masterClrMapping/>
+  </p:clrMapOvr>
+</p:notes>
+</file>
+
+<file path=ppt/notesSlides/notesSlide24.xml><?xml version="1.0" encoding="utf-8"?>
+<p:notes xmlns:a="http://schemas.openxmlformats.org/drawingml/2006/main" xmlns:r="http://schemas.openxmlformats.org/officeDocument/2006/relationships" xmlns:p="http://schemas.openxmlformats.org/presentationml/2006/main">
+  <p:cSld>
+    <p:spTree>
+      <p:nvGrpSpPr>
+        <p:cNvPr id="1" name=""/>
+        <p:cNvGrpSpPr/>
+        <p:nvPr/>
+      </p:nvGrpSpPr>
+      <p:grpSpPr>
+        <a:xfrm>
+          <a:off x="0" y="0"/>
+          <a:ext cx="0" cy="0"/>
+          <a:chOff x="0" y="0"/>
+          <a:chExt cx="0" cy="0"/>
+        </a:xfrm>
+      </p:grpSpPr>
+      <p:sp>
+        <p:nvSpPr>
+          <p:cNvPr id="2" name="Slide Image Placeholder 1"/>
+          <p:cNvSpPr>
+            <a:spLocks noGrp="1" noRot="1" noChangeAspect="1"/>
+          </p:cNvSpPr>
+          <p:nvPr>
+            <p:ph type="sldImg"/>
+          </p:nvPr>
+        </p:nvSpPr>
+        <p:spPr/>
+      </p:sp>
+      <p:sp>
+        <p:nvSpPr>
+          <p:cNvPr id="3" name="Notes Placeholder 2"/>
+          <p:cNvSpPr>
+            <a:spLocks noGrp="1"/>
+          </p:cNvSpPr>
+          <p:nvPr>
+            <p:ph type="body" idx="1"/>
+          </p:nvPr>
+        </p:nvSpPr>
+        <p:spPr/>
+        <p:txBody>
+          <a:bodyPr/>
+          <a:lstStyle/>
+          <a:p>
+            <a:r>
+              <a:rPr lang="en-US" dirty="0"/>
+              <a:t>The federal compliance clock — the series-standard slide; the fully-sourced version with the elapsed baseline lives in the Federal AAN / ConMon Gap Roadmap, the series' single source of truth for dates (verified 2026-07-07). For Book 11 this slide is unusually load-bearing, because vulnerability management is exactly what several of these deadlines regulate. Walk the rows: August 3 and 31, 2026 — FedRAMP 20x submission windows open, the GCC Moderate window. August 7, 2026 — BOD 26-04 (issued June 10, 2026) requires agency vulnerability-management policies to support risk-based remediation under its four-variable model: exposure, KEV listing, exploit automatability, and technical impact — this is the directive that directly governs the prioritization scheme this entire book implements, and the KEV-listing variable is the KEV intersection made federal policy. September 21, 2026 — FIPS 140-2 certificates move to NIST's Historical List. December 7, 2026 — BOD 26-04's remediation timelines take force AND FedRAMP's Vulnerability Detection and Response / Vulnerability Evaluation and Reporting rules become mandatory: SBOM plus vendor disclosure, which extends this book's remediation tracking to the supply-chain surface Book 15 covers. January 1, 2027 — the Consolidated Rules become mandatory for all FedRAMP systems, making the daily compliance record's KSI format required rather than optional. June 11, 2027 — no new Rev5 certifications. Around August 2027 — the next NIST 800-53 release; and note the specific relevance: Release 5.2.0 (August 27, 2025) already added SI-2(7) — automated response to flaws — which lands squarely in this book's flaw-remediation scope and is the tracked, not-yet-mapped control the series is carrying as an action item. 2030/2035 — quantum-vulnerable cryptography deprecated then prohibited. The bottom bar notes BOD 22-01 KEV among the mandates already in force — the binding requirement this book's whole architecture satisfies.
+Vendor sources: https://www.fedramp.gov/20x/ | https://www.cisa.gov/news-events/directives/bod-26-04-prioritizing-security-updates-based-risk | https://csrc.nist.gov/News/2025/nist-releases-revision-to-sp-800-53-controls | uiao repo: inbox/Application Aware Networking/federal-aan-conmon-gap-roadmap.md</a:t>
+            </a:r>
+            <a:endParaRPr lang="en-US" dirty="0"/>
+          </a:p>
+        </p:txBody>
+      </p:sp>
+      <p:sp>
+        <p:nvSpPr>
+          <p:cNvPr id="4" name="Slide Number Placeholder 3"/>
+          <p:cNvSpPr>
+            <a:spLocks noGrp="1"/>
+          </p:cNvSpPr>
+          <p:nvPr>
+            <p:ph type="sldNum" sz="quarter" idx="10"/>
+          </p:nvPr>
+        </p:nvSpPr>
+        <p:spPr/>
+        <p:txBody>
+          <a:bodyPr/>
+          <a:lstStyle/>
+          <a:p>
+            <a:fld id="{F7021451-1387-4CA6-816F-3879F97B5CBC}" type="slidenum">
+              <a:rPr lang="en-US"/>
+              <a:t>24</a:t>
+            </a:fld>
+            <a:endParaRPr lang="en-US"/>
+          </a:p>
+        </p:txBody>
+      </p:sp>
+    </p:spTree>
+    <p:extLst>
+      <p:ext uri="{BB962C8B-B14F-4D97-AF65-F5344CB8AC3E}">
+        <p14:creationId xmlns:p14="http://schemas.microsoft.com/office/powerpoint/2010/main" val="1024086991"/>
+      </p:ext>
+    </p:extLst>
+  </p:cSld>
+  <p:clrMapOvr>
+    <a:masterClrMapping/>
+  </p:clrMapOvr>
+</p:notes>
+</file>
+
+<file path=ppt/notesSlides/notesSlide25.xml><?xml version="1.0" encoding="utf-8"?>
+<p:notes xmlns:a="http://schemas.openxmlformats.org/drawingml/2006/main" xmlns:r="http://schemas.openxmlformats.org/officeDocument/2006/relationships" xmlns:p="http://schemas.openxmlformats.org/presentationml/2006/main">
+  <p:cSld>
+    <p:spTree>
+      <p:nvGrpSpPr>
+        <p:cNvPr id="1" name=""/>
+        <p:cNvGrpSpPr/>
+        <p:nvPr/>
+      </p:nvGrpSpPr>
+      <p:grpSpPr>
+        <a:xfrm>
+          <a:off x="0" y="0"/>
+          <a:ext cx="0" cy="0"/>
+          <a:chOff x="0" y="0"/>
+          <a:chExt cx="0" cy="0"/>
+        </a:xfrm>
+      </p:grpSpPr>
+      <p:sp>
+        <p:nvSpPr>
+          <p:cNvPr id="2" name="Slide Image Placeholder 1"/>
+          <p:cNvSpPr>
+            <a:spLocks noGrp="1" noRot="1" noChangeAspect="1"/>
+          </p:cNvSpPr>
+          <p:nvPr>
+            <p:ph type="sldImg"/>
+          </p:nvPr>
+        </p:nvSpPr>
+        <p:spPr/>
+      </p:sp>
+      <p:sp>
+        <p:nvSpPr>
+          <p:cNvPr id="3" name="Notes Placeholder 2"/>
+          <p:cNvSpPr>
+            <a:spLocks noGrp="1"/>
+          </p:cNvSpPr>
+          <p:nvPr>
+            <p:ph type="body" idx="1"/>
+          </p:nvPr>
+        </p:nvSpPr>
+        <p:spPr/>
+        <p:txBody>
+          <a:bodyPr/>
+          <a:lstStyle/>
+          <a:p>
+            <a:r>
+              <a:rPr lang="en-US" dirty="0"/>
+              <a:t>Closing slide — the book compressed to three bars and six asks. The frame: federal vulnerability management fails at enumeration, prioritization, and evidence; Parts 1 through 8 closed enumeration, and this book closes the other two with tooling already in the environment — Defender Vulnerability Management, the free CISA KEV feed, and Intune — not a new product acquisition. The mechanisms: MDVM rides the Arc AMA channel so the scan scope and the inventory are the same list; the daily KEV cross-reference reorders the queue by real-world exploitation, so the actually-exploited High patches ahead of the theoretical Critical; WUfB rings deliver routine patches with blast-radius control while KEV findings expedite past all rings within 24 hours; and patch currency becomes a Conditional Access condition, so a machine more than 30 days behind loses application access. The evidence: a machine-readable compliance record writes itself every morning — SLABreachedKEV must be zero for BOD 22-01, and PatchComplianceRate must be 95 percent or higher for the Critical and High population under FedRAMP 20x SI-2 — so the assessor's hardest question, was the SLA met for this CVE on this machine, becomes a query against a file that already exists. The six asks: ratify the six-tier KEV-first SLA policy as the agency standard; fund the daily KEV pipeline as an Azure Automation runbook so it runs unattended before every standup; approve the WUfB rings and the KEV expedite path; adopt patch-currency Conditional Access with a mandatory 30-day grace period to clear the backlog first; designate the daily compliance summary as the RA-5 and SI-2 KSI evidence of record; and coordinate with the CDM team to configure automated upload of the summary for the BOD 22-01 reporting obligation. All scoped to FedRAMP Moderate. Next in the series is Book 12 on data protection with Purview, then Book 13, which builds the SIEM and detection layer this book's findings and the Book 10 PIM events both feed. The Date Code identifies this version; newest code wins.
+Vendor sources: https://www.cisa.gov/news-events/directives/bod-22-01-reducing-significant-risk-known-exploited-vulnerabilities | https://www.fedramp.gov/20x/ | uiao repo: inbox/Application Aware Networking/Book_11_FedAAN_Vulnerability_Management.qmd</a:t>
+            </a:r>
+            <a:endParaRPr lang="en-US" dirty="0"/>
+          </a:p>
+        </p:txBody>
+      </p:sp>
+      <p:sp>
+        <p:nvSpPr>
+          <p:cNvPr id="4" name="Slide Number Placeholder 3"/>
+          <p:cNvSpPr>
+            <a:spLocks noGrp="1"/>
+          </p:cNvSpPr>
+          <p:nvPr>
+            <p:ph type="sldNum" sz="quarter" idx="10"/>
+          </p:nvPr>
+        </p:nvSpPr>
+        <p:spPr/>
+        <p:txBody>
+          <a:bodyPr/>
+          <a:lstStyle/>
+          <a:p>
+            <a:fld id="{F7021451-1387-4CA6-816F-3879F97B5CBC}" type="slidenum">
+              <a:rPr lang="en-US"/>
+              <a:t>25</a:t>
             </a:fld>
             <a:endParaRPr lang="en-US"/>
           </a:p>
@@ -3400,7 +3670,7 @@
                 <a:ea typeface="Arial" pitchFamily="34" charset="-122"/>
                 <a:cs typeface="Arial" pitchFamily="34" charset="-120"/>
               </a:rPr>
-              <a:t>Date Code: 2026-07-08 13:21 ET</a:t>
+              <a:t>Date Code: 2026-07-08 13:32 ET</a:t>
             </a:r>
             <a:endParaRPr lang="en-US" sz="1000" dirty="0"/>
           </a:p>
@@ -3615,7 +3885,7 @@
                 <a:ea typeface="Arial" pitchFamily="34" charset="-122"/>
                 <a:cs typeface="Arial" pitchFamily="34" charset="-120"/>
               </a:rPr>
-              <a:t>Federal AAN — Book 11 Vulnerability Management · CSI Team Draft — Internal · FedRAMP Moderate · Date Code 2026-07-08 13:21 ET</a:t>
+              <a:t>Federal AAN — Book 11 Vulnerability Management · CSI Team Draft — Internal · FedRAMP Moderate · Date Code 2026-07-08 13:32 ET</a:t>
             </a:r>
             <a:endParaRPr lang="en-US" sz="800" dirty="0"/>
           </a:p>
@@ -5562,7 +5832,7 @@
                 <a:ea typeface="Arial" pitchFamily="34" charset="-122"/>
                 <a:cs typeface="Arial" pitchFamily="34" charset="-120"/>
               </a:rPr>
-              <a:t>Federal AAN — Book 11 Vulnerability Management · CSI Team Draft — Internal · FedRAMP Moderate · Date Code 2026-07-08 13:21 ET</a:t>
+              <a:t>Federal AAN — Book 11 Vulnerability Management · CSI Team Draft — Internal · FedRAMP Moderate · Date Code 2026-07-08 13:32 ET</a:t>
             </a:r>
             <a:endParaRPr lang="en-US" sz="800" dirty="0"/>
           </a:p>
@@ -6408,7 +6678,7 @@
                 <a:ea typeface="Arial" pitchFamily="34" charset="-122"/>
                 <a:cs typeface="Arial" pitchFamily="34" charset="-120"/>
               </a:rPr>
-              <a:t>Federal AAN — Book 11 Vulnerability Management · CSI Team Draft — Internal · FedRAMP Moderate · Date Code 2026-07-08 13:21 ET</a:t>
+              <a:t>Federal AAN — Book 11 Vulnerability Management · CSI Team Draft — Internal · FedRAMP Moderate · Date Code 2026-07-08 13:32 ET</a:t>
             </a:r>
             <a:endParaRPr lang="en-US" sz="800" dirty="0"/>
           </a:p>
@@ -7254,7 +7524,7 @@
                 <a:ea typeface="Arial" pitchFamily="34" charset="-122"/>
                 <a:cs typeface="Arial" pitchFamily="34" charset="-120"/>
               </a:rPr>
-              <a:t>Federal AAN — Book 11 Vulnerability Management · CSI Team Draft — Internal · FedRAMP Moderate · Date Code 2026-07-08 13:21 ET</a:t>
+              <a:t>Federal AAN — Book 11 Vulnerability Management · CSI Team Draft — Internal · FedRAMP Moderate · Date Code 2026-07-08 13:32 ET</a:t>
             </a:r>
             <a:endParaRPr lang="en-US" sz="800" dirty="0"/>
           </a:p>
@@ -8100,7 +8370,7 @@
                 <a:ea typeface="Arial" pitchFamily="34" charset="-122"/>
                 <a:cs typeface="Arial" pitchFamily="34" charset="-120"/>
               </a:rPr>
-              <a:t>Federal AAN — Book 11 Vulnerability Management · CSI Team Draft — Internal · FedRAMP Moderate · Date Code 2026-07-08 13:21 ET</a:t>
+              <a:t>Federal AAN — Book 11 Vulnerability Management · CSI Team Draft — Internal · FedRAMP Moderate · Date Code 2026-07-08 13:32 ET</a:t>
             </a:r>
             <a:endParaRPr lang="en-US" sz="800" dirty="0"/>
           </a:p>
@@ -8946,7 +9216,7 @@
                 <a:ea typeface="Arial" pitchFamily="34" charset="-122"/>
                 <a:cs typeface="Arial" pitchFamily="34" charset="-120"/>
               </a:rPr>
-              <a:t>Federal AAN — Book 11 Vulnerability Management · CSI Team Draft — Internal · FedRAMP Moderate · Date Code 2026-07-08 13:21 ET</a:t>
+              <a:t>Federal AAN — Book 11 Vulnerability Management · CSI Team Draft — Internal · FedRAMP Moderate · Date Code 2026-07-08 13:32 ET</a:t>
             </a:r>
             <a:endParaRPr lang="en-US" sz="800" dirty="0"/>
           </a:p>
@@ -9666,7 +9936,7 @@
                 <a:ea typeface="Arial" pitchFamily="34" charset="-122"/>
                 <a:cs typeface="Arial" pitchFamily="34" charset="-120"/>
               </a:rPr>
-              <a:t>AUTOMATED PATCH DELIVERY — ENFORCEMENT</a:t>
+              <a:t>AUTOMATED DELIVERY — THE NON-WINDOWS SURFACE</a:t>
             </a:r>
             <a:endParaRPr lang="en-US" sz="1100" dirty="0"/>
           </a:p>
@@ -9697,7 +9967,7 @@
               <a:buNone/>
             </a:pPr>
             <a:r>
-              <a:rPr lang="en-US" sz="2300" b="1" dirty="0">
+              <a:rPr lang="en-US" sz="2200" b="1" dirty="0">
                 <a:solidFill>
                   <a:srgbClr val="1F3A5F"/>
                 </a:solidFill>
@@ -9705,9 +9975,9 @@
                 <a:ea typeface="Arial" pitchFamily="34" charset="-122"/>
                 <a:cs typeface="Arial" pitchFamily="34" charset="-120"/>
               </a:rPr>
-              <a:t>Patch currency becomes an access condition</a:t>
-            </a:r>
-            <a:endParaRPr lang="en-US" sz="2300" dirty="0"/>
+              <a:t>Remediation beyond Windows: same discipline, different delivery</a:t>
+            </a:r>
+            <a:endParaRPr lang="en-US" sz="2200" dirty="0"/>
           </a:p>
         </p:txBody>
       </p:sp>
@@ -9744,7 +10014,7 @@
                 <a:ea typeface="Arial" pitchFamily="34" charset="-122"/>
                 <a:cs typeface="Arial" pitchFamily="34" charset="-120"/>
               </a:rPr>
-              <a:t>Federal AAN — Book 11 Vulnerability Management · CSI Team Draft — Internal · FedRAMP Moderate · Date Code 2026-07-08 13:21 ET</a:t>
+              <a:t>Federal AAN — Book 11 Vulnerability Management · CSI Team Draft — Internal · FedRAMP Moderate · Date Code 2026-07-08 13:32 ET</a:t>
             </a:r>
             <a:endParaRPr lang="en-US" sz="800" dirty="0"/>
           </a:p>
@@ -9797,92 +10067,12 @@
         </p:nvSpPr>
         <p:spPr>
           <a:xfrm>
-            <a:off x="502920" y="1371600"/>
-            <a:ext cx="8229600" cy="914400"/>
+            <a:off x="502920" y="1298448"/>
+            <a:ext cx="4041648" cy="2514600"/>
           </a:xfrm>
           <a:prstGeom prst="roundRect">
             <a:avLst>
-              <a:gd name="adj" fmla="val 7000"/>
-            </a:avLst>
-          </a:prstGeom>
-          <a:solidFill>
-            <a:srgbClr val="F3F5F8"/>
-          </a:solidFill>
-          <a:ln w="9525">
-            <a:solidFill>
-              <a:srgbClr val="C9D4E0"/>
-            </a:solidFill>
-            <a:prstDash val="solid"/>
-          </a:ln>
-        </p:spPr>
-      </p:sp>
-      <p:sp>
-        <p:nvSpPr>
-          <p:cNvPr id="7" name="Text 5"/>
-          <p:cNvSpPr/>
-          <p:nvPr/>
-        </p:nvSpPr>
-        <p:spPr>
-          <a:xfrm>
-            <a:off x="731520" y="1463040"/>
-            <a:ext cx="7772400" cy="749808"/>
-          </a:xfrm>
-          <a:prstGeom prst="rect">
-            <a:avLst/>
-          </a:prstGeom>
-          <a:noFill/>
-          <a:ln/>
-        </p:spPr>
-        <p:txBody>
-          <a:bodyPr wrap="square" lIns="0" tIns="0" rIns="0" bIns="0" rtlCol="0" anchor="ctr"/>
-          <a:lstStyle/>
-          <a:p>
-            <a:pPr indent="0" marL="0">
-              <a:buNone/>
-            </a:pPr>
-            <a:r>
-              <a:rPr lang="en-US" sz="1050" b="1" dirty="0">
-                <a:solidFill>
-                  <a:srgbClr val="1F3A5F"/>
-                </a:solidFill>
-                <a:latin typeface="Arial" pitchFamily="34" charset="0"/>
-                <a:ea typeface="Arial" pitchFamily="34" charset="-122"/>
-                <a:cs typeface="Arial" pitchFamily="34" charset="-120"/>
-              </a:rPr>
-              <a:t>Rings control WHEN a patch is delivered. The compliance policy controls WHAT COUNTS as current. </a:t>
-            </a:r>
-            <a:pPr indent="0" marL="0">
-              <a:buNone/>
-            </a:pPr>
-            <a:r>
-              <a:rPr lang="en-US" sz="1050" dirty="0">
-                <a:solidFill>
-                  <a:srgbClr val="1E293B"/>
-                </a:solidFill>
-                <a:latin typeface="Arial" pitchFamily="34" charset="0"/>
-                <a:ea typeface="Arial" pitchFamily="34" charset="-122"/>
-                <a:cs typeface="Arial" pitchFamily="34" charset="-120"/>
-              </a:rPr>
-              <a:t>A machine more than 30 days behind the required patch level is marked non-compliant — which triggers the Conditional Access gate: it loses access to enterprise applications until it is patched.</a:t>
-            </a:r>
-            <a:endParaRPr lang="en-US" sz="1050" dirty="0"/>
-          </a:p>
-        </p:txBody>
-      </p:sp>
-      <p:sp>
-        <p:nvSpPr>
-          <p:cNvPr id="8" name="Shape 6"/>
-          <p:cNvSpPr/>
-          <p:nvPr/>
-        </p:nvSpPr>
-        <p:spPr>
-          <a:xfrm>
-            <a:off x="502920" y="2468880"/>
-            <a:ext cx="2688336" cy="1371600"/>
-          </a:xfrm>
-          <a:prstGeom prst="roundRect">
-            <a:avLst>
-              <a:gd name="adj" fmla="val 4667"/>
+              <a:gd name="adj" fmla="val 2545"/>
             </a:avLst>
           </a:prstGeom>
           <a:solidFill>
@@ -9905,179 +10095,185 @@
       </p:sp>
       <p:sp>
         <p:nvSpPr>
-          <p:cNvPr id="9" name="Shape 7"/>
-          <p:cNvSpPr/>
-          <p:nvPr/>
-        </p:nvSpPr>
-        <p:spPr>
-          <a:xfrm>
-            <a:off x="612648" y="2578608"/>
-            <a:ext cx="292608" cy="292608"/>
-          </a:xfrm>
-          <a:prstGeom prst="ellipse">
-            <a:avLst/>
-          </a:prstGeom>
-          <a:solidFill>
-            <a:srgbClr val="1F3A5F"/>
-          </a:solidFill>
-          <a:ln/>
-        </p:spPr>
-      </p:sp>
-      <p:sp>
-        <p:nvSpPr>
-          <p:cNvPr id="10" name="Text 8"/>
-          <p:cNvSpPr/>
-          <p:nvPr/>
-        </p:nvSpPr>
-        <p:spPr>
-          <a:xfrm>
-            <a:off x="612648" y="2564892"/>
-            <a:ext cx="292608" cy="292608"/>
-          </a:xfrm>
-          <a:prstGeom prst="rect">
-            <a:avLst/>
-          </a:prstGeom>
-          <a:noFill/>
-          <a:ln/>
-        </p:spPr>
-        <p:txBody>
-          <a:bodyPr wrap="square" lIns="0" tIns="0" rIns="0" bIns="0" rtlCol="0" anchor="ctr"/>
-          <a:lstStyle/>
-          <a:p>
-            <a:pPr algn="ctr" indent="0" marL="0">
-              <a:buNone/>
-            </a:pPr>
-            <a:r>
-              <a:rPr lang="en-US" sz="1300" b="1" dirty="0">
-                <a:solidFill>
-                  <a:srgbClr val="FFFFFF"/>
-                </a:solidFill>
-                <a:latin typeface="Arial" pitchFamily="34" charset="0"/>
-                <a:ea typeface="Arial" pitchFamily="34" charset="-122"/>
-                <a:cs typeface="Arial" pitchFamily="34" charset="-120"/>
-              </a:rPr>
-              <a:t>1</a:t>
-            </a:r>
-            <a:endParaRPr lang="en-US" sz="1300" dirty="0"/>
-          </a:p>
-        </p:txBody>
-      </p:sp>
-      <p:sp>
-        <p:nvSpPr>
-          <p:cNvPr id="11" name="Text 9"/>
-          <p:cNvSpPr/>
-          <p:nvPr/>
-        </p:nvSpPr>
-        <p:spPr>
-          <a:xfrm>
-            <a:off x="978408" y="2542032"/>
-            <a:ext cx="2148840" cy="365760"/>
-          </a:xfrm>
-          <a:prstGeom prst="rect">
-            <a:avLst/>
-          </a:prstGeom>
-          <a:noFill/>
-          <a:ln/>
-        </p:spPr>
-        <p:txBody>
-          <a:bodyPr wrap="square" lIns="0" tIns="0" rIns="0" bIns="0" rtlCol="0" anchor="ctr"/>
-          <a:lstStyle/>
-          <a:p>
-            <a:pPr indent="0" marL="0">
-              <a:buNone/>
-            </a:pPr>
-            <a:r>
-              <a:rPr lang="en-US" sz="1050" b="1" dirty="0">
-                <a:solidFill>
-                  <a:srgbClr val="1E293B"/>
-                </a:solidFill>
-                <a:latin typeface="Arial" pitchFamily="34" charset="0"/>
-                <a:ea typeface="Arial" pitchFamily="34" charset="-122"/>
-                <a:cs typeface="Arial" pitchFamily="34" charset="-120"/>
-              </a:rPr>
-              <a:t>Compliance policy</a:t>
-            </a:r>
-            <a:endParaRPr lang="en-US" sz="1050" dirty="0"/>
-          </a:p>
-        </p:txBody>
-      </p:sp>
-      <p:sp>
-        <p:nvSpPr>
-          <p:cNvPr id="12" name="Text 10"/>
-          <p:cNvSpPr/>
-          <p:nvPr/>
-        </p:nvSpPr>
-        <p:spPr>
-          <a:xfrm>
-            <a:off x="630936" y="2962656"/>
-            <a:ext cx="2432304" cy="822960"/>
-          </a:xfrm>
-          <a:prstGeom prst="rect">
-            <a:avLst/>
-          </a:prstGeom>
-          <a:noFill/>
-          <a:ln/>
-        </p:spPr>
-        <p:txBody>
-          <a:bodyPr wrap="square" lIns="0" tIns="0" rIns="0" bIns="0" rtlCol="0" anchor="ctr"/>
-          <a:lstStyle/>
-          <a:p>
-            <a:pPr indent="0" marL="0">
-              <a:buNone/>
-            </a:pPr>
-            <a:r>
-              <a:rPr lang="en-US" sz="850" dirty="0">
-                <a:solidFill>
-                  <a:srgbClr val="5B6B7C"/>
-                </a:solidFill>
-                <a:latin typeface="Arial" pitchFamily="34" charset="0"/>
-                <a:ea typeface="Arial" pitchFamily="34" charset="-122"/>
-                <a:cs typeface="Arial" pitchFamily="34" charset="-120"/>
-              </a:rPr>
-              <a:t>Machine &gt;30 days behind → non-compliant. Also requires firewall on, Defender + real-time protection, Secure Boot.</a:t>
-            </a:r>
-            <a:endParaRPr lang="en-US" sz="850" dirty="0"/>
-          </a:p>
-        </p:txBody>
-      </p:sp>
-      <p:sp>
-        <p:nvSpPr>
-          <p:cNvPr id="13" name="Shape 11"/>
-          <p:cNvSpPr/>
-          <p:nvPr/>
-        </p:nvSpPr>
-        <p:spPr>
-          <a:xfrm>
-            <a:off x="3200400" y="3154680"/>
-            <a:ext cx="100584" cy="0"/>
-          </a:xfrm>
-          <a:prstGeom prst="line">
-            <a:avLst/>
-          </a:prstGeom>
-          <a:noFill/>
-          <a:ln w="25400">
-            <a:solidFill>
-              <a:srgbClr val="5B6B7C"/>
-            </a:solidFill>
-            <a:prstDash val="solid"/>
-            <a:tailEnd type="triangle"/>
-          </a:ln>
-        </p:spPr>
-      </p:sp>
-      <p:sp>
-        <p:nvSpPr>
-          <p:cNvPr id="14" name="Shape 12"/>
-          <p:cNvSpPr/>
-          <p:nvPr/>
-        </p:nvSpPr>
-        <p:spPr>
-          <a:xfrm>
-            <a:off x="3300984" y="2468880"/>
-            <a:ext cx="2688336" cy="1371600"/>
+          <p:cNvPr id="7" name="Shape 5"/>
+          <p:cNvSpPr/>
+          <p:nvPr/>
+        </p:nvSpPr>
+        <p:spPr>
+          <a:xfrm>
+            <a:off x="630936" y="1426464"/>
+            <a:ext cx="3785616" cy="402336"/>
           </a:xfrm>
           <a:prstGeom prst="roundRect">
             <a:avLst>
-              <a:gd name="adj" fmla="val 4667"/>
+              <a:gd name="adj" fmla="val 13636"/>
+            </a:avLst>
+          </a:prstGeom>
+          <a:solidFill>
+            <a:srgbClr val="EDF3F9"/>
+          </a:solidFill>
+          <a:ln/>
+        </p:spPr>
+      </p:sp>
+      <p:sp>
+        <p:nvSpPr>
+          <p:cNvPr id="8" name="Text 6"/>
+          <p:cNvSpPr/>
+          <p:nvPr/>
+        </p:nvSpPr>
+        <p:spPr>
+          <a:xfrm>
+            <a:off x="758952" y="1426464"/>
+            <a:ext cx="3584448" cy="402336"/>
+          </a:xfrm>
+          <a:prstGeom prst="rect">
+            <a:avLst/>
+          </a:prstGeom>
+          <a:noFill/>
+          <a:ln/>
+        </p:spPr>
+        <p:txBody>
+          <a:bodyPr wrap="square" lIns="0" tIns="0" rIns="0" bIns="0" rtlCol="0" anchor="ctr"/>
+          <a:lstStyle/>
+          <a:p>
+            <a:pPr indent="0" marL="0">
+              <a:buNone/>
+            </a:pPr>
+            <a:r>
+              <a:rPr lang="en-US" sz="1200" b="1" dirty="0">
+                <a:solidFill>
+                  <a:srgbClr val="1F3A5F"/>
+                </a:solidFill>
+                <a:latin typeface="Arial" pitchFamily="34" charset="0"/>
+                <a:ea typeface="Arial" pitchFamily="34" charset="-122"/>
+                <a:cs typeface="Arial" pitchFamily="34" charset="-120"/>
+              </a:rPr>
+              <a:t>Linux (Arc-enrolled)</a:t>
+            </a:r>
+            <a:endParaRPr lang="en-US" sz="1200" dirty="0"/>
+          </a:p>
+        </p:txBody>
+      </p:sp>
+      <p:sp>
+        <p:nvSpPr>
+          <p:cNvPr id="9" name="Text 7"/>
+          <p:cNvSpPr/>
+          <p:nvPr/>
+        </p:nvSpPr>
+        <p:spPr>
+          <a:xfrm>
+            <a:off x="685800" y="1920240"/>
+            <a:ext cx="3694176" cy="1764792"/>
+          </a:xfrm>
+          <a:prstGeom prst="rect">
+            <a:avLst/>
+          </a:prstGeom>
+          <a:noFill/>
+          <a:ln/>
+        </p:spPr>
+        <p:txBody>
+          <a:bodyPr wrap="square" lIns="0" tIns="0" rIns="0" bIns="0" rtlCol="0" anchor="ctr"/>
+          <a:lstStyle/>
+          <a:p>
+            <a:pPr marL="342900" indent="-342900">
+              <a:spcAft>
+                <a:spcPts val="500"/>
+              </a:spcAft>
+              <a:buSzPct val="100000"/>
+              <a:buChar char="•"/>
+            </a:pPr>
+            <a:r>
+              <a:rPr lang="en-US" sz="900" dirty="0">
+                <a:solidFill>
+                  <a:srgbClr val="1E293B"/>
+                </a:solidFill>
+                <a:latin typeface="Arial" pitchFamily="34" charset="0"/>
+                <a:ea typeface="Arial" pitchFamily="34" charset="-122"/>
+                <a:cs typeface="Arial" pitchFamily="34" charset="-120"/>
+              </a:rPr>
+              <a:t>Azure Update Manager rides the SAME Arc channel — no new agent</a:t>
+            </a:r>
+            <a:endParaRPr lang="en-US" sz="900" dirty="0"/>
+          </a:p>
+          <a:p>
+            <a:pPr marL="342900" indent="-342900">
+              <a:spcAft>
+                <a:spcPts val="500"/>
+              </a:spcAft>
+              <a:buSzPct val="100000"/>
+              <a:buChar char="•"/>
+            </a:pPr>
+            <a:r>
+              <a:rPr lang="en-US" sz="900" dirty="0">
+                <a:solidFill>
+                  <a:srgbClr val="1E293B"/>
+                </a:solidFill>
+                <a:latin typeface="Arial" pitchFamily="34" charset="0"/>
+                <a:ea typeface="Arial" pitchFamily="34" charset="-122"/>
+                <a:cs typeface="Arial" pitchFamily="34" charset="-120"/>
+              </a:rPr>
+              <a:t>Assessment + scheduled patching with maintenance windows for RHEL, Ubuntu, SUSE</a:t>
+            </a:r>
+            <a:endParaRPr lang="en-US" sz="900" dirty="0"/>
+          </a:p>
+          <a:p>
+            <a:pPr marL="342900" indent="-342900">
+              <a:spcAft>
+                <a:spcPts val="500"/>
+              </a:spcAft>
+              <a:buSzPct val="100000"/>
+              <a:buChar char="•"/>
+            </a:pPr>
+            <a:r>
+              <a:rPr lang="en-US" sz="900" dirty="0">
+                <a:solidFill>
+                  <a:srgbClr val="1E293B"/>
+                </a:solidFill>
+                <a:latin typeface="Arial" pitchFamily="34" charset="0"/>
+                <a:ea typeface="Arial" pitchFamily="34" charset="-122"/>
+                <a:cs typeface="Arial" pitchFamily="34" charset="-120"/>
+              </a:rPr>
+              <a:t>Dynamic scoping by tag; a KEV finding triggers an on-demand patch run — the Linux expedite path</a:t>
+            </a:r>
+            <a:endParaRPr lang="en-US" sz="900" dirty="0"/>
+          </a:p>
+          <a:p>
+            <a:pPr marL="342900" indent="-342900">
+              <a:spcAft>
+                <a:spcPts val="500"/>
+              </a:spcAft>
+              <a:buSzPct val="100000"/>
+              <a:buChar char="•"/>
+            </a:pPr>
+            <a:r>
+              <a:rPr lang="en-US" sz="900" dirty="0">
+                <a:solidFill>
+                  <a:srgbClr val="1E293B"/>
+                </a:solidFill>
+                <a:latin typeface="Arial" pitchFamily="34" charset="0"/>
+                <a:ea typeface="Arial" pitchFamily="34" charset="-122"/>
+                <a:cs typeface="Arial" pitchFamily="34" charset="-120"/>
+              </a:rPr>
+              <a:t>Native package automation (dnf-automatic, unattended-upgrades) or Ansible / Satellite where already deployed</a:t>
+            </a:r>
+            <a:endParaRPr lang="en-US" sz="900" dirty="0"/>
+          </a:p>
+        </p:txBody>
+      </p:sp>
+      <p:sp>
+        <p:nvSpPr>
+          <p:cNvPr id="10" name="Shape 8"/>
+          <p:cNvSpPr/>
+          <p:nvPr/>
+        </p:nvSpPr>
+        <p:spPr>
+          <a:xfrm>
+            <a:off x="4690872" y="1298448"/>
+            <a:ext cx="4041648" cy="2514600"/>
+          </a:xfrm>
+          <a:prstGeom prst="roundRect">
+            <a:avLst>
+              <a:gd name="adj" fmla="val 2545"/>
             </a:avLst>
           </a:prstGeom>
           <a:solidFill>
@@ -10100,183 +10296,189 @@
       </p:sp>
       <p:sp>
         <p:nvSpPr>
-          <p:cNvPr id="15" name="Shape 13"/>
-          <p:cNvSpPr/>
-          <p:nvPr/>
-        </p:nvSpPr>
-        <p:spPr>
-          <a:xfrm>
-            <a:off x="3410712" y="2578608"/>
-            <a:ext cx="292608" cy="292608"/>
-          </a:xfrm>
-          <a:prstGeom prst="ellipse">
-            <a:avLst/>
-          </a:prstGeom>
-          <a:solidFill>
-            <a:srgbClr val="1A9E8F"/>
-          </a:solidFill>
-          <a:ln/>
-        </p:spPr>
-      </p:sp>
-      <p:sp>
-        <p:nvSpPr>
-          <p:cNvPr id="16" name="Text 14"/>
-          <p:cNvSpPr/>
-          <p:nvPr/>
-        </p:nvSpPr>
-        <p:spPr>
-          <a:xfrm>
-            <a:off x="3410712" y="2564892"/>
-            <a:ext cx="292608" cy="292608"/>
-          </a:xfrm>
-          <a:prstGeom prst="rect">
-            <a:avLst/>
-          </a:prstGeom>
-          <a:noFill/>
-          <a:ln/>
-        </p:spPr>
-        <p:txBody>
-          <a:bodyPr wrap="square" lIns="0" tIns="0" rIns="0" bIns="0" rtlCol="0" anchor="ctr"/>
-          <a:lstStyle/>
-          <a:p>
-            <a:pPr algn="ctr" indent="0" marL="0">
-              <a:buNone/>
-            </a:pPr>
-            <a:r>
-              <a:rPr lang="en-US" sz="1300" b="1" dirty="0">
-                <a:solidFill>
-                  <a:srgbClr val="FFFFFF"/>
-                </a:solidFill>
-                <a:latin typeface="Arial" pitchFamily="34" charset="0"/>
-                <a:ea typeface="Arial" pitchFamily="34" charset="-122"/>
-                <a:cs typeface="Arial" pitchFamily="34" charset="-120"/>
-              </a:rPr>
-              <a:t>2</a:t>
-            </a:r>
-            <a:endParaRPr lang="en-US" sz="1300" dirty="0"/>
-          </a:p>
-        </p:txBody>
-      </p:sp>
-      <p:sp>
-        <p:nvSpPr>
-          <p:cNvPr id="17" name="Text 15"/>
-          <p:cNvSpPr/>
-          <p:nvPr/>
-        </p:nvSpPr>
-        <p:spPr>
-          <a:xfrm>
-            <a:off x="3776472" y="2542032"/>
-            <a:ext cx="2148840" cy="365760"/>
-          </a:xfrm>
-          <a:prstGeom prst="rect">
-            <a:avLst/>
-          </a:prstGeom>
-          <a:noFill/>
-          <a:ln/>
-        </p:spPr>
-        <p:txBody>
-          <a:bodyPr wrap="square" lIns="0" tIns="0" rIns="0" bIns="0" rtlCol="0" anchor="ctr"/>
-          <a:lstStyle/>
-          <a:p>
-            <a:pPr indent="0" marL="0">
-              <a:buNone/>
-            </a:pPr>
-            <a:r>
-              <a:rPr lang="en-US" sz="1050" b="1" dirty="0">
-                <a:solidFill>
-                  <a:srgbClr val="1E293B"/>
-                </a:solidFill>
-                <a:latin typeface="Arial" pitchFamily="34" charset="0"/>
-                <a:ea typeface="Arial" pitchFamily="34" charset="-122"/>
-                <a:cs typeface="Arial" pitchFamily="34" charset="-120"/>
-              </a:rPr>
-              <a:t>Conditional Access gate</a:t>
-            </a:r>
-            <a:endParaRPr lang="en-US" sz="1050" dirty="0"/>
-          </a:p>
-        </p:txBody>
-      </p:sp>
-      <p:sp>
-        <p:nvSpPr>
-          <p:cNvPr id="18" name="Text 16"/>
-          <p:cNvSpPr/>
-          <p:nvPr/>
-        </p:nvSpPr>
-        <p:spPr>
-          <a:xfrm>
-            <a:off x="3429000" y="2962656"/>
-            <a:ext cx="2432304" cy="822960"/>
-          </a:xfrm>
-          <a:prstGeom prst="rect">
-            <a:avLst/>
-          </a:prstGeom>
-          <a:noFill/>
-          <a:ln/>
-        </p:spPr>
-        <p:txBody>
-          <a:bodyPr wrap="square" lIns="0" tIns="0" rIns="0" bIns="0" rtlCol="0" anchor="ctr"/>
-          <a:lstStyle/>
-          <a:p>
-            <a:pPr indent="0" marL="0">
-              <a:buNone/>
-            </a:pPr>
-            <a:r>
-              <a:rPr lang="en-US" sz="850" dirty="0">
-                <a:solidFill>
-                  <a:srgbClr val="5B6B7C"/>
-                </a:solidFill>
-                <a:latin typeface="Arial" pitchFamily="34" charset="0"/>
-                <a:ea typeface="Arial" pitchFamily="34" charset="-122"/>
-                <a:cs typeface="Arial" pitchFamily="34" charset="-120"/>
-              </a:rPr>
-              <a:t>Non-compliant device → blocked from enterprise apps. Patching is no longer optional; it is a condition of access.</a:t>
-            </a:r>
-            <a:endParaRPr lang="en-US" sz="850" dirty="0"/>
-          </a:p>
-        </p:txBody>
-      </p:sp>
-      <p:sp>
-        <p:nvSpPr>
-          <p:cNvPr id="19" name="Shape 17"/>
-          <p:cNvSpPr/>
-          <p:nvPr/>
-        </p:nvSpPr>
-        <p:spPr>
-          <a:xfrm>
-            <a:off x="5998464" y="3154680"/>
-            <a:ext cx="100584" cy="0"/>
-          </a:xfrm>
-          <a:prstGeom prst="line">
-            <a:avLst/>
-          </a:prstGeom>
-          <a:noFill/>
-          <a:ln w="25400">
-            <a:solidFill>
-              <a:srgbClr val="5B6B7C"/>
-            </a:solidFill>
-            <a:prstDash val="solid"/>
-            <a:tailEnd type="triangle"/>
-          </a:ln>
-        </p:spPr>
-      </p:sp>
-      <p:sp>
-        <p:nvSpPr>
-          <p:cNvPr id="20" name="Shape 18"/>
-          <p:cNvSpPr/>
-          <p:nvPr/>
-        </p:nvSpPr>
-        <p:spPr>
-          <a:xfrm>
-            <a:off x="6099048" y="2468880"/>
-            <a:ext cx="2688336" cy="1371600"/>
+          <p:cNvPr id="11" name="Shape 9"/>
+          <p:cNvSpPr/>
+          <p:nvPr/>
+        </p:nvSpPr>
+        <p:spPr>
+          <a:xfrm>
+            <a:off x="4818888" y="1426464"/>
+            <a:ext cx="3785616" cy="402336"/>
           </a:xfrm>
           <a:prstGeom prst="roundRect">
             <a:avLst>
-              <a:gd name="adj" fmla="val 4667"/>
+              <a:gd name="adj" fmla="val 13636"/>
             </a:avLst>
           </a:prstGeom>
           <a:solidFill>
-            <a:srgbClr val="FFFFFF"/>
+            <a:srgbClr val="E6F5F2"/>
+          </a:solidFill>
+          <a:ln/>
+        </p:spPr>
+      </p:sp>
+      <p:sp>
+        <p:nvSpPr>
+          <p:cNvPr id="12" name="Text 10"/>
+          <p:cNvSpPr/>
+          <p:nvPr/>
+        </p:nvSpPr>
+        <p:spPr>
+          <a:xfrm>
+            <a:off x="4946904" y="1426464"/>
+            <a:ext cx="3584448" cy="402336"/>
+          </a:xfrm>
+          <a:prstGeom prst="rect">
+            <a:avLst/>
+          </a:prstGeom>
+          <a:noFill/>
+          <a:ln/>
+        </p:spPr>
+        <p:txBody>
+          <a:bodyPr wrap="square" lIns="0" tIns="0" rIns="0" bIns="0" rtlCol="0" anchor="ctr"/>
+          <a:lstStyle/>
+          <a:p>
+            <a:pPr indent="0" marL="0">
+              <a:buNone/>
+            </a:pPr>
+            <a:r>
+              <a:rPr lang="en-US" sz="1200" b="1" dirty="0">
+                <a:solidFill>
+                  <a:srgbClr val="1A9E8F"/>
+                </a:solidFill>
+                <a:latin typeface="Arial" pitchFamily="34" charset="0"/>
+                <a:ea typeface="Arial" pitchFamily="34" charset="-122"/>
+                <a:cs typeface="Arial" pitchFamily="34" charset="-120"/>
+              </a:rPr>
+              <a:t>The rest of the estate</a:t>
+            </a:r>
+            <a:endParaRPr lang="en-US" sz="1200" dirty="0"/>
+          </a:p>
+        </p:txBody>
+      </p:sp>
+      <p:sp>
+        <p:nvSpPr>
+          <p:cNvPr id="13" name="Text 11"/>
+          <p:cNvSpPr/>
+          <p:nvPr/>
+        </p:nvSpPr>
+        <p:spPr>
+          <a:xfrm>
+            <a:off x="4873752" y="1920240"/>
+            <a:ext cx="3694176" cy="1764792"/>
+          </a:xfrm>
+          <a:prstGeom prst="rect">
+            <a:avLst/>
+          </a:prstGeom>
+          <a:noFill/>
+          <a:ln/>
+        </p:spPr>
+        <p:txBody>
+          <a:bodyPr wrap="square" lIns="0" tIns="0" rIns="0" bIns="0" rtlCol="0" anchor="ctr"/>
+          <a:lstStyle/>
+          <a:p>
+            <a:pPr marL="342900" indent="-342900">
+              <a:spcAft>
+                <a:spcPts val="500"/>
+              </a:spcAft>
+              <a:buSzPct val="100000"/>
+              <a:buChar char="•"/>
+            </a:pPr>
+            <a:r>
+              <a:rPr lang="en-US" sz="900" dirty="0">
+                <a:solidFill>
+                  <a:srgbClr val="1E293B"/>
+                </a:solidFill>
+                <a:latin typeface="Arial" pitchFamily="34" charset="0"/>
+                <a:ea typeface="Arial" pitchFamily="34" charset="-122"/>
+                <a:cs typeface="Arial" pitchFamily="34" charset="-120"/>
+              </a:rPr>
+              <a:t>macOS — Intune update policies + the MDE sensor</a:t>
+            </a:r>
+            <a:endParaRPr lang="en-US" sz="900" dirty="0"/>
+          </a:p>
+          <a:p>
+            <a:pPr marL="342900" indent="-342900">
+              <a:spcAft>
+                <a:spcPts val="500"/>
+              </a:spcAft>
+              <a:buSzPct val="100000"/>
+              <a:buChar char="•"/>
+            </a:pPr>
+            <a:r>
+              <a:rPr lang="en-US" sz="900" dirty="0">
+                <a:solidFill>
+                  <a:srgbClr val="1E293B"/>
+                </a:solidFill>
+                <a:latin typeface="Arial" pitchFamily="34" charset="0"/>
+                <a:ea typeface="Arial" pitchFamily="34" charset="-122"/>
+                <a:cs typeface="Arial" pitchFamily="34" charset="-120"/>
+              </a:rPr>
+              <a:t>Network devices / appliances — vendor-managed, tracked separately; often the highest-risk KEV surface</a:t>
+            </a:r>
+            <a:endParaRPr lang="en-US" sz="900" dirty="0"/>
+          </a:p>
+          <a:p>
+            <a:pPr marL="342900" indent="-342900">
+              <a:spcAft>
+                <a:spcPts val="500"/>
+              </a:spcAft>
+              <a:buSzPct val="100000"/>
+              <a:buChar char="•"/>
+            </a:pPr>
+            <a:r>
+              <a:rPr lang="en-US" sz="900" dirty="0">
+                <a:solidFill>
+                  <a:srgbClr val="1E293B"/>
+                </a:solidFill>
+                <a:latin typeface="Arial" pitchFamily="34" charset="0"/>
+                <a:ea typeface="Arial" pitchFamily="34" charset="-122"/>
+                <a:cs typeface="Arial" pitchFamily="34" charset="-120"/>
+              </a:rPr>
+              <a:t>Container images — scanned in the registry at build time, not host-patched</a:t>
+            </a:r>
+            <a:endParaRPr lang="en-US" sz="900" dirty="0"/>
+          </a:p>
+          <a:p>
+            <a:pPr marL="342900" indent="-342900">
+              <a:spcAft>
+                <a:spcPts val="500"/>
+              </a:spcAft>
+              <a:buSzPct val="100000"/>
+              <a:buChar char="•"/>
+            </a:pPr>
+            <a:r>
+              <a:rPr lang="en-US" sz="900" dirty="0">
+                <a:solidFill>
+                  <a:srgbClr val="1E293B"/>
+                </a:solidFill>
+                <a:latin typeface="Arial" pitchFamily="34" charset="0"/>
+                <a:ea typeface="Arial" pitchFamily="34" charset="-122"/>
+                <a:cs typeface="Arial" pitchFamily="34" charset="-120"/>
+              </a:rPr>
+              <a:t>Firmware / BIOS — outside WUfB; vendor tooling on its own cadence</a:t>
+            </a:r>
+            <a:endParaRPr lang="en-US" sz="900" dirty="0"/>
+          </a:p>
+        </p:txBody>
+      </p:sp>
+      <p:sp>
+        <p:nvSpPr>
+          <p:cNvPr id="14" name="Shape 12"/>
+          <p:cNvSpPr/>
+          <p:nvPr/>
+        </p:nvSpPr>
+        <p:spPr>
+          <a:xfrm>
+            <a:off x="502920" y="4023360"/>
+            <a:ext cx="8229600" cy="786384"/>
+          </a:xfrm>
+          <a:prstGeom prst="roundRect">
+            <a:avLst>
+              <a:gd name="adj" fmla="val 8140"/>
+            </a:avLst>
+          </a:prstGeom>
+          <a:solidFill>
+            <a:srgbClr val="EDF3F9"/>
           </a:solidFill>
           <a:ln w="9525">
             <a:solidFill>
@@ -10284,182 +10486,11 @@
             </a:solidFill>
             <a:prstDash val="solid"/>
           </a:ln>
-          <a:effectLst>
-            <a:outerShdw sx="100000" sy="100000" kx="0" ky="0" algn="bl" rotWithShape="0" blurRad="88900" dist="25400" dir="2700000">
-              <a:srgbClr val="000000">
-                <a:alpha val="14000"/>
-              </a:srgbClr>
-            </a:outerShdw>
-          </a:effectLst>
-        </p:spPr>
-      </p:sp>
-      <p:sp>
-        <p:nvSpPr>
-          <p:cNvPr id="21" name="Shape 19"/>
-          <p:cNvSpPr/>
-          <p:nvPr/>
-        </p:nvSpPr>
-        <p:spPr>
-          <a:xfrm>
-            <a:off x="6208776" y="2578608"/>
-            <a:ext cx="292608" cy="292608"/>
-          </a:xfrm>
-          <a:prstGeom prst="ellipse">
-            <a:avLst/>
-          </a:prstGeom>
-          <a:solidFill>
-            <a:srgbClr val="D4860B"/>
-          </a:solidFill>
-          <a:ln/>
-        </p:spPr>
-      </p:sp>
-      <p:sp>
-        <p:nvSpPr>
-          <p:cNvPr id="22" name="Text 20"/>
-          <p:cNvSpPr/>
-          <p:nvPr/>
-        </p:nvSpPr>
-        <p:spPr>
-          <a:xfrm>
-            <a:off x="6208776" y="2564892"/>
-            <a:ext cx="292608" cy="292608"/>
-          </a:xfrm>
-          <a:prstGeom prst="rect">
-            <a:avLst/>
-          </a:prstGeom>
-          <a:noFill/>
-          <a:ln/>
-        </p:spPr>
-        <p:txBody>
-          <a:bodyPr wrap="square" lIns="0" tIns="0" rIns="0" bIns="0" rtlCol="0" anchor="ctr"/>
-          <a:lstStyle/>
-          <a:p>
-            <a:pPr algn="ctr" indent="0" marL="0">
-              <a:buNone/>
-            </a:pPr>
-            <a:r>
-              <a:rPr lang="en-US" sz="1300" b="1" dirty="0">
-                <a:solidFill>
-                  <a:srgbClr val="FFFFFF"/>
-                </a:solidFill>
-                <a:latin typeface="Arial" pitchFamily="34" charset="0"/>
-                <a:ea typeface="Arial" pitchFamily="34" charset="-122"/>
-                <a:cs typeface="Arial" pitchFamily="34" charset="-120"/>
-              </a:rPr>
-              <a:t>3</a:t>
-            </a:r>
-            <a:endParaRPr lang="en-US" sz="1300" dirty="0"/>
-          </a:p>
-        </p:txBody>
-      </p:sp>
-      <p:sp>
-        <p:nvSpPr>
-          <p:cNvPr id="23" name="Text 21"/>
-          <p:cNvSpPr/>
-          <p:nvPr/>
-        </p:nvSpPr>
-        <p:spPr>
-          <a:xfrm>
-            <a:off x="6574536" y="2542032"/>
-            <a:ext cx="2148840" cy="365760"/>
-          </a:xfrm>
-          <a:prstGeom prst="rect">
-            <a:avLst/>
-          </a:prstGeom>
-          <a:noFill/>
-          <a:ln/>
-        </p:spPr>
-        <p:txBody>
-          <a:bodyPr wrap="square" lIns="0" tIns="0" rIns="0" bIns="0" rtlCol="0" anchor="ctr"/>
-          <a:lstStyle/>
-          <a:p>
-            <a:pPr indent="0" marL="0">
-              <a:buNone/>
-            </a:pPr>
-            <a:r>
-              <a:rPr lang="en-US" sz="1050" b="1" dirty="0">
-                <a:solidFill>
-                  <a:srgbClr val="1E293B"/>
-                </a:solidFill>
-                <a:latin typeface="Arial" pitchFamily="34" charset="0"/>
-                <a:ea typeface="Arial" pitchFamily="34" charset="-122"/>
-                <a:cs typeface="Arial" pitchFamily="34" charset="-120"/>
-              </a:rPr>
-              <a:t>Grace period first</a:t>
-            </a:r>
-            <a:endParaRPr lang="en-US" sz="1050" dirty="0"/>
-          </a:p>
-        </p:txBody>
-      </p:sp>
-      <p:sp>
-        <p:nvSpPr>
-          <p:cNvPr id="24" name="Text 22"/>
-          <p:cNvSpPr/>
-          <p:nvPr/>
-        </p:nvSpPr>
-        <p:spPr>
-          <a:xfrm>
-            <a:off x="6227064" y="2962656"/>
-            <a:ext cx="2432304" cy="822960"/>
-          </a:xfrm>
-          <a:prstGeom prst="rect">
-            <a:avLst/>
-          </a:prstGeom>
-          <a:noFill/>
-          <a:ln/>
-        </p:spPr>
-        <p:txBody>
-          <a:bodyPr wrap="square" lIns="0" tIns="0" rIns="0" bIns="0" rtlCol="0" anchor="ctr"/>
-          <a:lstStyle/>
-          <a:p>
-            <a:pPr indent="0" marL="0">
-              <a:buNone/>
-            </a:pPr>
-            <a:r>
-              <a:rPr lang="en-US" sz="850" dirty="0">
-                <a:solidFill>
-                  <a:srgbClr val="5B6B7C"/>
-                </a:solidFill>
-                <a:latin typeface="Arial" pitchFamily="34" charset="0"/>
-                <a:ea typeface="Arial" pitchFamily="34" charset="-122"/>
-                <a:cs typeface="Arial" pitchFamily="34" charset="-120"/>
-              </a:rPr>
-              <a:t>For a population with patch debt, set a 30-day CA grace period. Remediate the backlog before the block bites.</a:t>
-            </a:r>
-            <a:endParaRPr lang="en-US" sz="850" dirty="0"/>
-          </a:p>
-        </p:txBody>
-      </p:sp>
-      <p:sp>
-        <p:nvSpPr>
-          <p:cNvPr id="25" name="Shape 23"/>
-          <p:cNvSpPr/>
-          <p:nvPr/>
-        </p:nvSpPr>
-        <p:spPr>
-          <a:xfrm>
-            <a:off x="502920" y="4023360"/>
-            <a:ext cx="8229600" cy="786384"/>
-          </a:xfrm>
-          <a:prstGeom prst="roundRect">
-            <a:avLst>
-              <a:gd name="adj" fmla="val 8140"/>
-            </a:avLst>
-          </a:prstGeom>
-          <a:solidFill>
-            <a:srgbClr val="FBF3E4"/>
-          </a:solidFill>
-          <a:ln w="9525">
-            <a:solidFill>
-              <a:srgbClr val="C9D4E0"/>
-            </a:solidFill>
-            <a:prstDash val="solid"/>
-          </a:ln>
-        </p:spPr>
-      </p:sp>
-      <p:sp>
-        <p:nvSpPr>
-          <p:cNvPr id="26" name="Text 24"/>
+        </p:spPr>
+      </p:sp>
+      <p:sp>
+        <p:nvSpPr>
+          <p:cNvPr id="15" name="Text 13"/>
           <p:cNvSpPr/>
           <p:nvPr/>
         </p:nvSpPr>
@@ -10484,13 +10515,13 @@
             <a:r>
               <a:rPr lang="en-US" sz="1000" b="1" dirty="0">
                 <a:solidFill>
-                  <a:srgbClr val="8A6210"/>
-                </a:solidFill>
-                <a:latin typeface="Arial" pitchFamily="34" charset="0"/>
-                <a:ea typeface="Arial" pitchFamily="34" charset="-122"/>
-                <a:cs typeface="Arial" pitchFamily="34" charset="-120"/>
-              </a:rPr>
-              <a:t>Why the grace period is non-negotiable: </a:t>
+                  <a:srgbClr val="1F3A5F"/>
+                </a:solidFill>
+                <a:latin typeface="Arial" pitchFamily="34" charset="0"/>
+                <a:ea typeface="Arial" pitchFamily="34" charset="-122"/>
+                <a:cs typeface="Arial" pitchFamily="34" charset="-120"/>
+              </a:rPr>
+              <a:t>The scan side was already OS-agnostic — only the delivery tool changes. </a:t>
             </a:r>
             <a:pPr indent="0" marL="0">
               <a:buNone/>
@@ -10504,7 +10535,7 @@
                 <a:ea typeface="Arial" pitchFamily="34" charset="-122"/>
                 <a:cs typeface="Arial" pitchFamily="34" charset="-120"/>
               </a:rPr>
-              <a:t>immediately blocking access on day one against a population with accumulated patch debt generates helpdesk volume that obscures the machines genuinely needing emergency attention. Use the first 30 days to clear the backlog, then let the block take effect.</a:t>
+              <a:t>MDVM covers Linux over the same AMA channel, so a Linux CVE flows through the identical KEV cross-reference, SLA tiers, and daily compliance record. WUfB and Azure Update Manager are two delivery examples of one mechanism; the queue and the evidence are unchanged across OS.</a:t>
             </a:r>
             <a:endParaRPr lang="en-US" sz="1000" dirty="0"/>
           </a:p>
@@ -10575,7 +10606,7 @@
                 <a:ea typeface="Arial" pitchFamily="34" charset="-122"/>
                 <a:cs typeface="Arial" pitchFamily="34" charset="-120"/>
               </a:rPr>
-              <a:t>SQL SERVER PATCHING</a:t>
+              <a:t>AUTOMATED PATCH DELIVERY — ENFORCEMENT</a:t>
             </a:r>
             <a:endParaRPr lang="en-US" sz="1100" dirty="0"/>
           </a:p>
@@ -10606,7 +10637,7 @@
               <a:buNone/>
             </a:pPr>
             <a:r>
-              <a:rPr lang="en-US" sz="2200" b="1" dirty="0">
+              <a:rPr lang="en-US" sz="2300" b="1" dirty="0">
                 <a:solidFill>
                   <a:srgbClr val="1F3A5F"/>
                 </a:solidFill>
@@ -10614,9 +10645,9 @@
                 <a:ea typeface="Arial" pitchFamily="34" charset="-122"/>
                 <a:cs typeface="Arial" pitchFamily="34" charset="-120"/>
               </a:rPr>
-              <a:t>A different cadence: cumulative updates, GDRs, and end-of-support</a:t>
-            </a:r>
-            <a:endParaRPr lang="en-US" sz="2200" dirty="0"/>
+              <a:t>Patch currency becomes an access condition</a:t>
+            </a:r>
+            <a:endParaRPr lang="en-US" sz="2300" dirty="0"/>
           </a:p>
         </p:txBody>
       </p:sp>
@@ -10653,7 +10684,7 @@
                 <a:ea typeface="Arial" pitchFamily="34" charset="-122"/>
                 <a:cs typeface="Arial" pitchFamily="34" charset="-120"/>
               </a:rPr>
-              <a:t>Federal AAN — Book 11 Vulnerability Management · CSI Team Draft — Internal · FedRAMP Moderate · Date Code 2026-07-08 13:21 ET</a:t>
+              <a:t>Federal AAN — Book 11 Vulnerability Management · CSI Team Draft — Internal · FedRAMP Moderate · Date Code 2026-07-08 13:32 ET</a:t>
             </a:r>
             <a:endParaRPr lang="en-US" sz="800" dirty="0"/>
           </a:p>
@@ -10706,12 +10737,92 @@
         </p:nvSpPr>
         <p:spPr>
           <a:xfrm>
-            <a:off x="502920" y="1298448"/>
-            <a:ext cx="4041648" cy="2514600"/>
+            <a:off x="502920" y="1371600"/>
+            <a:ext cx="8229600" cy="914400"/>
           </a:xfrm>
           <a:prstGeom prst="roundRect">
             <a:avLst>
-              <a:gd name="adj" fmla="val 2545"/>
+              <a:gd name="adj" fmla="val 7000"/>
+            </a:avLst>
+          </a:prstGeom>
+          <a:solidFill>
+            <a:srgbClr val="F3F5F8"/>
+          </a:solidFill>
+          <a:ln w="9525">
+            <a:solidFill>
+              <a:srgbClr val="C9D4E0"/>
+            </a:solidFill>
+            <a:prstDash val="solid"/>
+          </a:ln>
+        </p:spPr>
+      </p:sp>
+      <p:sp>
+        <p:nvSpPr>
+          <p:cNvPr id="7" name="Text 5"/>
+          <p:cNvSpPr/>
+          <p:nvPr/>
+        </p:nvSpPr>
+        <p:spPr>
+          <a:xfrm>
+            <a:off x="731520" y="1463040"/>
+            <a:ext cx="7772400" cy="749808"/>
+          </a:xfrm>
+          <a:prstGeom prst="rect">
+            <a:avLst/>
+          </a:prstGeom>
+          <a:noFill/>
+          <a:ln/>
+        </p:spPr>
+        <p:txBody>
+          <a:bodyPr wrap="square" lIns="0" tIns="0" rIns="0" bIns="0" rtlCol="0" anchor="ctr"/>
+          <a:lstStyle/>
+          <a:p>
+            <a:pPr indent="0" marL="0">
+              <a:buNone/>
+            </a:pPr>
+            <a:r>
+              <a:rPr lang="en-US" sz="1050" b="1" dirty="0">
+                <a:solidFill>
+                  <a:srgbClr val="1F3A5F"/>
+                </a:solidFill>
+                <a:latin typeface="Arial" pitchFamily="34" charset="0"/>
+                <a:ea typeface="Arial" pitchFamily="34" charset="-122"/>
+                <a:cs typeface="Arial" pitchFamily="34" charset="-120"/>
+              </a:rPr>
+              <a:t>Rings control WHEN a patch is delivered. The compliance policy controls WHAT COUNTS as current. </a:t>
+            </a:r>
+            <a:pPr indent="0" marL="0">
+              <a:buNone/>
+            </a:pPr>
+            <a:r>
+              <a:rPr lang="en-US" sz="1050" dirty="0">
+                <a:solidFill>
+                  <a:srgbClr val="1E293B"/>
+                </a:solidFill>
+                <a:latin typeface="Arial" pitchFamily="34" charset="0"/>
+                <a:ea typeface="Arial" pitchFamily="34" charset="-122"/>
+                <a:cs typeface="Arial" pitchFamily="34" charset="-120"/>
+              </a:rPr>
+              <a:t>A machine more than 30 days behind the required patch level is marked non-compliant — which triggers the Conditional Access gate: it loses access to enterprise applications until it is patched.</a:t>
+            </a:r>
+            <a:endParaRPr lang="en-US" sz="1050" dirty="0"/>
+          </a:p>
+        </p:txBody>
+      </p:sp>
+      <p:sp>
+        <p:nvSpPr>
+          <p:cNvPr id="8" name="Shape 6"/>
+          <p:cNvSpPr/>
+          <p:nvPr/>
+        </p:nvSpPr>
+        <p:spPr>
+          <a:xfrm>
+            <a:off x="502920" y="2468880"/>
+            <a:ext cx="2688336" cy="1371600"/>
+          </a:xfrm>
+          <a:prstGeom prst="roundRect">
+            <a:avLst>
+              <a:gd name="adj" fmla="val 4667"/>
             </a:avLst>
           </a:prstGeom>
           <a:solidFill>
@@ -10734,185 +10845,179 @@
       </p:sp>
       <p:sp>
         <p:nvSpPr>
-          <p:cNvPr id="7" name="Shape 5"/>
-          <p:cNvSpPr/>
-          <p:nvPr/>
-        </p:nvSpPr>
-        <p:spPr>
-          <a:xfrm>
-            <a:off x="630936" y="1426464"/>
-            <a:ext cx="3785616" cy="402336"/>
+          <p:cNvPr id="9" name="Shape 7"/>
+          <p:cNvSpPr/>
+          <p:nvPr/>
+        </p:nvSpPr>
+        <p:spPr>
+          <a:xfrm>
+            <a:off x="612648" y="2578608"/>
+            <a:ext cx="292608" cy="292608"/>
+          </a:xfrm>
+          <a:prstGeom prst="ellipse">
+            <a:avLst/>
+          </a:prstGeom>
+          <a:solidFill>
+            <a:srgbClr val="1F3A5F"/>
+          </a:solidFill>
+          <a:ln/>
+        </p:spPr>
+      </p:sp>
+      <p:sp>
+        <p:nvSpPr>
+          <p:cNvPr id="10" name="Text 8"/>
+          <p:cNvSpPr/>
+          <p:nvPr/>
+        </p:nvSpPr>
+        <p:spPr>
+          <a:xfrm>
+            <a:off x="612648" y="2564892"/>
+            <a:ext cx="292608" cy="292608"/>
+          </a:xfrm>
+          <a:prstGeom prst="rect">
+            <a:avLst/>
+          </a:prstGeom>
+          <a:noFill/>
+          <a:ln/>
+        </p:spPr>
+        <p:txBody>
+          <a:bodyPr wrap="square" lIns="0" tIns="0" rIns="0" bIns="0" rtlCol="0" anchor="ctr"/>
+          <a:lstStyle/>
+          <a:p>
+            <a:pPr algn="ctr" indent="0" marL="0">
+              <a:buNone/>
+            </a:pPr>
+            <a:r>
+              <a:rPr lang="en-US" sz="1300" b="1" dirty="0">
+                <a:solidFill>
+                  <a:srgbClr val="FFFFFF"/>
+                </a:solidFill>
+                <a:latin typeface="Arial" pitchFamily="34" charset="0"/>
+                <a:ea typeface="Arial" pitchFamily="34" charset="-122"/>
+                <a:cs typeface="Arial" pitchFamily="34" charset="-120"/>
+              </a:rPr>
+              <a:t>1</a:t>
+            </a:r>
+            <a:endParaRPr lang="en-US" sz="1300" dirty="0"/>
+          </a:p>
+        </p:txBody>
+      </p:sp>
+      <p:sp>
+        <p:nvSpPr>
+          <p:cNvPr id="11" name="Text 9"/>
+          <p:cNvSpPr/>
+          <p:nvPr/>
+        </p:nvSpPr>
+        <p:spPr>
+          <a:xfrm>
+            <a:off x="978408" y="2542032"/>
+            <a:ext cx="2148840" cy="365760"/>
+          </a:xfrm>
+          <a:prstGeom prst="rect">
+            <a:avLst/>
+          </a:prstGeom>
+          <a:noFill/>
+          <a:ln/>
+        </p:spPr>
+        <p:txBody>
+          <a:bodyPr wrap="square" lIns="0" tIns="0" rIns="0" bIns="0" rtlCol="0" anchor="ctr"/>
+          <a:lstStyle/>
+          <a:p>
+            <a:pPr indent="0" marL="0">
+              <a:buNone/>
+            </a:pPr>
+            <a:r>
+              <a:rPr lang="en-US" sz="1050" b="1" dirty="0">
+                <a:solidFill>
+                  <a:srgbClr val="1E293B"/>
+                </a:solidFill>
+                <a:latin typeface="Arial" pitchFamily="34" charset="0"/>
+                <a:ea typeface="Arial" pitchFamily="34" charset="-122"/>
+                <a:cs typeface="Arial" pitchFamily="34" charset="-120"/>
+              </a:rPr>
+              <a:t>Compliance policy</a:t>
+            </a:r>
+            <a:endParaRPr lang="en-US" sz="1050" dirty="0"/>
+          </a:p>
+        </p:txBody>
+      </p:sp>
+      <p:sp>
+        <p:nvSpPr>
+          <p:cNvPr id="12" name="Text 10"/>
+          <p:cNvSpPr/>
+          <p:nvPr/>
+        </p:nvSpPr>
+        <p:spPr>
+          <a:xfrm>
+            <a:off x="630936" y="2962656"/>
+            <a:ext cx="2432304" cy="822960"/>
+          </a:xfrm>
+          <a:prstGeom prst="rect">
+            <a:avLst/>
+          </a:prstGeom>
+          <a:noFill/>
+          <a:ln/>
+        </p:spPr>
+        <p:txBody>
+          <a:bodyPr wrap="square" lIns="0" tIns="0" rIns="0" bIns="0" rtlCol="0" anchor="ctr"/>
+          <a:lstStyle/>
+          <a:p>
+            <a:pPr indent="0" marL="0">
+              <a:buNone/>
+            </a:pPr>
+            <a:r>
+              <a:rPr lang="en-US" sz="850" dirty="0">
+                <a:solidFill>
+                  <a:srgbClr val="5B6B7C"/>
+                </a:solidFill>
+                <a:latin typeface="Arial" pitchFamily="34" charset="0"/>
+                <a:ea typeface="Arial" pitchFamily="34" charset="-122"/>
+                <a:cs typeface="Arial" pitchFamily="34" charset="-120"/>
+              </a:rPr>
+              <a:t>Machine &gt;30 days behind → non-compliant. Also requires firewall on, Defender + real-time protection, Secure Boot.</a:t>
+            </a:r>
+            <a:endParaRPr lang="en-US" sz="850" dirty="0"/>
+          </a:p>
+        </p:txBody>
+      </p:sp>
+      <p:sp>
+        <p:nvSpPr>
+          <p:cNvPr id="13" name="Shape 11"/>
+          <p:cNvSpPr/>
+          <p:nvPr/>
+        </p:nvSpPr>
+        <p:spPr>
+          <a:xfrm>
+            <a:off x="3200400" y="3154680"/>
+            <a:ext cx="100584" cy="0"/>
+          </a:xfrm>
+          <a:prstGeom prst="line">
+            <a:avLst/>
+          </a:prstGeom>
+          <a:noFill/>
+          <a:ln w="25400">
+            <a:solidFill>
+              <a:srgbClr val="5B6B7C"/>
+            </a:solidFill>
+            <a:prstDash val="solid"/>
+            <a:tailEnd type="triangle"/>
+          </a:ln>
+        </p:spPr>
+      </p:sp>
+      <p:sp>
+        <p:nvSpPr>
+          <p:cNvPr id="14" name="Shape 12"/>
+          <p:cNvSpPr/>
+          <p:nvPr/>
+        </p:nvSpPr>
+        <p:spPr>
+          <a:xfrm>
+            <a:off x="3300984" y="2468880"/>
+            <a:ext cx="2688336" cy="1371600"/>
           </a:xfrm>
           <a:prstGeom prst="roundRect">
             <a:avLst>
-              <a:gd name="adj" fmla="val 13636"/>
-            </a:avLst>
-          </a:prstGeom>
-          <a:solidFill>
-            <a:srgbClr val="EDF3F9"/>
-          </a:solidFill>
-          <a:ln/>
-        </p:spPr>
-      </p:sp>
-      <p:sp>
-        <p:nvSpPr>
-          <p:cNvPr id="8" name="Text 6"/>
-          <p:cNvSpPr/>
-          <p:nvPr/>
-        </p:nvSpPr>
-        <p:spPr>
-          <a:xfrm>
-            <a:off x="758952" y="1426464"/>
-            <a:ext cx="3584448" cy="402336"/>
-          </a:xfrm>
-          <a:prstGeom prst="rect">
-            <a:avLst/>
-          </a:prstGeom>
-          <a:noFill/>
-          <a:ln/>
-        </p:spPr>
-        <p:txBody>
-          <a:bodyPr wrap="square" lIns="0" tIns="0" rIns="0" bIns="0" rtlCol="0" anchor="ctr"/>
-          <a:lstStyle/>
-          <a:p>
-            <a:pPr indent="0" marL="0">
-              <a:buNone/>
-            </a:pPr>
-            <a:r>
-              <a:rPr lang="en-US" sz="1200" b="1" dirty="0">
-                <a:solidFill>
-                  <a:srgbClr val="1F3A5F"/>
-                </a:solidFill>
-                <a:latin typeface="Arial" pitchFamily="34" charset="0"/>
-                <a:ea typeface="Arial" pitchFamily="34" charset="-122"/>
-                <a:cs typeface="Arial" pitchFamily="34" charset="-120"/>
-              </a:rPr>
-              <a:t>The CU / GDR distinction</a:t>
-            </a:r>
-            <a:endParaRPr lang="en-US" sz="1200" dirty="0"/>
-          </a:p>
-        </p:txBody>
-      </p:sp>
-      <p:sp>
-        <p:nvSpPr>
-          <p:cNvPr id="9" name="Text 7"/>
-          <p:cNvSpPr/>
-          <p:nvPr/>
-        </p:nvSpPr>
-        <p:spPr>
-          <a:xfrm>
-            <a:off x="685800" y="1920240"/>
-            <a:ext cx="3694176" cy="1764792"/>
-          </a:xfrm>
-          <a:prstGeom prst="rect">
-            <a:avLst/>
-          </a:prstGeom>
-          <a:noFill/>
-          <a:ln/>
-        </p:spPr>
-        <p:txBody>
-          <a:bodyPr wrap="square" lIns="0" tIns="0" rIns="0" bIns="0" rtlCol="0" anchor="ctr"/>
-          <a:lstStyle/>
-          <a:p>
-            <a:pPr marL="342900" indent="-342900">
-              <a:spcAft>
-                <a:spcPts val="500"/>
-              </a:spcAft>
-              <a:buSzPct val="100000"/>
-              <a:buChar char="•"/>
-            </a:pPr>
-            <a:r>
-              <a:rPr lang="en-US" sz="900" dirty="0">
-                <a:solidFill>
-                  <a:srgbClr val="1E293B"/>
-                </a:solidFill>
-                <a:latin typeface="Arial" pitchFamily="34" charset="0"/>
-                <a:ea typeface="Arial" pitchFamily="34" charset="-122"/>
-                <a:cs typeface="Arial" pitchFamily="34" charset="-120"/>
-              </a:rPr>
-              <a:t>CUs release ~every 2 months: security fixes AND product bugs</a:t>
-            </a:r>
-            <a:endParaRPr lang="en-US" sz="900" dirty="0"/>
-          </a:p>
-          <a:p>
-            <a:pPr marL="342900" indent="-342900">
-              <a:spcAft>
-                <a:spcPts val="500"/>
-              </a:spcAft>
-              <a:buSzPct val="100000"/>
-              <a:buChar char="•"/>
-            </a:pPr>
-            <a:r>
-              <a:rPr lang="en-US" sz="900" dirty="0">
-                <a:solidFill>
-                  <a:srgbClr val="1E293B"/>
-                </a:solidFill>
-                <a:latin typeface="Arial" pitchFamily="34" charset="0"/>
-                <a:ea typeface="Arial" pitchFamily="34" charset="-122"/>
-                <a:cs typeface="Arial" pitchFamily="34" charset="-120"/>
-              </a:rPr>
-              <a:t>GDRs release between CUs: security-only, narrower</a:t>
-            </a:r>
-            <a:endParaRPr lang="en-US" sz="900" dirty="0"/>
-          </a:p>
-          <a:p>
-            <a:pPr marL="342900" indent="-342900">
-              <a:spcAft>
-                <a:spcPts val="500"/>
-              </a:spcAft>
-              <a:buSzPct val="100000"/>
-              <a:buChar char="•"/>
-            </a:pPr>
-            <a:r>
-              <a:rPr lang="en-US" sz="900" dirty="0">
-                <a:solidFill>
-                  <a:srgbClr val="1E293B"/>
-                </a:solidFill>
-                <a:latin typeface="Arial" pitchFamily="34" charset="0"/>
-                <a:ea typeface="Arial" pitchFamily="34" charset="-122"/>
-                <a:cs typeface="Arial" pitchFamily="34" charset="-120"/>
-              </a:rPr>
-              <a:t>Support requires the current or immediately preceding CU</a:t>
-            </a:r>
-            <a:endParaRPr lang="en-US" sz="900" dirty="0"/>
-          </a:p>
-          <a:p>
-            <a:pPr marL="342900" indent="-342900">
-              <a:spcAft>
-                <a:spcPts val="500"/>
-              </a:spcAft>
-              <a:buSzPct val="100000"/>
-              <a:buChar char="•"/>
-            </a:pPr>
-            <a:r>
-              <a:rPr lang="en-US" sz="900" dirty="0">
-                <a:solidFill>
-                  <a:srgbClr val="1E293B"/>
-                </a:solidFill>
-                <a:latin typeface="Arial" pitchFamily="34" charset="0"/>
-                <a:ea typeface="Arial" pitchFamily="34" charset="-122"/>
-                <a:cs typeface="Arial" pitchFamily="34" charset="-120"/>
-              </a:rPr>
-              <a:t>Applying the current CU covers all GDR content for that version</a:t>
-            </a:r>
-            <a:endParaRPr lang="en-US" sz="900" dirty="0"/>
-          </a:p>
-        </p:txBody>
-      </p:sp>
-      <p:sp>
-        <p:nvSpPr>
-          <p:cNvPr id="10" name="Shape 8"/>
-          <p:cNvSpPr/>
-          <p:nvPr/>
-        </p:nvSpPr>
-        <p:spPr>
-          <a:xfrm>
-            <a:off x="4690872" y="1298448"/>
-            <a:ext cx="4041648" cy="2514600"/>
-          </a:xfrm>
-          <a:prstGeom prst="roundRect">
-            <a:avLst>
-              <a:gd name="adj" fmla="val 2545"/>
+              <a:gd name="adj" fmla="val 4667"/>
             </a:avLst>
           </a:prstGeom>
           <a:solidFill>
@@ -10935,36 +11040,229 @@
       </p:sp>
       <p:sp>
         <p:nvSpPr>
-          <p:cNvPr id="11" name="Shape 9"/>
-          <p:cNvSpPr/>
-          <p:nvPr/>
-        </p:nvSpPr>
-        <p:spPr>
-          <a:xfrm>
-            <a:off x="4818888" y="1426464"/>
-            <a:ext cx="3785616" cy="402336"/>
+          <p:cNvPr id="15" name="Shape 13"/>
+          <p:cNvSpPr/>
+          <p:nvPr/>
+        </p:nvSpPr>
+        <p:spPr>
+          <a:xfrm>
+            <a:off x="3410712" y="2578608"/>
+            <a:ext cx="292608" cy="292608"/>
+          </a:xfrm>
+          <a:prstGeom prst="ellipse">
+            <a:avLst/>
+          </a:prstGeom>
+          <a:solidFill>
+            <a:srgbClr val="1A9E8F"/>
+          </a:solidFill>
+          <a:ln/>
+        </p:spPr>
+      </p:sp>
+      <p:sp>
+        <p:nvSpPr>
+          <p:cNvPr id="16" name="Text 14"/>
+          <p:cNvSpPr/>
+          <p:nvPr/>
+        </p:nvSpPr>
+        <p:spPr>
+          <a:xfrm>
+            <a:off x="3410712" y="2564892"/>
+            <a:ext cx="292608" cy="292608"/>
+          </a:xfrm>
+          <a:prstGeom prst="rect">
+            <a:avLst/>
+          </a:prstGeom>
+          <a:noFill/>
+          <a:ln/>
+        </p:spPr>
+        <p:txBody>
+          <a:bodyPr wrap="square" lIns="0" tIns="0" rIns="0" bIns="0" rtlCol="0" anchor="ctr"/>
+          <a:lstStyle/>
+          <a:p>
+            <a:pPr algn="ctr" indent="0" marL="0">
+              <a:buNone/>
+            </a:pPr>
+            <a:r>
+              <a:rPr lang="en-US" sz="1300" b="1" dirty="0">
+                <a:solidFill>
+                  <a:srgbClr val="FFFFFF"/>
+                </a:solidFill>
+                <a:latin typeface="Arial" pitchFamily="34" charset="0"/>
+                <a:ea typeface="Arial" pitchFamily="34" charset="-122"/>
+                <a:cs typeface="Arial" pitchFamily="34" charset="-120"/>
+              </a:rPr>
+              <a:t>2</a:t>
+            </a:r>
+            <a:endParaRPr lang="en-US" sz="1300" dirty="0"/>
+          </a:p>
+        </p:txBody>
+      </p:sp>
+      <p:sp>
+        <p:nvSpPr>
+          <p:cNvPr id="17" name="Text 15"/>
+          <p:cNvSpPr/>
+          <p:nvPr/>
+        </p:nvSpPr>
+        <p:spPr>
+          <a:xfrm>
+            <a:off x="3776472" y="2542032"/>
+            <a:ext cx="2148840" cy="365760"/>
+          </a:xfrm>
+          <a:prstGeom prst="rect">
+            <a:avLst/>
+          </a:prstGeom>
+          <a:noFill/>
+          <a:ln/>
+        </p:spPr>
+        <p:txBody>
+          <a:bodyPr wrap="square" lIns="0" tIns="0" rIns="0" bIns="0" rtlCol="0" anchor="ctr"/>
+          <a:lstStyle/>
+          <a:p>
+            <a:pPr indent="0" marL="0">
+              <a:buNone/>
+            </a:pPr>
+            <a:r>
+              <a:rPr lang="en-US" sz="1050" b="1" dirty="0">
+                <a:solidFill>
+                  <a:srgbClr val="1E293B"/>
+                </a:solidFill>
+                <a:latin typeface="Arial" pitchFamily="34" charset="0"/>
+                <a:ea typeface="Arial" pitchFamily="34" charset="-122"/>
+                <a:cs typeface="Arial" pitchFamily="34" charset="-120"/>
+              </a:rPr>
+              <a:t>Conditional Access gate</a:t>
+            </a:r>
+            <a:endParaRPr lang="en-US" sz="1050" dirty="0"/>
+          </a:p>
+        </p:txBody>
+      </p:sp>
+      <p:sp>
+        <p:nvSpPr>
+          <p:cNvPr id="18" name="Text 16"/>
+          <p:cNvSpPr/>
+          <p:nvPr/>
+        </p:nvSpPr>
+        <p:spPr>
+          <a:xfrm>
+            <a:off x="3429000" y="2962656"/>
+            <a:ext cx="2432304" cy="822960"/>
+          </a:xfrm>
+          <a:prstGeom prst="rect">
+            <a:avLst/>
+          </a:prstGeom>
+          <a:noFill/>
+          <a:ln/>
+        </p:spPr>
+        <p:txBody>
+          <a:bodyPr wrap="square" lIns="0" tIns="0" rIns="0" bIns="0" rtlCol="0" anchor="ctr"/>
+          <a:lstStyle/>
+          <a:p>
+            <a:pPr indent="0" marL="0">
+              <a:buNone/>
+            </a:pPr>
+            <a:r>
+              <a:rPr lang="en-US" sz="850" dirty="0">
+                <a:solidFill>
+                  <a:srgbClr val="5B6B7C"/>
+                </a:solidFill>
+                <a:latin typeface="Arial" pitchFamily="34" charset="0"/>
+                <a:ea typeface="Arial" pitchFamily="34" charset="-122"/>
+                <a:cs typeface="Arial" pitchFamily="34" charset="-120"/>
+              </a:rPr>
+              <a:t>Non-compliant device → blocked from enterprise apps. Patching is no longer optional; it is a condition of access.</a:t>
+            </a:r>
+            <a:endParaRPr lang="en-US" sz="850" dirty="0"/>
+          </a:p>
+        </p:txBody>
+      </p:sp>
+      <p:sp>
+        <p:nvSpPr>
+          <p:cNvPr id="19" name="Shape 17"/>
+          <p:cNvSpPr/>
+          <p:nvPr/>
+        </p:nvSpPr>
+        <p:spPr>
+          <a:xfrm>
+            <a:off x="5998464" y="3154680"/>
+            <a:ext cx="100584" cy="0"/>
+          </a:xfrm>
+          <a:prstGeom prst="line">
+            <a:avLst/>
+          </a:prstGeom>
+          <a:noFill/>
+          <a:ln w="25400">
+            <a:solidFill>
+              <a:srgbClr val="5B6B7C"/>
+            </a:solidFill>
+            <a:prstDash val="solid"/>
+            <a:tailEnd type="triangle"/>
+          </a:ln>
+        </p:spPr>
+      </p:sp>
+      <p:sp>
+        <p:nvSpPr>
+          <p:cNvPr id="20" name="Shape 18"/>
+          <p:cNvSpPr/>
+          <p:nvPr/>
+        </p:nvSpPr>
+        <p:spPr>
+          <a:xfrm>
+            <a:off x="6099048" y="2468880"/>
+            <a:ext cx="2688336" cy="1371600"/>
           </a:xfrm>
           <a:prstGeom prst="roundRect">
             <a:avLst>
-              <a:gd name="adj" fmla="val 13636"/>
+              <a:gd name="adj" fmla="val 4667"/>
             </a:avLst>
           </a:prstGeom>
           <a:solidFill>
-            <a:srgbClr val="E6F5F2"/>
+            <a:srgbClr val="FFFFFF"/>
           </a:solidFill>
-          <a:ln/>
-        </p:spPr>
-      </p:sp>
-      <p:sp>
-        <p:nvSpPr>
-          <p:cNvPr id="12" name="Text 10"/>
-          <p:cNvSpPr/>
-          <p:nvPr/>
-        </p:nvSpPr>
-        <p:spPr>
-          <a:xfrm>
-            <a:off x="4946904" y="1426464"/>
-            <a:ext cx="3584448" cy="402336"/>
+          <a:ln w="9525">
+            <a:solidFill>
+              <a:srgbClr val="C9D4E0"/>
+            </a:solidFill>
+            <a:prstDash val="solid"/>
+          </a:ln>
+          <a:effectLst>
+            <a:outerShdw sx="100000" sy="100000" kx="0" ky="0" algn="bl" rotWithShape="0" blurRad="88900" dist="25400" dir="2700000">
+              <a:srgbClr val="000000">
+                <a:alpha val="14000"/>
+              </a:srgbClr>
+            </a:outerShdw>
+          </a:effectLst>
+        </p:spPr>
+      </p:sp>
+      <p:sp>
+        <p:nvSpPr>
+          <p:cNvPr id="21" name="Shape 19"/>
+          <p:cNvSpPr/>
+          <p:nvPr/>
+        </p:nvSpPr>
+        <p:spPr>
+          <a:xfrm>
+            <a:off x="6208776" y="2578608"/>
+            <a:ext cx="292608" cy="292608"/>
+          </a:xfrm>
+          <a:prstGeom prst="ellipse">
+            <a:avLst/>
+          </a:prstGeom>
+          <a:solidFill>
+            <a:srgbClr val="D4860B"/>
+          </a:solidFill>
+          <a:ln/>
+        </p:spPr>
+      </p:sp>
+      <p:sp>
+        <p:nvSpPr>
+          <p:cNvPr id="22" name="Text 20"/>
+          <p:cNvSpPr/>
+          <p:nvPr/>
+        </p:nvSpPr>
+        <p:spPr>
+          <a:xfrm>
+            <a:off x="6208776" y="2564892"/>
+            <a:ext cx="292608" cy="292608"/>
           </a:xfrm>
           <a:prstGeom prst="rect">
             <a:avLst/>
@@ -10976,34 +11274,73 @@
           <a:bodyPr wrap="square" lIns="0" tIns="0" rIns="0" bIns="0" rtlCol="0" anchor="ctr"/>
           <a:lstStyle/>
           <a:p>
+            <a:pPr algn="ctr" indent="0" marL="0">
+              <a:buNone/>
+            </a:pPr>
+            <a:r>
+              <a:rPr lang="en-US" sz="1300" b="1" dirty="0">
+                <a:solidFill>
+                  <a:srgbClr val="FFFFFF"/>
+                </a:solidFill>
+                <a:latin typeface="Arial" pitchFamily="34" charset="0"/>
+                <a:ea typeface="Arial" pitchFamily="34" charset="-122"/>
+                <a:cs typeface="Arial" pitchFamily="34" charset="-120"/>
+              </a:rPr>
+              <a:t>3</a:t>
+            </a:r>
+            <a:endParaRPr lang="en-US" sz="1300" dirty="0"/>
+          </a:p>
+        </p:txBody>
+      </p:sp>
+      <p:sp>
+        <p:nvSpPr>
+          <p:cNvPr id="23" name="Text 21"/>
+          <p:cNvSpPr/>
+          <p:nvPr/>
+        </p:nvSpPr>
+        <p:spPr>
+          <a:xfrm>
+            <a:off x="6574536" y="2542032"/>
+            <a:ext cx="2148840" cy="365760"/>
+          </a:xfrm>
+          <a:prstGeom prst="rect">
+            <a:avLst/>
+          </a:prstGeom>
+          <a:noFill/>
+          <a:ln/>
+        </p:spPr>
+        <p:txBody>
+          <a:bodyPr wrap="square" lIns="0" tIns="0" rIns="0" bIns="0" rtlCol="0" anchor="ctr"/>
+          <a:lstStyle/>
+          <a:p>
             <a:pPr indent="0" marL="0">
               <a:buNone/>
             </a:pPr>
             <a:r>
-              <a:rPr lang="en-US" sz="1200" b="1" dirty="0">
-                <a:solidFill>
-                  <a:srgbClr val="1A9E8F"/>
-                </a:solidFill>
-                <a:latin typeface="Arial" pitchFamily="34" charset="0"/>
-                <a:ea typeface="Arial" pitchFamily="34" charset="-122"/>
-                <a:cs typeface="Arial" pitchFamily="34" charset="-120"/>
-              </a:rPr>
-              <a:t>The compliance workflow</a:t>
-            </a:r>
-            <a:endParaRPr lang="en-US" sz="1200" dirty="0"/>
-          </a:p>
-        </p:txBody>
-      </p:sp>
-      <p:sp>
-        <p:nvSpPr>
-          <p:cNvPr id="13" name="Text 11"/>
-          <p:cNvSpPr/>
-          <p:nvPr/>
-        </p:nvSpPr>
-        <p:spPr>
-          <a:xfrm>
-            <a:off x="4873752" y="1920240"/>
-            <a:ext cx="3694176" cy="1764792"/>
+              <a:rPr lang="en-US" sz="1050" b="1" dirty="0">
+                <a:solidFill>
+                  <a:srgbClr val="1E293B"/>
+                </a:solidFill>
+                <a:latin typeface="Arial" pitchFamily="34" charset="0"/>
+                <a:ea typeface="Arial" pitchFamily="34" charset="-122"/>
+                <a:cs typeface="Arial" pitchFamily="34" charset="-120"/>
+              </a:rPr>
+              <a:t>Grace period first</a:t>
+            </a:r>
+            <a:endParaRPr lang="en-US" sz="1050" dirty="0"/>
+          </a:p>
+        </p:txBody>
+      </p:sp>
+      <p:sp>
+        <p:nvSpPr>
+          <p:cNvPr id="24" name="Text 22"/>
+          <p:cNvSpPr/>
+          <p:nvPr/>
+        </p:nvSpPr>
+        <p:spPr>
+          <a:xfrm>
+            <a:off x="6227064" y="2962656"/>
+            <a:ext cx="2432304" cy="822960"/>
           </a:xfrm>
           <a:prstGeom prst="rect">
             <a:avLst/>
@@ -11015,94 +11352,27 @@
           <a:bodyPr wrap="square" lIns="0" tIns="0" rIns="0" bIns="0" rtlCol="0" anchor="ctr"/>
           <a:lstStyle/>
           <a:p>
-            <a:pPr marL="342900" indent="-342900">
-              <a:spcAft>
-                <a:spcPts val="500"/>
-              </a:spcAft>
-              <a:buSzPct val="100000"/>
-              <a:buChar char="•"/>
-            </a:pPr>
-            <a:r>
-              <a:rPr lang="en-US" sz="900" dirty="0">
-                <a:solidFill>
-                  <a:srgbClr val="1E293B"/>
-                </a:solidFill>
-                <a:latin typeface="Arial" pitchFamily="34" charset="0"/>
-                <a:ea typeface="Arial" pitchFamily="34" charset="-122"/>
-                <a:cs typeface="Arial" pitchFamily="34" charset="-120"/>
-              </a:rPr>
-              <a:t>Enumerate every instance's version + CU level (built on the Part 8 inventory)</a:t>
-            </a:r>
-            <a:endParaRPr lang="en-US" sz="900" dirty="0"/>
-          </a:p>
-          <a:p>
-            <a:pPr marL="342900" indent="-342900">
-              <a:spcAft>
-                <a:spcPts val="500"/>
-              </a:spcAft>
-              <a:buSzPct val="100000"/>
-              <a:buChar char="•"/>
-            </a:pPr>
-            <a:r>
-              <a:rPr lang="en-US" sz="900" dirty="0">
-                <a:solidFill>
-                  <a:srgbClr val="1E293B"/>
-                </a:solidFill>
-                <a:latin typeface="Arial" pitchFamily="34" charset="0"/>
-                <a:ea typeface="Arial" pitchFamily="34" charset="-122"/>
-                <a:cs typeface="Arial" pitchFamily="34" charset="-120"/>
-              </a:rPr>
-              <a:t>Flag instances behind current CU or past end-of-support</a:t>
-            </a:r>
-            <a:endParaRPr lang="en-US" sz="900" dirty="0"/>
-          </a:p>
-          <a:p>
-            <a:pPr marL="342900" indent="-342900">
-              <a:spcAft>
-                <a:spcPts val="500"/>
-              </a:spcAft>
-              <a:buSzPct val="100000"/>
-              <a:buChar char="•"/>
-            </a:pPr>
-            <a:r>
-              <a:rPr lang="en-US" sz="900" dirty="0">
-                <a:solidFill>
-                  <a:srgbClr val="1E293B"/>
-                </a:solidFill>
-                <a:latin typeface="Arial" pitchFamily="34" charset="0"/>
-                <a:ea typeface="Arial" pitchFamily="34" charset="-122"/>
-                <a:cs typeface="Arial" pitchFamily="34" charset="-120"/>
-              </a:rPr>
-              <a:t>Auto-apply CUs via the Arc SQL extension within a maintenance window</a:t>
-            </a:r>
-            <a:endParaRPr lang="en-US" sz="900" dirty="0"/>
-          </a:p>
-          <a:p>
-            <a:pPr marL="342900" indent="-342900">
-              <a:spcAft>
-                <a:spcPts val="500"/>
-              </a:spcAft>
-              <a:buSzPct val="100000"/>
-              <a:buChar char="•"/>
-            </a:pPr>
-            <a:r>
-              <a:rPr lang="en-US" sz="900" dirty="0">
-                <a:solidFill>
-                  <a:srgbClr val="1E293B"/>
-                </a:solidFill>
-                <a:latin typeface="Arial" pitchFamily="34" charset="0"/>
-                <a:ea typeface="Arial" pitchFamily="34" charset="-122"/>
-                <a:cs typeface="Arial" pitchFamily="34" charset="-120"/>
-              </a:rPr>
-              <a:t>If a CU needs app-compat testing, apply the targeted GDR to fix the CVE while testing continues</a:t>
-            </a:r>
-            <a:endParaRPr lang="en-US" sz="900" dirty="0"/>
-          </a:p>
-        </p:txBody>
-      </p:sp>
-      <p:sp>
-        <p:nvSpPr>
-          <p:cNvPr id="14" name="Shape 12"/>
+            <a:pPr indent="0" marL="0">
+              <a:buNone/>
+            </a:pPr>
+            <a:r>
+              <a:rPr lang="en-US" sz="850" dirty="0">
+                <a:solidFill>
+                  <a:srgbClr val="5B6B7C"/>
+                </a:solidFill>
+                <a:latin typeface="Arial" pitchFamily="34" charset="0"/>
+                <a:ea typeface="Arial" pitchFamily="34" charset="-122"/>
+                <a:cs typeface="Arial" pitchFamily="34" charset="-120"/>
+              </a:rPr>
+              <a:t>For a population with patch debt, set a 30-day CA grace period. Remediate the backlog before the block bites.</a:t>
+            </a:r>
+            <a:endParaRPr lang="en-US" sz="850" dirty="0"/>
+          </a:p>
+        </p:txBody>
+      </p:sp>
+      <p:sp>
+        <p:nvSpPr>
+          <p:cNvPr id="25" name="Shape 23"/>
           <p:cNvSpPr/>
           <p:nvPr/>
         </p:nvSpPr>
@@ -11129,7 +11399,7 @@
       </p:sp>
       <p:sp>
         <p:nvSpPr>
-          <p:cNvPr id="15" name="Text 13"/>
+          <p:cNvPr id="26" name="Text 24"/>
           <p:cNvSpPr/>
           <p:nvPr/>
         </p:nvSpPr>
@@ -11160,7 +11430,7 @@
                 <a:ea typeface="Arial" pitchFamily="34" charset="-122"/>
                 <a:cs typeface="Arial" pitchFamily="34" charset="-120"/>
               </a:rPr>
-              <a:t>End-of-support is its own SLA: </a:t>
+              <a:t>Why the grace period is non-negotiable: </a:t>
             </a:r>
             <a:pPr indent="0" marL="0">
               <a:buNone/>
@@ -11174,7 +11444,7 @@
                 <a:ea typeface="Arial" pitchFamily="34" charset="-122"/>
                 <a:cs typeface="Arial" pitchFamily="34" charset="-120"/>
               </a:rPr>
-              <a:t>an instance two-plus CUs behind may carry vulnerabilities fixed only in the current CU. SQL Server 2019 mainstream support ended July 2024 (ESU via Arc); 2022 runs through January 2028. EOS-breached instances need upgrade planning, not just patching.</a:t>
+              <a:t>immediately blocking access on day one against a population with accumulated patch debt generates helpdesk volume that obscures the machines genuinely needing emergency attention. Use the first 30 days to clear the backlog, then let the block take effect.</a:t>
             </a:r>
             <a:endParaRPr lang="en-US" sz="1000" dirty="0"/>
           </a:p>
@@ -11245,7 +11515,7 @@
                 <a:ea typeface="Arial" pitchFamily="34" charset="-122"/>
                 <a:cs typeface="Arial" pitchFamily="34" charset="-120"/>
               </a:rPr>
-              <a:t>THE EVIDENCE HALF</a:t>
+              <a:t>SQL SERVER PATCHING</a:t>
             </a:r>
             <a:endParaRPr lang="en-US" sz="1100" dirty="0"/>
           </a:p>
@@ -11284,7 +11554,7 @@
                 <a:ea typeface="Arial" pitchFamily="34" charset="-122"/>
                 <a:cs typeface="Arial" pitchFamily="34" charset="-120"/>
               </a:rPr>
-              <a:t>The daily compliance record: the RA-5 / SI-2 KSI artifact</a:t>
+              <a:t>A different cadence: cumulative updates, GDRs, and end-of-support</a:t>
             </a:r>
             <a:endParaRPr lang="en-US" sz="2200" dirty="0"/>
           </a:p>
@@ -11323,7 +11593,7 @@
                 <a:ea typeface="Arial" pitchFamily="34" charset="-122"/>
                 <a:cs typeface="Arial" pitchFamily="34" charset="-120"/>
               </a:rPr>
-              <a:t>Federal AAN — Book 11 Vulnerability Management · CSI Team Draft — Internal · FedRAMP Moderate · Date Code 2026-07-08 13:21 ET</a:t>
+              <a:t>Federal AAN — Book 11 Vulnerability Management · CSI Team Draft — Internal · FedRAMP Moderate · Date Code 2026-07-08 13:32 ET</a:t>
             </a:r>
             <a:endParaRPr lang="en-US" sz="800" dirty="0"/>
           </a:p>
@@ -11376,16 +11646,16 @@
         </p:nvSpPr>
         <p:spPr>
           <a:xfrm>
-            <a:off x="502920" y="1325880"/>
-            <a:ext cx="4041648" cy="2743200"/>
+            <a:off x="502920" y="1298448"/>
+            <a:ext cx="4041648" cy="2514600"/>
           </a:xfrm>
           <a:prstGeom prst="roundRect">
             <a:avLst>
-              <a:gd name="adj" fmla="val 2333"/>
+              <a:gd name="adj" fmla="val 2545"/>
             </a:avLst>
           </a:prstGeom>
           <a:solidFill>
-            <a:srgbClr val="F3F5F8"/>
+            <a:srgbClr val="FFFFFF"/>
           </a:solidFill>
           <a:ln w="9525">
             <a:solidFill>
@@ -11393,689 +11663,200 @@
             </a:solidFill>
             <a:prstDash val="solid"/>
           </a:ln>
-        </p:spPr>
-      </p:sp>
-      <p:sp>
-        <p:nvSpPr>
-          <p:cNvPr id="7" name="Text 5"/>
-          <p:cNvSpPr/>
-          <p:nvPr/>
-        </p:nvSpPr>
-        <p:spPr>
-          <a:xfrm>
-            <a:off x="640080" y="1417320"/>
-            <a:ext cx="3767328" cy="274320"/>
-          </a:xfrm>
-          <a:prstGeom prst="rect">
-            <a:avLst/>
-          </a:prstGeom>
-          <a:noFill/>
-          <a:ln/>
-        </p:spPr>
-        <p:txBody>
-          <a:bodyPr wrap="square" lIns="0" tIns="0" rIns="0" bIns="0" rtlCol="0" anchor="ctr"/>
-          <a:lstStyle/>
-          <a:p>
-            <a:pPr indent="0" marL="0">
-              <a:buNone/>
-            </a:pPr>
-            <a:r>
-              <a:rPr lang="en-US" sz="1000" b="1" dirty="0">
-                <a:solidFill>
-                  <a:srgbClr val="1F3A5F"/>
-                </a:solidFill>
-                <a:latin typeface="Consolas" pitchFamily="34" charset="0"/>
-                <a:ea typeface="Consolas" pitchFamily="34" charset="-122"/>
-                <a:cs typeface="Consolas" pitchFamily="34" charset="-120"/>
-              </a:rPr>
-              <a:t>compliance-summary-&lt;date&gt;.json</a:t>
-            </a:r>
-            <a:endParaRPr lang="en-US" sz="1000" dirty="0"/>
-          </a:p>
-        </p:txBody>
-      </p:sp>
-      <p:sp>
-        <p:nvSpPr>
-          <p:cNvPr id="8" name="Text 6"/>
-          <p:cNvSpPr/>
-          <p:nvPr/>
-        </p:nvSpPr>
-        <p:spPr>
-          <a:xfrm>
-            <a:off x="658368" y="1755648"/>
-            <a:ext cx="2468880" cy="256032"/>
-          </a:xfrm>
-          <a:prstGeom prst="rect">
-            <a:avLst/>
-          </a:prstGeom>
-          <a:noFill/>
-          <a:ln/>
-        </p:spPr>
-        <p:txBody>
-          <a:bodyPr wrap="square" lIns="0" tIns="0" rIns="0" bIns="0" rtlCol="0" anchor="ctr"/>
-          <a:lstStyle/>
-          <a:p>
-            <a:pPr indent="0" marL="0">
-              <a:buNone/>
-            </a:pPr>
-            <a:r>
-              <a:rPr lang="en-US" sz="950" dirty="0">
-                <a:solidFill>
-                  <a:srgbClr val="5B6B7C"/>
-                </a:solidFill>
-                <a:latin typeface="Consolas" pitchFamily="34" charset="0"/>
-                <a:ea typeface="Consolas" pitchFamily="34" charset="-122"/>
-                <a:cs typeface="Consolas" pitchFamily="34" charset="-120"/>
-              </a:rPr>
-              <a:t>TotalFindings</a:t>
-            </a:r>
-            <a:endParaRPr lang="en-US" sz="950" dirty="0"/>
-          </a:p>
-        </p:txBody>
-      </p:sp>
-      <p:sp>
-        <p:nvSpPr>
-          <p:cNvPr id="9" name="Text 7"/>
-          <p:cNvSpPr/>
-          <p:nvPr/>
-        </p:nvSpPr>
-        <p:spPr>
-          <a:xfrm>
-            <a:off x="3108960" y="1755648"/>
-            <a:ext cx="1325880" cy="256032"/>
-          </a:xfrm>
-          <a:prstGeom prst="rect">
-            <a:avLst/>
-          </a:prstGeom>
-          <a:noFill/>
-          <a:ln/>
-        </p:spPr>
-        <p:txBody>
-          <a:bodyPr wrap="square" lIns="0" tIns="0" rIns="0" bIns="0" rtlCol="0" anchor="ctr"/>
-          <a:lstStyle/>
-          <a:p>
-            <a:pPr algn="r" indent="0" marL="0">
-              <a:buNone/>
-            </a:pPr>
-            <a:r>
-              <a:rPr lang="en-US" sz="950" b="1" dirty="0">
-                <a:solidFill>
-                  <a:srgbClr val="1E293B"/>
-                </a:solidFill>
-                <a:latin typeface="Consolas" pitchFamily="34" charset="0"/>
-                <a:ea typeface="Consolas" pitchFamily="34" charset="-122"/>
-                <a:cs typeface="Consolas" pitchFamily="34" charset="-120"/>
-              </a:rPr>
-              <a:t>847</a:t>
-            </a:r>
-            <a:endParaRPr lang="en-US" sz="950" dirty="0"/>
-          </a:p>
-        </p:txBody>
-      </p:sp>
-      <p:sp>
-        <p:nvSpPr>
-          <p:cNvPr id="10" name="Text 8"/>
-          <p:cNvSpPr/>
-          <p:nvPr/>
-        </p:nvSpPr>
-        <p:spPr>
-          <a:xfrm>
-            <a:off x="658368" y="2039112"/>
-            <a:ext cx="2468880" cy="256032"/>
-          </a:xfrm>
-          <a:prstGeom prst="rect">
-            <a:avLst/>
-          </a:prstGeom>
-          <a:noFill/>
-          <a:ln/>
-        </p:spPr>
-        <p:txBody>
-          <a:bodyPr wrap="square" lIns="0" tIns="0" rIns="0" bIns="0" rtlCol="0" anchor="ctr"/>
-          <a:lstStyle/>
-          <a:p>
-            <a:pPr indent="0" marL="0">
-              <a:buNone/>
-            </a:pPr>
-            <a:r>
-              <a:rPr lang="en-US" sz="950" dirty="0">
-                <a:solidFill>
-                  <a:srgbClr val="5B6B7C"/>
-                </a:solidFill>
-                <a:latin typeface="Consolas" pitchFamily="34" charset="0"/>
-                <a:ea typeface="Consolas" pitchFamily="34" charset="-122"/>
-                <a:cs typeface="Consolas" pitchFamily="34" charset="-120"/>
-              </a:rPr>
-              <a:t>KEVFindings</a:t>
-            </a:r>
-            <a:endParaRPr lang="en-US" sz="950" dirty="0"/>
-          </a:p>
-        </p:txBody>
-      </p:sp>
-      <p:sp>
-        <p:nvSpPr>
-          <p:cNvPr id="11" name="Text 9"/>
-          <p:cNvSpPr/>
-          <p:nvPr/>
-        </p:nvSpPr>
-        <p:spPr>
-          <a:xfrm>
-            <a:off x="3108960" y="2039112"/>
-            <a:ext cx="1325880" cy="256032"/>
-          </a:xfrm>
-          <a:prstGeom prst="rect">
-            <a:avLst/>
-          </a:prstGeom>
-          <a:noFill/>
-          <a:ln/>
-        </p:spPr>
-        <p:txBody>
-          <a:bodyPr wrap="square" lIns="0" tIns="0" rIns="0" bIns="0" rtlCol="0" anchor="ctr"/>
-          <a:lstStyle/>
-          <a:p>
-            <a:pPr algn="r" indent="0" marL="0">
-              <a:buNone/>
-            </a:pPr>
-            <a:r>
-              <a:rPr lang="en-US" sz="950" b="1" dirty="0">
-                <a:solidFill>
-                  <a:srgbClr val="C0392B"/>
-                </a:solidFill>
-                <a:latin typeface="Consolas" pitchFamily="34" charset="0"/>
-                <a:ea typeface="Consolas" pitchFamily="34" charset="-122"/>
-                <a:cs typeface="Consolas" pitchFamily="34" charset="-120"/>
-              </a:rPr>
-              <a:t>23</a:t>
-            </a:r>
-            <a:endParaRPr lang="en-US" sz="950" dirty="0"/>
-          </a:p>
-        </p:txBody>
-      </p:sp>
-      <p:sp>
-        <p:nvSpPr>
-          <p:cNvPr id="12" name="Text 10"/>
-          <p:cNvSpPr/>
-          <p:nvPr/>
-        </p:nvSpPr>
-        <p:spPr>
-          <a:xfrm>
-            <a:off x="658368" y="2322576"/>
-            <a:ext cx="2468880" cy="256032"/>
-          </a:xfrm>
-          <a:prstGeom prst="rect">
-            <a:avLst/>
-          </a:prstGeom>
-          <a:noFill/>
-          <a:ln/>
-        </p:spPr>
-        <p:txBody>
-          <a:bodyPr wrap="square" lIns="0" tIns="0" rIns="0" bIns="0" rtlCol="0" anchor="ctr"/>
-          <a:lstStyle/>
-          <a:p>
-            <a:pPr indent="0" marL="0">
-              <a:buNone/>
-            </a:pPr>
-            <a:r>
-              <a:rPr lang="en-US" sz="950" dirty="0">
-                <a:solidFill>
-                  <a:srgbClr val="5B6B7C"/>
-                </a:solidFill>
-                <a:latin typeface="Consolas" pitchFamily="34" charset="0"/>
-                <a:ea typeface="Consolas" pitchFamily="34" charset="-122"/>
-                <a:cs typeface="Consolas" pitchFamily="34" charset="-120"/>
-              </a:rPr>
-              <a:t>P0_KEV_Internet</a:t>
-            </a:r>
-            <a:endParaRPr lang="en-US" sz="950" dirty="0"/>
-          </a:p>
-        </p:txBody>
-      </p:sp>
-      <p:sp>
-        <p:nvSpPr>
-          <p:cNvPr id="13" name="Text 11"/>
-          <p:cNvSpPr/>
-          <p:nvPr/>
-        </p:nvSpPr>
-        <p:spPr>
-          <a:xfrm>
-            <a:off x="3108960" y="2322576"/>
-            <a:ext cx="1325880" cy="256032"/>
-          </a:xfrm>
-          <a:prstGeom prst="rect">
-            <a:avLst/>
-          </a:prstGeom>
-          <a:noFill/>
-          <a:ln/>
-        </p:spPr>
-        <p:txBody>
-          <a:bodyPr wrap="square" lIns="0" tIns="0" rIns="0" bIns="0" rtlCol="0" anchor="ctr"/>
-          <a:lstStyle/>
-          <a:p>
-            <a:pPr algn="r" indent="0" marL="0">
-              <a:buNone/>
-            </a:pPr>
-            <a:r>
-              <a:rPr lang="en-US" sz="950" b="1" dirty="0">
-                <a:solidFill>
-                  <a:srgbClr val="C0392B"/>
-                </a:solidFill>
-                <a:latin typeface="Consolas" pitchFamily="34" charset="0"/>
-                <a:ea typeface="Consolas" pitchFamily="34" charset="-122"/>
-                <a:cs typeface="Consolas" pitchFamily="34" charset="-120"/>
-              </a:rPr>
-              <a:t>3</a:t>
-            </a:r>
-            <a:endParaRPr lang="en-US" sz="950" dirty="0"/>
-          </a:p>
-        </p:txBody>
-      </p:sp>
-      <p:sp>
-        <p:nvSpPr>
-          <p:cNvPr id="14" name="Text 12"/>
-          <p:cNvSpPr/>
-          <p:nvPr/>
-        </p:nvSpPr>
-        <p:spPr>
-          <a:xfrm>
-            <a:off x="658368" y="2606040"/>
-            <a:ext cx="2468880" cy="256032"/>
-          </a:xfrm>
-          <a:prstGeom prst="rect">
-            <a:avLst/>
-          </a:prstGeom>
-          <a:noFill/>
-          <a:ln/>
-        </p:spPr>
-        <p:txBody>
-          <a:bodyPr wrap="square" lIns="0" tIns="0" rIns="0" bIns="0" rtlCol="0" anchor="ctr"/>
-          <a:lstStyle/>
-          <a:p>
-            <a:pPr indent="0" marL="0">
-              <a:buNone/>
-            </a:pPr>
-            <a:r>
-              <a:rPr lang="en-US" sz="950" dirty="0">
-                <a:solidFill>
-                  <a:srgbClr val="5B6B7C"/>
-                </a:solidFill>
-                <a:latin typeface="Consolas" pitchFamily="34" charset="0"/>
-                <a:ea typeface="Consolas" pitchFamily="34" charset="-122"/>
-                <a:cs typeface="Consolas" pitchFamily="34" charset="-120"/>
-              </a:rPr>
-              <a:t>P1_KEV_Internal</a:t>
-            </a:r>
-            <a:endParaRPr lang="en-US" sz="950" dirty="0"/>
-          </a:p>
-        </p:txBody>
-      </p:sp>
-      <p:sp>
-        <p:nvSpPr>
-          <p:cNvPr id="15" name="Text 13"/>
-          <p:cNvSpPr/>
-          <p:nvPr/>
-        </p:nvSpPr>
-        <p:spPr>
-          <a:xfrm>
-            <a:off x="3108960" y="2606040"/>
-            <a:ext cx="1325880" cy="256032"/>
-          </a:xfrm>
-          <a:prstGeom prst="rect">
-            <a:avLst/>
-          </a:prstGeom>
-          <a:noFill/>
-          <a:ln/>
-        </p:spPr>
-        <p:txBody>
-          <a:bodyPr wrap="square" lIns="0" tIns="0" rIns="0" bIns="0" rtlCol="0" anchor="ctr"/>
-          <a:lstStyle/>
-          <a:p>
-            <a:pPr algn="r" indent="0" marL="0">
-              <a:buNone/>
-            </a:pPr>
-            <a:r>
-              <a:rPr lang="en-US" sz="950" b="1" dirty="0">
-                <a:solidFill>
-                  <a:srgbClr val="D4860B"/>
-                </a:solidFill>
-                <a:latin typeface="Consolas" pitchFamily="34" charset="0"/>
-                <a:ea typeface="Consolas" pitchFamily="34" charset="-122"/>
-                <a:cs typeface="Consolas" pitchFamily="34" charset="-120"/>
-              </a:rPr>
-              <a:t>20</a:t>
-            </a:r>
-            <a:endParaRPr lang="en-US" sz="950" dirty="0"/>
-          </a:p>
-        </p:txBody>
-      </p:sp>
-      <p:sp>
-        <p:nvSpPr>
-          <p:cNvPr id="16" name="Text 14"/>
-          <p:cNvSpPr/>
-          <p:nvPr/>
-        </p:nvSpPr>
-        <p:spPr>
-          <a:xfrm>
-            <a:off x="658368" y="2889504"/>
-            <a:ext cx="2468880" cy="256032"/>
-          </a:xfrm>
-          <a:prstGeom prst="rect">
-            <a:avLst/>
-          </a:prstGeom>
-          <a:noFill/>
-          <a:ln/>
-        </p:spPr>
-        <p:txBody>
-          <a:bodyPr wrap="square" lIns="0" tIns="0" rIns="0" bIns="0" rtlCol="0" anchor="ctr"/>
-          <a:lstStyle/>
-          <a:p>
-            <a:pPr indent="0" marL="0">
-              <a:buNone/>
-            </a:pPr>
-            <a:r>
-              <a:rPr lang="en-US" sz="950" dirty="0">
-                <a:solidFill>
-                  <a:srgbClr val="5B6B7C"/>
-                </a:solidFill>
-                <a:latin typeface="Consolas" pitchFamily="34" charset="0"/>
-                <a:ea typeface="Consolas" pitchFamily="34" charset="-122"/>
-                <a:cs typeface="Consolas" pitchFamily="34" charset="-120"/>
-              </a:rPr>
-              <a:t>SLABreached</a:t>
-            </a:r>
-            <a:endParaRPr lang="en-US" sz="950" dirty="0"/>
-          </a:p>
-        </p:txBody>
-      </p:sp>
-      <p:sp>
-        <p:nvSpPr>
-          <p:cNvPr id="17" name="Text 15"/>
-          <p:cNvSpPr/>
-          <p:nvPr/>
-        </p:nvSpPr>
-        <p:spPr>
-          <a:xfrm>
-            <a:off x="3108960" y="2889504"/>
-            <a:ext cx="1325880" cy="256032"/>
-          </a:xfrm>
-          <a:prstGeom prst="rect">
-            <a:avLst/>
-          </a:prstGeom>
-          <a:noFill/>
-          <a:ln/>
-        </p:spPr>
-        <p:txBody>
-          <a:bodyPr wrap="square" lIns="0" tIns="0" rIns="0" bIns="0" rtlCol="0" anchor="ctr"/>
-          <a:lstStyle/>
-          <a:p>
-            <a:pPr algn="r" indent="0" marL="0">
-              <a:buNone/>
-            </a:pPr>
-            <a:r>
-              <a:rPr lang="en-US" sz="950" b="1" dirty="0">
-                <a:solidFill>
-                  <a:srgbClr val="D4860B"/>
-                </a:solidFill>
-                <a:latin typeface="Consolas" pitchFamily="34" charset="0"/>
-                <a:ea typeface="Consolas" pitchFamily="34" charset="-122"/>
-                <a:cs typeface="Consolas" pitchFamily="34" charset="-120"/>
-              </a:rPr>
-              <a:t>12</a:t>
-            </a:r>
-            <a:endParaRPr lang="en-US" sz="950" dirty="0"/>
-          </a:p>
-        </p:txBody>
-      </p:sp>
-      <p:sp>
-        <p:nvSpPr>
-          <p:cNvPr id="18" name="Text 16"/>
-          <p:cNvSpPr/>
-          <p:nvPr/>
-        </p:nvSpPr>
-        <p:spPr>
-          <a:xfrm>
-            <a:off x="658368" y="3172968"/>
-            <a:ext cx="2468880" cy="256032"/>
-          </a:xfrm>
-          <a:prstGeom prst="rect">
-            <a:avLst/>
-          </a:prstGeom>
-          <a:noFill/>
-          <a:ln/>
-        </p:spPr>
-        <p:txBody>
-          <a:bodyPr wrap="square" lIns="0" tIns="0" rIns="0" bIns="0" rtlCol="0" anchor="ctr"/>
-          <a:lstStyle/>
-          <a:p>
-            <a:pPr indent="0" marL="0">
-              <a:buNone/>
-            </a:pPr>
-            <a:r>
-              <a:rPr lang="en-US" sz="950" dirty="0">
-                <a:solidFill>
-                  <a:srgbClr val="5B6B7C"/>
-                </a:solidFill>
-                <a:latin typeface="Consolas" pitchFamily="34" charset="0"/>
-                <a:ea typeface="Consolas" pitchFamily="34" charset="-122"/>
-                <a:cs typeface="Consolas" pitchFamily="34" charset="-120"/>
-              </a:rPr>
-              <a:t>SLABreachedKEV</a:t>
-            </a:r>
-            <a:endParaRPr lang="en-US" sz="950" dirty="0"/>
-          </a:p>
-        </p:txBody>
-      </p:sp>
-      <p:sp>
-        <p:nvSpPr>
-          <p:cNvPr id="19" name="Text 17"/>
-          <p:cNvSpPr/>
-          <p:nvPr/>
-        </p:nvSpPr>
-        <p:spPr>
-          <a:xfrm>
-            <a:off x="3108960" y="3172968"/>
-            <a:ext cx="1325880" cy="256032"/>
-          </a:xfrm>
-          <a:prstGeom prst="rect">
-            <a:avLst/>
-          </a:prstGeom>
-          <a:noFill/>
-          <a:ln/>
-        </p:spPr>
-        <p:txBody>
-          <a:bodyPr wrap="square" lIns="0" tIns="0" rIns="0" bIns="0" rtlCol="0" anchor="ctr"/>
-          <a:lstStyle/>
-          <a:p>
-            <a:pPr algn="r" indent="0" marL="0">
-              <a:buNone/>
-            </a:pPr>
-            <a:r>
-              <a:rPr lang="en-US" sz="950" b="1" dirty="0">
-                <a:solidFill>
-                  <a:srgbClr val="1A9E8F"/>
-                </a:solidFill>
-                <a:latin typeface="Consolas" pitchFamily="34" charset="0"/>
-                <a:ea typeface="Consolas" pitchFamily="34" charset="-122"/>
-                <a:cs typeface="Consolas" pitchFamily="34" charset="-120"/>
-              </a:rPr>
-              <a:t>0</a:t>
-            </a:r>
-            <a:endParaRPr lang="en-US" sz="950" dirty="0"/>
-          </a:p>
-        </p:txBody>
-      </p:sp>
-      <p:sp>
-        <p:nvSpPr>
-          <p:cNvPr id="20" name="Text 18"/>
-          <p:cNvSpPr/>
-          <p:nvPr/>
-        </p:nvSpPr>
-        <p:spPr>
-          <a:xfrm>
-            <a:off x="658368" y="3456432"/>
-            <a:ext cx="2468880" cy="256032"/>
-          </a:xfrm>
-          <a:prstGeom prst="rect">
-            <a:avLst/>
-          </a:prstGeom>
-          <a:noFill/>
-          <a:ln/>
-        </p:spPr>
-        <p:txBody>
-          <a:bodyPr wrap="square" lIns="0" tIns="0" rIns="0" bIns="0" rtlCol="0" anchor="ctr"/>
-          <a:lstStyle/>
-          <a:p>
-            <a:pPr indent="0" marL="0">
-              <a:buNone/>
-            </a:pPr>
-            <a:r>
-              <a:rPr lang="en-US" sz="950" dirty="0">
-                <a:solidFill>
-                  <a:srgbClr val="5B6B7C"/>
-                </a:solidFill>
-                <a:latin typeface="Consolas" pitchFamily="34" charset="0"/>
-                <a:ea typeface="Consolas" pitchFamily="34" charset="-122"/>
-                <a:cs typeface="Consolas" pitchFamily="34" charset="-120"/>
-              </a:rPr>
-              <a:t>PatchComplianceRate</a:t>
-            </a:r>
-            <a:endParaRPr lang="en-US" sz="950" dirty="0"/>
-          </a:p>
-        </p:txBody>
-      </p:sp>
-      <p:sp>
-        <p:nvSpPr>
-          <p:cNvPr id="21" name="Text 19"/>
-          <p:cNvSpPr/>
-          <p:nvPr/>
-        </p:nvSpPr>
-        <p:spPr>
-          <a:xfrm>
-            <a:off x="3108960" y="3456432"/>
-            <a:ext cx="1325880" cy="256032"/>
-          </a:xfrm>
-          <a:prstGeom prst="rect">
-            <a:avLst/>
-          </a:prstGeom>
-          <a:noFill/>
-          <a:ln/>
-        </p:spPr>
-        <p:txBody>
-          <a:bodyPr wrap="square" lIns="0" tIns="0" rIns="0" bIns="0" rtlCol="0" anchor="ctr"/>
-          <a:lstStyle/>
-          <a:p>
-            <a:pPr algn="r" indent="0" marL="0">
-              <a:buNone/>
-            </a:pPr>
-            <a:r>
-              <a:rPr lang="en-US" sz="950" b="1" dirty="0">
-                <a:solidFill>
-                  <a:srgbClr val="1A9E8F"/>
-                </a:solidFill>
-                <a:latin typeface="Consolas" pitchFamily="34" charset="0"/>
-                <a:ea typeface="Consolas" pitchFamily="34" charset="-122"/>
-                <a:cs typeface="Consolas" pitchFamily="34" charset="-120"/>
-              </a:rPr>
-              <a:t>98.6%</a:t>
-            </a:r>
-            <a:endParaRPr lang="en-US" sz="950" dirty="0"/>
-          </a:p>
-        </p:txBody>
-      </p:sp>
-      <p:sp>
-        <p:nvSpPr>
-          <p:cNvPr id="22" name="Text 20"/>
-          <p:cNvSpPr/>
-          <p:nvPr/>
-        </p:nvSpPr>
-        <p:spPr>
-          <a:xfrm>
-            <a:off x="658368" y="3739896"/>
-            <a:ext cx="2468880" cy="256032"/>
-          </a:xfrm>
-          <a:prstGeom prst="rect">
-            <a:avLst/>
-          </a:prstGeom>
-          <a:noFill/>
-          <a:ln/>
-        </p:spPr>
-        <p:txBody>
-          <a:bodyPr wrap="square" lIns="0" tIns="0" rIns="0" bIns="0" rtlCol="0" anchor="ctr"/>
-          <a:lstStyle/>
-          <a:p>
-            <a:pPr indent="0" marL="0">
-              <a:buNone/>
-            </a:pPr>
-            <a:r>
-              <a:rPr lang="en-US" sz="950" dirty="0">
-                <a:solidFill>
-                  <a:srgbClr val="5B6B7C"/>
-                </a:solidFill>
-                <a:latin typeface="Consolas" pitchFamily="34" charset="0"/>
-                <a:ea typeface="Consolas" pitchFamily="34" charset="-122"/>
-                <a:cs typeface="Consolas" pitchFamily="34" charset="-120"/>
-              </a:rPr>
-              <a:t>KEVCatalogSize</a:t>
-            </a:r>
-            <a:endParaRPr lang="en-US" sz="950" dirty="0"/>
-          </a:p>
-        </p:txBody>
-      </p:sp>
-      <p:sp>
-        <p:nvSpPr>
-          <p:cNvPr id="23" name="Text 21"/>
-          <p:cNvSpPr/>
-          <p:nvPr/>
-        </p:nvSpPr>
-        <p:spPr>
-          <a:xfrm>
-            <a:off x="3108960" y="3739896"/>
-            <a:ext cx="1325880" cy="256032"/>
-          </a:xfrm>
-          <a:prstGeom prst="rect">
-            <a:avLst/>
-          </a:prstGeom>
-          <a:noFill/>
-          <a:ln/>
-        </p:spPr>
-        <p:txBody>
-          <a:bodyPr wrap="square" lIns="0" tIns="0" rIns="0" bIns="0" rtlCol="0" anchor="ctr"/>
-          <a:lstStyle/>
-          <a:p>
-            <a:pPr algn="r" indent="0" marL="0">
-              <a:buNone/>
-            </a:pPr>
-            <a:r>
-              <a:rPr lang="en-US" sz="950" b="1" dirty="0">
-                <a:solidFill>
-                  <a:srgbClr val="5B6B7C"/>
-                </a:solidFill>
-                <a:latin typeface="Consolas" pitchFamily="34" charset="0"/>
-                <a:ea typeface="Consolas" pitchFamily="34" charset="-122"/>
-                <a:cs typeface="Consolas" pitchFamily="34" charset="-120"/>
-              </a:rPr>
-              <a:t>1148</a:t>
-            </a:r>
-            <a:endParaRPr lang="en-US" sz="950" dirty="0"/>
-          </a:p>
-        </p:txBody>
-      </p:sp>
-      <p:sp>
-        <p:nvSpPr>
-          <p:cNvPr id="24" name="Shape 22"/>
-          <p:cNvSpPr/>
-          <p:nvPr/>
-        </p:nvSpPr>
-        <p:spPr>
-          <a:xfrm>
-            <a:off x="4690872" y="1325880"/>
-            <a:ext cx="4041648" cy="1298448"/>
+          <a:effectLst>
+            <a:outerShdw sx="100000" sy="100000" kx="0" ky="0" algn="bl" rotWithShape="0" blurRad="88900" dist="25400" dir="2700000">
+              <a:srgbClr val="000000">
+                <a:alpha val="14000"/>
+              </a:srgbClr>
+            </a:outerShdw>
+          </a:effectLst>
+        </p:spPr>
+      </p:sp>
+      <p:sp>
+        <p:nvSpPr>
+          <p:cNvPr id="7" name="Shape 5"/>
+          <p:cNvSpPr/>
+          <p:nvPr/>
+        </p:nvSpPr>
+        <p:spPr>
+          <a:xfrm>
+            <a:off x="630936" y="1426464"/>
+            <a:ext cx="3785616" cy="402336"/>
           </a:xfrm>
           <a:prstGeom prst="roundRect">
             <a:avLst>
-              <a:gd name="adj" fmla="val 4930"/>
+              <a:gd name="adj" fmla="val 13636"/>
             </a:avLst>
           </a:prstGeom>
           <a:solidFill>
-            <a:srgbClr val="E6F5F2"/>
+            <a:srgbClr val="EDF3F9"/>
+          </a:solidFill>
+          <a:ln/>
+        </p:spPr>
+      </p:sp>
+      <p:sp>
+        <p:nvSpPr>
+          <p:cNvPr id="8" name="Text 6"/>
+          <p:cNvSpPr/>
+          <p:nvPr/>
+        </p:nvSpPr>
+        <p:spPr>
+          <a:xfrm>
+            <a:off x="758952" y="1426464"/>
+            <a:ext cx="3584448" cy="402336"/>
+          </a:xfrm>
+          <a:prstGeom prst="rect">
+            <a:avLst/>
+          </a:prstGeom>
+          <a:noFill/>
+          <a:ln/>
+        </p:spPr>
+        <p:txBody>
+          <a:bodyPr wrap="square" lIns="0" tIns="0" rIns="0" bIns="0" rtlCol="0" anchor="ctr"/>
+          <a:lstStyle/>
+          <a:p>
+            <a:pPr indent="0" marL="0">
+              <a:buNone/>
+            </a:pPr>
+            <a:r>
+              <a:rPr lang="en-US" sz="1200" b="1" dirty="0">
+                <a:solidFill>
+                  <a:srgbClr val="1F3A5F"/>
+                </a:solidFill>
+                <a:latin typeface="Arial" pitchFamily="34" charset="0"/>
+                <a:ea typeface="Arial" pitchFamily="34" charset="-122"/>
+                <a:cs typeface="Arial" pitchFamily="34" charset="-120"/>
+              </a:rPr>
+              <a:t>The CU / GDR distinction</a:t>
+            </a:r>
+            <a:endParaRPr lang="en-US" sz="1200" dirty="0"/>
+          </a:p>
+        </p:txBody>
+      </p:sp>
+      <p:sp>
+        <p:nvSpPr>
+          <p:cNvPr id="9" name="Text 7"/>
+          <p:cNvSpPr/>
+          <p:nvPr/>
+        </p:nvSpPr>
+        <p:spPr>
+          <a:xfrm>
+            <a:off x="685800" y="1920240"/>
+            <a:ext cx="3694176" cy="1764792"/>
+          </a:xfrm>
+          <a:prstGeom prst="rect">
+            <a:avLst/>
+          </a:prstGeom>
+          <a:noFill/>
+          <a:ln/>
+        </p:spPr>
+        <p:txBody>
+          <a:bodyPr wrap="square" lIns="0" tIns="0" rIns="0" bIns="0" rtlCol="0" anchor="ctr"/>
+          <a:lstStyle/>
+          <a:p>
+            <a:pPr marL="342900" indent="-342900">
+              <a:spcAft>
+                <a:spcPts val="500"/>
+              </a:spcAft>
+              <a:buSzPct val="100000"/>
+              <a:buChar char="•"/>
+            </a:pPr>
+            <a:r>
+              <a:rPr lang="en-US" sz="900" dirty="0">
+                <a:solidFill>
+                  <a:srgbClr val="1E293B"/>
+                </a:solidFill>
+                <a:latin typeface="Arial" pitchFamily="34" charset="0"/>
+                <a:ea typeface="Arial" pitchFamily="34" charset="-122"/>
+                <a:cs typeface="Arial" pitchFamily="34" charset="-120"/>
+              </a:rPr>
+              <a:t>CUs release ~every 2 months: security fixes AND product bugs</a:t>
+            </a:r>
+            <a:endParaRPr lang="en-US" sz="900" dirty="0"/>
+          </a:p>
+          <a:p>
+            <a:pPr marL="342900" indent="-342900">
+              <a:spcAft>
+                <a:spcPts val="500"/>
+              </a:spcAft>
+              <a:buSzPct val="100000"/>
+              <a:buChar char="•"/>
+            </a:pPr>
+            <a:r>
+              <a:rPr lang="en-US" sz="900" dirty="0">
+                <a:solidFill>
+                  <a:srgbClr val="1E293B"/>
+                </a:solidFill>
+                <a:latin typeface="Arial" pitchFamily="34" charset="0"/>
+                <a:ea typeface="Arial" pitchFamily="34" charset="-122"/>
+                <a:cs typeface="Arial" pitchFamily="34" charset="-120"/>
+              </a:rPr>
+              <a:t>GDRs release between CUs: security-only, narrower</a:t>
+            </a:r>
+            <a:endParaRPr lang="en-US" sz="900" dirty="0"/>
+          </a:p>
+          <a:p>
+            <a:pPr marL="342900" indent="-342900">
+              <a:spcAft>
+                <a:spcPts val="500"/>
+              </a:spcAft>
+              <a:buSzPct val="100000"/>
+              <a:buChar char="•"/>
+            </a:pPr>
+            <a:r>
+              <a:rPr lang="en-US" sz="900" dirty="0">
+                <a:solidFill>
+                  <a:srgbClr val="1E293B"/>
+                </a:solidFill>
+                <a:latin typeface="Arial" pitchFamily="34" charset="0"/>
+                <a:ea typeface="Arial" pitchFamily="34" charset="-122"/>
+                <a:cs typeface="Arial" pitchFamily="34" charset="-120"/>
+              </a:rPr>
+              <a:t>Support requires the current or immediately preceding CU</a:t>
+            </a:r>
+            <a:endParaRPr lang="en-US" sz="900" dirty="0"/>
+          </a:p>
+          <a:p>
+            <a:pPr marL="342900" indent="-342900">
+              <a:spcAft>
+                <a:spcPts val="500"/>
+              </a:spcAft>
+              <a:buSzPct val="100000"/>
+              <a:buChar char="•"/>
+            </a:pPr>
+            <a:r>
+              <a:rPr lang="en-US" sz="900" dirty="0">
+                <a:solidFill>
+                  <a:srgbClr val="1E293B"/>
+                </a:solidFill>
+                <a:latin typeface="Arial" pitchFamily="34" charset="0"/>
+                <a:ea typeface="Arial" pitchFamily="34" charset="-122"/>
+                <a:cs typeface="Arial" pitchFamily="34" charset="-120"/>
+              </a:rPr>
+              <a:t>Applying the current CU covers all GDR content for that version</a:t>
+            </a:r>
+            <a:endParaRPr lang="en-US" sz="900" dirty="0"/>
+          </a:p>
+        </p:txBody>
+      </p:sp>
+      <p:sp>
+        <p:nvSpPr>
+          <p:cNvPr id="10" name="Shape 8"/>
+          <p:cNvSpPr/>
+          <p:nvPr/>
+        </p:nvSpPr>
+        <p:spPr>
+          <a:xfrm>
+            <a:off x="4690872" y="1298448"/>
+            <a:ext cx="4041648" cy="2514600"/>
+          </a:xfrm>
+          <a:prstGeom prst="roundRect">
+            <a:avLst>
+              <a:gd name="adj" fmla="val 2545"/>
+            </a:avLst>
+          </a:prstGeom>
+          <a:solidFill>
+            <a:srgbClr val="FFFFFF"/>
           </a:solidFill>
           <a:ln w="9525">
             <a:solidFill>
@@ -12083,80 +11864,200 @@
             </a:solidFill>
             <a:prstDash val="solid"/>
           </a:ln>
-        </p:spPr>
-      </p:sp>
-      <p:sp>
-        <p:nvSpPr>
-          <p:cNvPr id="25" name="Text 23"/>
-          <p:cNvSpPr/>
-          <p:nvPr/>
-        </p:nvSpPr>
-        <p:spPr>
-          <a:xfrm>
-            <a:off x="4846320" y="1435608"/>
-            <a:ext cx="3749040" cy="1097280"/>
-          </a:xfrm>
-          <a:prstGeom prst="rect">
-            <a:avLst/>
-          </a:prstGeom>
-          <a:noFill/>
-          <a:ln/>
-        </p:spPr>
-        <p:txBody>
-          <a:bodyPr wrap="square" lIns="0" tIns="0" rIns="0" bIns="0" rtlCol="0" anchor="ctr"/>
-          <a:lstStyle/>
-          <a:p>
-            <a:pPr indent="0" marL="0">
-              <a:buNone/>
-            </a:pPr>
-            <a:r>
-              <a:rPr lang="en-US" sz="1300" b="1" dirty="0">
-                <a:solidFill>
-                  <a:srgbClr val="1A9E8F"/>
-                </a:solidFill>
-                <a:latin typeface="Arial" pitchFamily="34" charset="0"/>
-                <a:ea typeface="Arial" pitchFamily="34" charset="-122"/>
-                <a:cs typeface="Arial" pitchFamily="34" charset="-120"/>
-              </a:rPr>
-              <a:t>SLABreachedKEV = 0
-</a:t>
-            </a:r>
-            <a:pPr indent="0" marL="0">
-              <a:buNone/>
-            </a:pPr>
-            <a:r>
-              <a:rPr lang="en-US" sz="950" dirty="0">
-                <a:solidFill>
-                  <a:srgbClr val="1E293B"/>
-                </a:solidFill>
-                <a:latin typeface="Arial" pitchFamily="34" charset="0"/>
-                <a:ea typeface="Arial" pitchFamily="34" charset="-122"/>
-                <a:cs typeface="Arial" pitchFamily="34" charset="-120"/>
-              </a:rPr>
-              <a:t>The BOD 22-01 pass/fail. Any non-zero value is a mandatory CISA reporting event — this field must stay at zero.</a:t>
-            </a:r>
-            <a:endParaRPr lang="en-US" sz="1300" dirty="0"/>
-          </a:p>
-        </p:txBody>
-      </p:sp>
-      <p:sp>
-        <p:nvSpPr>
-          <p:cNvPr id="26" name="Shape 24"/>
-          <p:cNvSpPr/>
-          <p:nvPr/>
-        </p:nvSpPr>
-        <p:spPr>
-          <a:xfrm>
-            <a:off x="4690872" y="2770632"/>
-            <a:ext cx="4041648" cy="1298448"/>
+          <a:effectLst>
+            <a:outerShdw sx="100000" sy="100000" kx="0" ky="0" algn="bl" rotWithShape="0" blurRad="88900" dist="25400" dir="2700000">
+              <a:srgbClr val="000000">
+                <a:alpha val="14000"/>
+              </a:srgbClr>
+            </a:outerShdw>
+          </a:effectLst>
+        </p:spPr>
+      </p:sp>
+      <p:sp>
+        <p:nvSpPr>
+          <p:cNvPr id="11" name="Shape 9"/>
+          <p:cNvSpPr/>
+          <p:nvPr/>
+        </p:nvSpPr>
+        <p:spPr>
+          <a:xfrm>
+            <a:off x="4818888" y="1426464"/>
+            <a:ext cx="3785616" cy="402336"/>
           </a:xfrm>
           <a:prstGeom prst="roundRect">
             <a:avLst>
-              <a:gd name="adj" fmla="val 4930"/>
+              <a:gd name="adj" fmla="val 13636"/>
             </a:avLst>
           </a:prstGeom>
           <a:solidFill>
-            <a:srgbClr val="EDF3F9"/>
+            <a:srgbClr val="E6F5F2"/>
+          </a:solidFill>
+          <a:ln/>
+        </p:spPr>
+      </p:sp>
+      <p:sp>
+        <p:nvSpPr>
+          <p:cNvPr id="12" name="Text 10"/>
+          <p:cNvSpPr/>
+          <p:nvPr/>
+        </p:nvSpPr>
+        <p:spPr>
+          <a:xfrm>
+            <a:off x="4946904" y="1426464"/>
+            <a:ext cx="3584448" cy="402336"/>
+          </a:xfrm>
+          <a:prstGeom prst="rect">
+            <a:avLst/>
+          </a:prstGeom>
+          <a:noFill/>
+          <a:ln/>
+        </p:spPr>
+        <p:txBody>
+          <a:bodyPr wrap="square" lIns="0" tIns="0" rIns="0" bIns="0" rtlCol="0" anchor="ctr"/>
+          <a:lstStyle/>
+          <a:p>
+            <a:pPr indent="0" marL="0">
+              <a:buNone/>
+            </a:pPr>
+            <a:r>
+              <a:rPr lang="en-US" sz="1200" b="1" dirty="0">
+                <a:solidFill>
+                  <a:srgbClr val="1A9E8F"/>
+                </a:solidFill>
+                <a:latin typeface="Arial" pitchFamily="34" charset="0"/>
+                <a:ea typeface="Arial" pitchFamily="34" charset="-122"/>
+                <a:cs typeface="Arial" pitchFamily="34" charset="-120"/>
+              </a:rPr>
+              <a:t>The compliance workflow</a:t>
+            </a:r>
+            <a:endParaRPr lang="en-US" sz="1200" dirty="0"/>
+          </a:p>
+        </p:txBody>
+      </p:sp>
+      <p:sp>
+        <p:nvSpPr>
+          <p:cNvPr id="13" name="Text 11"/>
+          <p:cNvSpPr/>
+          <p:nvPr/>
+        </p:nvSpPr>
+        <p:spPr>
+          <a:xfrm>
+            <a:off x="4873752" y="1920240"/>
+            <a:ext cx="3694176" cy="1764792"/>
+          </a:xfrm>
+          <a:prstGeom prst="rect">
+            <a:avLst/>
+          </a:prstGeom>
+          <a:noFill/>
+          <a:ln/>
+        </p:spPr>
+        <p:txBody>
+          <a:bodyPr wrap="square" lIns="0" tIns="0" rIns="0" bIns="0" rtlCol="0" anchor="ctr"/>
+          <a:lstStyle/>
+          <a:p>
+            <a:pPr marL="342900" indent="-342900">
+              <a:spcAft>
+                <a:spcPts val="500"/>
+              </a:spcAft>
+              <a:buSzPct val="100000"/>
+              <a:buChar char="•"/>
+            </a:pPr>
+            <a:r>
+              <a:rPr lang="en-US" sz="900" dirty="0">
+                <a:solidFill>
+                  <a:srgbClr val="1E293B"/>
+                </a:solidFill>
+                <a:latin typeface="Arial" pitchFamily="34" charset="0"/>
+                <a:ea typeface="Arial" pitchFamily="34" charset="-122"/>
+                <a:cs typeface="Arial" pitchFamily="34" charset="-120"/>
+              </a:rPr>
+              <a:t>Enumerate every instance's version + CU level (built on the Part 8 inventory)</a:t>
+            </a:r>
+            <a:endParaRPr lang="en-US" sz="900" dirty="0"/>
+          </a:p>
+          <a:p>
+            <a:pPr marL="342900" indent="-342900">
+              <a:spcAft>
+                <a:spcPts val="500"/>
+              </a:spcAft>
+              <a:buSzPct val="100000"/>
+              <a:buChar char="•"/>
+            </a:pPr>
+            <a:r>
+              <a:rPr lang="en-US" sz="900" dirty="0">
+                <a:solidFill>
+                  <a:srgbClr val="1E293B"/>
+                </a:solidFill>
+                <a:latin typeface="Arial" pitchFamily="34" charset="0"/>
+                <a:ea typeface="Arial" pitchFamily="34" charset="-122"/>
+                <a:cs typeface="Arial" pitchFamily="34" charset="-120"/>
+              </a:rPr>
+              <a:t>Flag instances behind current CU or past end-of-support</a:t>
+            </a:r>
+            <a:endParaRPr lang="en-US" sz="900" dirty="0"/>
+          </a:p>
+          <a:p>
+            <a:pPr marL="342900" indent="-342900">
+              <a:spcAft>
+                <a:spcPts val="500"/>
+              </a:spcAft>
+              <a:buSzPct val="100000"/>
+              <a:buChar char="•"/>
+            </a:pPr>
+            <a:r>
+              <a:rPr lang="en-US" sz="900" dirty="0">
+                <a:solidFill>
+                  <a:srgbClr val="1E293B"/>
+                </a:solidFill>
+                <a:latin typeface="Arial" pitchFamily="34" charset="0"/>
+                <a:ea typeface="Arial" pitchFamily="34" charset="-122"/>
+                <a:cs typeface="Arial" pitchFamily="34" charset="-120"/>
+              </a:rPr>
+              <a:t>Auto-apply CUs via the Arc SQL extension within a maintenance window</a:t>
+            </a:r>
+            <a:endParaRPr lang="en-US" sz="900" dirty="0"/>
+          </a:p>
+          <a:p>
+            <a:pPr marL="342900" indent="-342900">
+              <a:spcAft>
+                <a:spcPts val="500"/>
+              </a:spcAft>
+              <a:buSzPct val="100000"/>
+              <a:buChar char="•"/>
+            </a:pPr>
+            <a:r>
+              <a:rPr lang="en-US" sz="900" dirty="0">
+                <a:solidFill>
+                  <a:srgbClr val="1E293B"/>
+                </a:solidFill>
+                <a:latin typeface="Arial" pitchFamily="34" charset="0"/>
+                <a:ea typeface="Arial" pitchFamily="34" charset="-122"/>
+                <a:cs typeface="Arial" pitchFamily="34" charset="-120"/>
+              </a:rPr>
+              <a:t>If a CU needs app-compat testing, apply the targeted GDR to fix the CVE while testing continues</a:t>
+            </a:r>
+            <a:endParaRPr lang="en-US" sz="900" dirty="0"/>
+          </a:p>
+        </p:txBody>
+      </p:sp>
+      <p:sp>
+        <p:nvSpPr>
+          <p:cNvPr id="14" name="Shape 12"/>
+          <p:cNvSpPr/>
+          <p:nvPr/>
+        </p:nvSpPr>
+        <p:spPr>
+          <a:xfrm>
+            <a:off x="502920" y="4023360"/>
+            <a:ext cx="8229600" cy="786384"/>
+          </a:xfrm>
+          <a:prstGeom prst="roundRect">
+            <a:avLst>
+              <a:gd name="adj" fmla="val 8140"/>
+            </a:avLst>
+          </a:prstGeom>
+          <a:solidFill>
+            <a:srgbClr val="FBF3E4"/>
           </a:solidFill>
           <a:ln w="9525">
             <a:solidFill>
@@ -12168,14 +12069,14 @@
       </p:sp>
       <p:sp>
         <p:nvSpPr>
-          <p:cNvPr id="27" name="Text 25"/>
-          <p:cNvSpPr/>
-          <p:nvPr/>
-        </p:nvSpPr>
-        <p:spPr>
-          <a:xfrm>
-            <a:off x="4846320" y="2880360"/>
-            <a:ext cx="3749040" cy="1097280"/>
+          <p:cNvPr id="15" name="Text 13"/>
+          <p:cNvSpPr/>
+          <p:nvPr/>
+        </p:nvSpPr>
+        <p:spPr>
+          <a:xfrm>
+            <a:off x="731520" y="4023360"/>
+            <a:ext cx="7772400" cy="786384"/>
           </a:xfrm>
           <a:prstGeom prst="rect">
             <a:avLst/>
@@ -12191,22 +12092,21 @@
               <a:buNone/>
             </a:pPr>
             <a:r>
-              <a:rPr lang="en-US" sz="1300" b="1" dirty="0">
-                <a:solidFill>
-                  <a:srgbClr val="1F3A5F"/>
-                </a:solidFill>
-                <a:latin typeface="Arial" pitchFamily="34" charset="0"/>
-                <a:ea typeface="Arial" pitchFamily="34" charset="-122"/>
-                <a:cs typeface="Arial" pitchFamily="34" charset="-120"/>
-              </a:rPr>
-              <a:t>PatchComplianceRate ≥ 95%
-</a:t>
+              <a:rPr lang="en-US" sz="1000" b="1" dirty="0">
+                <a:solidFill>
+                  <a:srgbClr val="8A6210"/>
+                </a:solidFill>
+                <a:latin typeface="Arial" pitchFamily="34" charset="0"/>
+                <a:ea typeface="Arial" pitchFamily="34" charset="-122"/>
+                <a:cs typeface="Arial" pitchFamily="34" charset="-120"/>
+              </a:rPr>
+              <a:t>End-of-support is its own SLA: </a:t>
             </a:r>
             <a:pPr indent="0" marL="0">
               <a:buNone/>
             </a:pPr>
             <a:r>
-              <a:rPr lang="en-US" sz="950" dirty="0">
+              <a:rPr lang="en-US" sz="1000" dirty="0">
                 <a:solidFill>
                   <a:srgbClr val="1E293B"/>
                 </a:solidFill>
@@ -12214,87 +12114,7 @@
                 <a:ea typeface="Arial" pitchFamily="34" charset="-122"/>
                 <a:cs typeface="Arial" pitchFamily="34" charset="-120"/>
               </a:rPr>
-              <a:t>The FedRAMP 20x SI-2 target across the Critical + High population, on a 30-day rolling window.</a:t>
-            </a:r>
-            <a:endParaRPr lang="en-US" sz="1300" dirty="0"/>
-          </a:p>
-        </p:txBody>
-      </p:sp>
-      <p:sp>
-        <p:nvSpPr>
-          <p:cNvPr id="28" name="Shape 26"/>
-          <p:cNvSpPr/>
-          <p:nvPr/>
-        </p:nvSpPr>
-        <p:spPr>
-          <a:xfrm>
-            <a:off x="502920" y="4224528"/>
-            <a:ext cx="8229600" cy="585216"/>
-          </a:xfrm>
-          <a:prstGeom prst="roundRect">
-            <a:avLst>
-              <a:gd name="adj" fmla="val 10938"/>
-            </a:avLst>
-          </a:prstGeom>
-          <a:solidFill>
-            <a:srgbClr val="EDF3F9"/>
-          </a:solidFill>
-          <a:ln w="9525">
-            <a:solidFill>
-              <a:srgbClr val="C9D4E0"/>
-            </a:solidFill>
-            <a:prstDash val="solid"/>
-          </a:ln>
-        </p:spPr>
-      </p:sp>
-      <p:sp>
-        <p:nvSpPr>
-          <p:cNvPr id="29" name="Text 27"/>
-          <p:cNvSpPr/>
-          <p:nvPr/>
-        </p:nvSpPr>
-        <p:spPr>
-          <a:xfrm>
-            <a:off x="731520" y="4224528"/>
-            <a:ext cx="7772400" cy="585216"/>
-          </a:xfrm>
-          <a:prstGeom prst="rect">
-            <a:avLst/>
-          </a:prstGeom>
-          <a:noFill/>
-          <a:ln/>
-        </p:spPr>
-        <p:txBody>
-          <a:bodyPr wrap="square" lIns="0" tIns="0" rIns="0" bIns="0" rtlCol="0" anchor="ctr"/>
-          <a:lstStyle/>
-          <a:p>
-            <a:pPr indent="0" marL="0">
-              <a:buNone/>
-            </a:pPr>
-            <a:r>
-              <a:rPr lang="en-US" sz="1000" b="1" dirty="0">
-                <a:solidFill>
-                  <a:srgbClr val="1F3A5F"/>
-                </a:solidFill>
-                <a:latin typeface="Arial" pitchFamily="34" charset="0"/>
-                <a:ea typeface="Arial" pitchFamily="34" charset="-122"/>
-                <a:cs typeface="Arial" pitchFamily="34" charset="-120"/>
-              </a:rPr>
-              <a:t>This is the artifact the assessor's third question needs: </a:t>
-            </a:r>
-            <a:pPr indent="0" marL="0">
-              <a:buNone/>
-            </a:pPr>
-            <a:r>
-              <a:rPr lang="en-US" sz="1000" dirty="0">
-                <a:solidFill>
-                  <a:srgbClr val="1E293B"/>
-                </a:solidFill>
-                <a:latin typeface="Arial" pitchFamily="34" charset="0"/>
-                <a:ea typeface="Arial" pitchFamily="34" charset="-122"/>
-                <a:cs typeface="Arial" pitchFamily="34" charset="-120"/>
-              </a:rPr>
-              <a:t>produced every day, no human assembly, answering RA-5 and SI-2 as a query against a file that already exists.</a:t>
+              <a:t>an instance two-plus CUs behind may carry vulnerabilities fixed only in the current CU. SQL Server 2019 mainstream support ended July 2024 (ESU via Arc); 2022 runs through January 2028. EOS-breached instances need upgrade planning, not just patching.</a:t>
             </a:r>
             <a:endParaRPr lang="en-US" sz="1000" dirty="0"/>
           </a:p>
@@ -12365,7 +12185,7 @@
                 <a:ea typeface="Arial" pitchFamily="34" charset="-122"/>
                 <a:cs typeface="Arial" pitchFamily="34" charset="-120"/>
               </a:rPr>
-              <a:t>THE EVIDENCE HALF — RETENTION &amp; OPERATIONS</a:t>
+              <a:t>THE SURFACE BOOK 11 DOES NOT PATCH</a:t>
             </a:r>
             <a:endParaRPr lang="en-US" sz="1100" dirty="0"/>
           </a:p>
@@ -12396,7 +12216,7 @@
               <a:buNone/>
             </a:pPr>
             <a:r>
-              <a:rPr lang="en-US" sz="2200" b="1" dirty="0">
+              <a:rPr lang="en-US" sz="2300" b="1" dirty="0">
                 <a:solidFill>
                   <a:srgbClr val="1F3A5F"/>
                 </a:solidFill>
@@ -12404,9 +12224,9 @@
                 <a:ea typeface="Arial" pitchFamily="34" charset="-122"/>
                 <a:cs typeface="Arial" pitchFamily="34" charset="-120"/>
               </a:rPr>
-              <a:t>From daily record to 90-day history and a live dashboard</a:t>
-            </a:r>
-            <a:endParaRPr lang="en-US" sz="2200" dirty="0"/>
+              <a:t>SaaS is a different problem: posture, not patching</a:t>
+            </a:r>
+            <a:endParaRPr lang="en-US" sz="2300" dirty="0"/>
           </a:p>
         </p:txBody>
       </p:sp>
@@ -12443,7 +12263,7 @@
                 <a:ea typeface="Arial" pitchFamily="34" charset="-122"/>
                 <a:cs typeface="Arial" pitchFamily="34" charset="-120"/>
               </a:rPr>
-              <a:t>Federal AAN — Book 11 Vulnerability Management · CSI Team Draft — Internal · FedRAMP Moderate · Date Code 2026-07-08 13:21 ET</a:t>
+              <a:t>Federal AAN — Book 11 Vulnerability Management · CSI Team Draft — Internal · FedRAMP Moderate · Date Code 2026-07-08 13:32 ET</a:t>
             </a:r>
             <a:endParaRPr lang="en-US" sz="800" dirty="0"/>
           </a:p>
@@ -12497,11 +12317,11 @@
         <p:spPr>
           <a:xfrm>
             <a:off x="502920" y="1298448"/>
-            <a:ext cx="8229600" cy="850392"/>
+            <a:ext cx="4041648" cy="2286000"/>
           </a:xfrm>
           <a:prstGeom prst="roundRect">
             <a:avLst>
-              <a:gd name="adj" fmla="val 7527"/>
+              <a:gd name="adj" fmla="val 2800"/>
             </a:avLst>
           </a:prstGeom>
           <a:solidFill>
@@ -12513,6 +12333,13 @@
             </a:solidFill>
             <a:prstDash val="solid"/>
           </a:ln>
+          <a:effectLst>
+            <a:outerShdw sx="100000" sy="100000" kx="0" ky="0" algn="bl" rotWithShape="0" blurRad="88900" dist="25400" dir="2700000">
+              <a:srgbClr val="000000">
+                <a:alpha val="14000"/>
+              </a:srgbClr>
+            </a:outerShdw>
+          </a:effectLst>
         </p:spPr>
       </p:sp>
       <p:sp>
@@ -12523,167 +12350,30 @@
         </p:nvSpPr>
         <p:spPr>
           <a:xfrm>
-            <a:off x="685800" y="1554480"/>
-            <a:ext cx="329184" cy="329184"/>
-          </a:xfrm>
-          <a:prstGeom prst="ellipse">
-            <a:avLst/>
-          </a:prstGeom>
-          <a:solidFill>
-            <a:srgbClr val="1F3A5F"/>
-          </a:solidFill>
-          <a:ln/>
-        </p:spPr>
-      </p:sp>
-      <p:sp>
-        <p:nvSpPr>
-          <p:cNvPr id="8" name="Text 6"/>
-          <p:cNvSpPr/>
-          <p:nvPr/>
-        </p:nvSpPr>
-        <p:spPr>
-          <a:xfrm>
-            <a:off x="685800" y="1540764"/>
-            <a:ext cx="329184" cy="329184"/>
-          </a:xfrm>
-          <a:prstGeom prst="rect">
-            <a:avLst/>
-          </a:prstGeom>
-          <a:noFill/>
-          <a:ln/>
-        </p:spPr>
-        <p:txBody>
-          <a:bodyPr wrap="square" lIns="0" tIns="0" rIns="0" bIns="0" rtlCol="0" anchor="ctr"/>
-          <a:lstStyle/>
-          <a:p>
-            <a:pPr algn="ctr" indent="0" marL="0">
-              <a:buNone/>
-            </a:pPr>
-            <a:r>
-              <a:rPr lang="en-US" sz="1300" b="1" dirty="0">
-                <a:solidFill>
-                  <a:srgbClr val="FFFFFF"/>
-                </a:solidFill>
-                <a:latin typeface="Arial" pitchFamily="34" charset="0"/>
-                <a:ea typeface="Arial" pitchFamily="34" charset="-122"/>
-                <a:cs typeface="Arial" pitchFamily="34" charset="-120"/>
-              </a:rPr>
-              <a:t>1</a:t>
-            </a:r>
-            <a:endParaRPr lang="en-US" sz="1300" dirty="0"/>
-          </a:p>
-        </p:txBody>
-      </p:sp>
-      <p:sp>
-        <p:nvSpPr>
-          <p:cNvPr id="9" name="Text 7"/>
-          <p:cNvSpPr/>
-          <p:nvPr/>
-        </p:nvSpPr>
-        <p:spPr>
-          <a:xfrm>
-            <a:off x="1170432" y="1371600"/>
-            <a:ext cx="7360920" cy="713232"/>
-          </a:xfrm>
-          <a:prstGeom prst="rect">
-            <a:avLst/>
-          </a:prstGeom>
-          <a:noFill/>
-          <a:ln/>
-        </p:spPr>
-        <p:txBody>
-          <a:bodyPr wrap="square" lIns="0" tIns="0" rIns="0" bIns="0" rtlCol="0" anchor="ctr"/>
-          <a:lstStyle/>
-          <a:p>
-            <a:pPr indent="0" marL="0">
-              <a:buNone/>
-            </a:pPr>
-            <a:r>
-              <a:rPr lang="en-US" sz="1100" b="1" dirty="0">
-                <a:solidFill>
-                  <a:srgbClr val="1F3A5F"/>
-                </a:solidFill>
-                <a:latin typeface="Arial" pitchFamily="34" charset="0"/>
-                <a:ea typeface="Arial" pitchFamily="34" charset="-122"/>
-                <a:cs typeface="Arial" pitchFamily="34" charset="-120"/>
-              </a:rPr>
-              <a:t>Archive daily   </a:t>
-            </a:r>
-            <a:pPr indent="0" marL="0">
-              <a:buNone/>
-            </a:pPr>
-            <a:r>
-              <a:rPr lang="en-US" sz="900" dirty="0">
-                <a:solidFill>
-                  <a:srgbClr val="1E293B"/>
-                </a:solidFill>
-                <a:latin typeface="Arial" pitchFamily="34" charset="0"/>
-                <a:ea typeface="Arial" pitchFamily="34" charset="-122"/>
-                <a:cs typeface="Arial" pitchFamily="34" charset="-120"/>
-              </a:rPr>
-              <a:t>Each daily summary is written to Azure Blob Storage via Managed Identity — the durable, tamper-evident compliance history.</a:t>
-            </a:r>
-            <a:endParaRPr lang="en-US" sz="1100" dirty="0"/>
-          </a:p>
-        </p:txBody>
-      </p:sp>
-      <p:sp>
-        <p:nvSpPr>
-          <p:cNvPr id="10" name="Shape 8"/>
-          <p:cNvSpPr/>
-          <p:nvPr/>
-        </p:nvSpPr>
-        <p:spPr>
-          <a:xfrm>
-            <a:off x="502920" y="2258568"/>
-            <a:ext cx="8229600" cy="850392"/>
+            <a:off x="630936" y="1426464"/>
+            <a:ext cx="3785616" cy="402336"/>
           </a:xfrm>
           <a:prstGeom prst="roundRect">
             <a:avLst>
-              <a:gd name="adj" fmla="val 7527"/>
+              <a:gd name="adj" fmla="val 13636"/>
             </a:avLst>
           </a:prstGeom>
           <a:solidFill>
             <a:srgbClr val="F3F5F8"/>
           </a:solidFill>
-          <a:ln w="9525">
-            <a:solidFill>
-              <a:srgbClr val="C9D4E0"/>
-            </a:solidFill>
-            <a:prstDash val="solid"/>
-          </a:ln>
-        </p:spPr>
-      </p:sp>
-      <p:sp>
-        <p:nvSpPr>
-          <p:cNvPr id="11" name="Shape 9"/>
-          <p:cNvSpPr/>
-          <p:nvPr/>
-        </p:nvSpPr>
-        <p:spPr>
-          <a:xfrm>
-            <a:off x="685800" y="2514600"/>
-            <a:ext cx="329184" cy="329184"/>
-          </a:xfrm>
-          <a:prstGeom prst="ellipse">
-            <a:avLst/>
-          </a:prstGeom>
-          <a:solidFill>
-            <a:srgbClr val="1A9E8F"/>
-          </a:solidFill>
-          <a:ln/>
-        </p:spPr>
-      </p:sp>
-      <p:sp>
-        <p:nvSpPr>
-          <p:cNvPr id="12" name="Text 10"/>
-          <p:cNvSpPr/>
-          <p:nvPr/>
-        </p:nvSpPr>
-        <p:spPr>
-          <a:xfrm>
-            <a:off x="685800" y="2500884"/>
-            <a:ext cx="329184" cy="329184"/>
+          <a:ln/>
+        </p:spPr>
+      </p:sp>
+      <p:sp>
+        <p:nvSpPr>
+          <p:cNvPr id="8" name="Text 6"/>
+          <p:cNvSpPr/>
+          <p:nvPr/>
+        </p:nvSpPr>
+        <p:spPr>
+          <a:xfrm>
+            <a:off x="758952" y="1426464"/>
+            <a:ext cx="3584448" cy="402336"/>
           </a:xfrm>
           <a:prstGeom prst="rect">
             <a:avLst/>
@@ -12695,34 +12385,34 @@
           <a:bodyPr wrap="square" lIns="0" tIns="0" rIns="0" bIns="0" rtlCol="0" anchor="ctr"/>
           <a:lstStyle/>
           <a:p>
-            <a:pPr algn="ctr" indent="0" marL="0">
-              <a:buNone/>
-            </a:pPr>
-            <a:r>
-              <a:rPr lang="en-US" sz="1300" b="1" dirty="0">
-                <a:solidFill>
-                  <a:srgbClr val="FFFFFF"/>
-                </a:solidFill>
-                <a:latin typeface="Arial" pitchFamily="34" charset="0"/>
-                <a:ea typeface="Arial" pitchFamily="34" charset="-122"/>
-                <a:cs typeface="Arial" pitchFamily="34" charset="-120"/>
-              </a:rPr>
-              <a:t>2</a:t>
-            </a:r>
-            <a:endParaRPr lang="en-US" sz="1300" dirty="0"/>
-          </a:p>
-        </p:txBody>
-      </p:sp>
-      <p:sp>
-        <p:nvSpPr>
-          <p:cNvPr id="13" name="Text 11"/>
-          <p:cNvSpPr/>
-          <p:nvPr/>
-        </p:nvSpPr>
-        <p:spPr>
-          <a:xfrm>
-            <a:off x="1170432" y="2331720"/>
-            <a:ext cx="7360920" cy="713232"/>
+            <a:pPr indent="0" marL="0">
+              <a:buNone/>
+            </a:pPr>
+            <a:r>
+              <a:rPr lang="en-US" sz="1200" b="1" dirty="0">
+                <a:solidFill>
+                  <a:srgbClr val="1E293B"/>
+                </a:solidFill>
+                <a:latin typeface="Arial" pitchFamily="34" charset="0"/>
+                <a:ea typeface="Arial" pitchFamily="34" charset="-122"/>
+                <a:cs typeface="Arial" pitchFamily="34" charset="-120"/>
+              </a:rPr>
+              <a:t>The vendor's job</a:t>
+            </a:r>
+            <a:endParaRPr lang="en-US" sz="1200" dirty="0"/>
+          </a:p>
+        </p:txBody>
+      </p:sp>
+      <p:sp>
+        <p:nvSpPr>
+          <p:cNvPr id="9" name="Text 7"/>
+          <p:cNvSpPr/>
+          <p:nvPr/>
+        </p:nvSpPr>
+        <p:spPr>
+          <a:xfrm>
+            <a:off x="685800" y="1920240"/>
+            <a:ext cx="3694176" cy="1536192"/>
           </a:xfrm>
           <a:prstGeom prst="rect">
             <a:avLst/>
@@ -12734,22 +12424,12 @@
           <a:bodyPr wrap="square" lIns="0" tIns="0" rIns="0" bIns="0" rtlCol="0" anchor="ctr"/>
           <a:lstStyle/>
           <a:p>
-            <a:pPr indent="0" marL="0">
-              <a:buNone/>
-            </a:pPr>
-            <a:r>
-              <a:rPr lang="en-US" sz="1100" b="1" dirty="0">
-                <a:solidFill>
-                  <a:srgbClr val="1A9E8F"/>
-                </a:solidFill>
-                <a:latin typeface="Arial" pitchFamily="34" charset="0"/>
-                <a:ea typeface="Arial" pitchFamily="34" charset="-122"/>
-                <a:cs typeface="Arial" pitchFamily="34" charset="-120"/>
-              </a:rPr>
-              <a:t>90-day trend on demand   </a:t>
-            </a:r>
-            <a:pPr indent="0" marL="0">
-              <a:buNone/>
+            <a:pPr marL="342900" indent="-342900">
+              <a:spcAft>
+                <a:spcPts val="500"/>
+              </a:spcAft>
+              <a:buSzPct val="100000"/>
+              <a:buChar char="•"/>
             </a:pPr>
             <a:r>
               <a:rPr lang="en-US" sz="900" dirty="0">
@@ -12760,26 +12440,89 @@
                 <a:ea typeface="Arial" pitchFamily="34" charset="-122"/>
                 <a:cs typeface="Arial" pitchFamily="34" charset="-120"/>
               </a:rPr>
-              <a:t>Assessors typically request a 90- or 180-day record. A trend query reads the stored summaries into a compliance-rate time series — already retained, not reconstructed.</a:t>
-            </a:r>
-            <a:endParaRPr lang="en-US" sz="1100" dirty="0"/>
-          </a:p>
-        </p:txBody>
-      </p:sp>
-      <p:sp>
-        <p:nvSpPr>
-          <p:cNvPr id="14" name="Shape 12"/>
-          <p:cNvSpPr/>
-          <p:nvPr/>
-        </p:nvSpPr>
-        <p:spPr>
-          <a:xfrm>
-            <a:off x="502920" y="3218688"/>
-            <a:ext cx="8229600" cy="850392"/>
+              <a:t>Patches the SaaS platform itself (M365 GCC, Amazon Connect, OCI)</a:t>
+            </a:r>
+            <a:endParaRPr lang="en-US" sz="900" dirty="0"/>
+          </a:p>
+          <a:p>
+            <a:pPr marL="342900" indent="-342900">
+              <a:spcAft>
+                <a:spcPts val="500"/>
+              </a:spcAft>
+              <a:buSzPct val="100000"/>
+              <a:buChar char="•"/>
+            </a:pPr>
+            <a:r>
+              <a:rPr lang="en-US" sz="900" dirty="0">
+                <a:solidFill>
+                  <a:srgbClr val="1E293B"/>
+                </a:solidFill>
+                <a:latin typeface="Arial" pitchFamily="34" charset="0"/>
+                <a:ea typeface="Arial" pitchFamily="34" charset="-122"/>
+                <a:cs typeface="Arial" pitchFamily="34" charset="-120"/>
+              </a:rPr>
+              <a:t>Runs its own vulnerability management under its FedRAMP authorization</a:t>
+            </a:r>
+            <a:endParaRPr lang="en-US" sz="900" dirty="0"/>
+          </a:p>
+          <a:p>
+            <a:pPr marL="342900" indent="-342900">
+              <a:spcAft>
+                <a:spcPts val="500"/>
+              </a:spcAft>
+              <a:buSzPct val="100000"/>
+              <a:buChar char="•"/>
+            </a:pPr>
+            <a:r>
+              <a:rPr lang="en-US" sz="900" dirty="0">
+                <a:solidFill>
+                  <a:srgbClr val="1E293B"/>
+                </a:solidFill>
+                <a:latin typeface="Arial" pitchFamily="34" charset="0"/>
+                <a:ea typeface="Arial" pitchFamily="34" charset="-122"/>
+                <a:cs typeface="Arial" pitchFamily="34" charset="-120"/>
+              </a:rPr>
+              <a:t>Publishes ConMon evidence: monthly POA&amp;M, scan summaries, deviation reports</a:t>
+            </a:r>
+            <a:endParaRPr lang="en-US" sz="900" dirty="0"/>
+          </a:p>
+          <a:p>
+            <a:pPr marL="342900" indent="-342900">
+              <a:spcAft>
+                <a:spcPts val="500"/>
+              </a:spcAft>
+              <a:buSzPct val="100000"/>
+              <a:buChar char="•"/>
+            </a:pPr>
+            <a:r>
+              <a:rPr lang="en-US" sz="900" dirty="0">
+                <a:solidFill>
+                  <a:srgbClr val="1E293B"/>
+                </a:solidFill>
+                <a:latin typeface="Arial" pitchFamily="34" charset="0"/>
+                <a:ea typeface="Arial" pitchFamily="34" charset="-122"/>
+                <a:cs typeface="Arial" pitchFamily="34" charset="-120"/>
+              </a:rPr>
+              <a:t>The agency does NOT patch CVEs on the platform — it cannot reach them</a:t>
+            </a:r>
+            <a:endParaRPr lang="en-US" sz="900" dirty="0"/>
+          </a:p>
+        </p:txBody>
+      </p:sp>
+      <p:sp>
+        <p:nvSpPr>
+          <p:cNvPr id="10" name="Shape 8"/>
+          <p:cNvSpPr/>
+          <p:nvPr/>
+        </p:nvSpPr>
+        <p:spPr>
+          <a:xfrm>
+            <a:off x="4690872" y="1298448"/>
+            <a:ext cx="4041648" cy="2286000"/>
           </a:xfrm>
           <a:prstGeom prst="roundRect">
             <a:avLst>
-              <a:gd name="adj" fmla="val 7527"/>
+              <a:gd name="adj" fmla="val 2800"/>
             </a:avLst>
           </a:prstGeom>
           <a:solidFill>
@@ -12791,134 +12534,196 @@
             </a:solidFill>
             <a:prstDash val="solid"/>
           </a:ln>
-        </p:spPr>
-      </p:sp>
-      <p:sp>
-        <p:nvSpPr>
-          <p:cNvPr id="15" name="Shape 13"/>
-          <p:cNvSpPr/>
-          <p:nvPr/>
-        </p:nvSpPr>
-        <p:spPr>
-          <a:xfrm>
-            <a:off x="685800" y="3474720"/>
-            <a:ext cx="329184" cy="329184"/>
-          </a:xfrm>
-          <a:prstGeom prst="ellipse">
-            <a:avLst/>
-          </a:prstGeom>
-          <a:solidFill>
-            <a:srgbClr val="D4860B"/>
-          </a:solidFill>
-          <a:ln/>
-        </p:spPr>
-      </p:sp>
-      <p:sp>
-        <p:nvSpPr>
-          <p:cNvPr id="16" name="Text 14"/>
-          <p:cNvSpPr/>
-          <p:nvPr/>
-        </p:nvSpPr>
-        <p:spPr>
-          <a:xfrm>
-            <a:off x="685800" y="3461004"/>
-            <a:ext cx="329184" cy="329184"/>
-          </a:xfrm>
-          <a:prstGeom prst="rect">
-            <a:avLst/>
-          </a:prstGeom>
-          <a:noFill/>
-          <a:ln/>
-        </p:spPr>
-        <p:txBody>
-          <a:bodyPr wrap="square" lIns="0" tIns="0" rIns="0" bIns="0" rtlCol="0" anchor="ctr"/>
-          <a:lstStyle/>
-          <a:p>
-            <a:pPr algn="ctr" indent="0" marL="0">
-              <a:buNone/>
-            </a:pPr>
-            <a:r>
-              <a:rPr lang="en-US" sz="1300" b="1" dirty="0">
-                <a:solidFill>
-                  <a:srgbClr val="FFFFFF"/>
-                </a:solidFill>
-                <a:latin typeface="Arial" pitchFamily="34" charset="0"/>
-                <a:ea typeface="Arial" pitchFamily="34" charset="-122"/>
-                <a:cs typeface="Arial" pitchFamily="34" charset="-120"/>
-              </a:rPr>
-              <a:t>3</a:t>
-            </a:r>
-            <a:endParaRPr lang="en-US" sz="1300" dirty="0"/>
-          </a:p>
-        </p:txBody>
-      </p:sp>
-      <p:sp>
-        <p:nvSpPr>
-          <p:cNvPr id="17" name="Text 15"/>
-          <p:cNvSpPr/>
-          <p:nvPr/>
-        </p:nvSpPr>
-        <p:spPr>
-          <a:xfrm>
-            <a:off x="1170432" y="3291840"/>
-            <a:ext cx="7360920" cy="713232"/>
-          </a:xfrm>
-          <a:prstGeom prst="rect">
-            <a:avLst/>
-          </a:prstGeom>
-          <a:noFill/>
-          <a:ln/>
-        </p:spPr>
-        <p:txBody>
-          <a:bodyPr wrap="square" lIns="0" tIns="0" rIns="0" bIns="0" rtlCol="0" anchor="ctr"/>
-          <a:lstStyle/>
-          <a:p>
-            <a:pPr indent="0" marL="0">
-              <a:buNone/>
-            </a:pPr>
-            <a:r>
-              <a:rPr lang="en-US" sz="1100" b="1" dirty="0">
-                <a:solidFill>
-                  <a:srgbClr val="D4860B"/>
-                </a:solidFill>
-                <a:latin typeface="Arial" pitchFamily="34" charset="0"/>
-                <a:ea typeface="Arial" pitchFamily="34" charset="-122"/>
-                <a:cs typeface="Arial" pitchFamily="34" charset="-120"/>
-              </a:rPr>
-              <a:t>Live operations dashboard   </a:t>
-            </a:r>
-            <a:pPr indent="0" marL="0">
-              <a:buNone/>
-            </a:pPr>
-            <a:r>
-              <a:rPr lang="en-US" sz="900" dirty="0">
-                <a:solidFill>
-                  <a:srgbClr val="1E293B"/>
-                </a:solidFill>
-                <a:latin typeface="Arial" pitchFamily="34" charset="0"/>
-                <a:ea typeface="Arial" pitchFamily="34" charset="-122"/>
-                <a:cs typeface="Arial" pitchFamily="34" charset="-120"/>
-              </a:rPr>
-              <a:t>The daily JSON ingests into a Log Analytics custom table; an Azure Monitor Workbook surfaces compliance-rate trend, KEV counts, and SLA-breach alerts — no JSON parsing for the ops team.</a:t>
-            </a:r>
-            <a:endParaRPr lang="en-US" sz="1100" dirty="0"/>
-          </a:p>
-        </p:txBody>
-      </p:sp>
-      <p:sp>
-        <p:nvSpPr>
-          <p:cNvPr id="18" name="Shape 16"/>
-          <p:cNvSpPr/>
-          <p:nvPr/>
-        </p:nvSpPr>
-        <p:spPr>
-          <a:xfrm>
-            <a:off x="502920" y="4261104"/>
-            <a:ext cx="8229600" cy="548640"/>
+          <a:effectLst>
+            <a:outerShdw sx="100000" sy="100000" kx="0" ky="0" algn="bl" rotWithShape="0" blurRad="88900" dist="25400" dir="2700000">
+              <a:srgbClr val="000000">
+                <a:alpha val="14000"/>
+              </a:srgbClr>
+            </a:outerShdw>
+          </a:effectLst>
+        </p:spPr>
+      </p:sp>
+      <p:sp>
+        <p:nvSpPr>
+          <p:cNvPr id="11" name="Shape 9"/>
+          <p:cNvSpPr/>
+          <p:nvPr/>
+        </p:nvSpPr>
+        <p:spPr>
+          <a:xfrm>
+            <a:off x="4818888" y="1426464"/>
+            <a:ext cx="3785616" cy="402336"/>
           </a:xfrm>
           <a:prstGeom prst="roundRect">
             <a:avLst>
-              <a:gd name="adj" fmla="val 11667"/>
+              <a:gd name="adj" fmla="val 13636"/>
+            </a:avLst>
+          </a:prstGeom>
+          <a:solidFill>
+            <a:srgbClr val="E6F5F2"/>
+          </a:solidFill>
+          <a:ln/>
+        </p:spPr>
+      </p:sp>
+      <p:sp>
+        <p:nvSpPr>
+          <p:cNvPr id="12" name="Text 10"/>
+          <p:cNvSpPr/>
+          <p:nvPr/>
+        </p:nvSpPr>
+        <p:spPr>
+          <a:xfrm>
+            <a:off x="4946904" y="1426464"/>
+            <a:ext cx="3584448" cy="402336"/>
+          </a:xfrm>
+          <a:prstGeom prst="rect">
+            <a:avLst/>
+          </a:prstGeom>
+          <a:noFill/>
+          <a:ln/>
+        </p:spPr>
+        <p:txBody>
+          <a:bodyPr wrap="square" lIns="0" tIns="0" rIns="0" bIns="0" rtlCol="0" anchor="ctr"/>
+          <a:lstStyle/>
+          <a:p>
+            <a:pPr indent="0" marL="0">
+              <a:buNone/>
+            </a:pPr>
+            <a:r>
+              <a:rPr lang="en-US" sz="1200" b="1" dirty="0">
+                <a:solidFill>
+                  <a:srgbClr val="1A9E8F"/>
+                </a:solidFill>
+                <a:latin typeface="Arial" pitchFamily="34" charset="0"/>
+                <a:ea typeface="Arial" pitchFamily="34" charset="-122"/>
+                <a:cs typeface="Arial" pitchFamily="34" charset="-120"/>
+              </a:rPr>
+              <a:t>The agency's job</a:t>
+            </a:r>
+            <a:endParaRPr lang="en-US" sz="1200" dirty="0"/>
+          </a:p>
+        </p:txBody>
+      </p:sp>
+      <p:sp>
+        <p:nvSpPr>
+          <p:cNvPr id="13" name="Text 11"/>
+          <p:cNvSpPr/>
+          <p:nvPr/>
+        </p:nvSpPr>
+        <p:spPr>
+          <a:xfrm>
+            <a:off x="4873752" y="1920240"/>
+            <a:ext cx="3694176" cy="1536192"/>
+          </a:xfrm>
+          <a:prstGeom prst="rect">
+            <a:avLst/>
+          </a:prstGeom>
+          <a:noFill/>
+          <a:ln/>
+        </p:spPr>
+        <p:txBody>
+          <a:bodyPr wrap="square" lIns="0" tIns="0" rIns="0" bIns="0" rtlCol="0" anchor="ctr"/>
+          <a:lstStyle/>
+          <a:p>
+            <a:pPr marL="342900" indent="-342900">
+              <a:spcAft>
+                <a:spcPts val="500"/>
+              </a:spcAft>
+              <a:buSzPct val="100000"/>
+              <a:buChar char="•"/>
+            </a:pPr>
+            <a:r>
+              <a:rPr lang="en-US" sz="900" dirty="0">
+                <a:solidFill>
+                  <a:srgbClr val="1E293B"/>
+                </a:solidFill>
+                <a:latin typeface="Arial" pitchFamily="34" charset="0"/>
+                <a:ea typeface="Arial" pitchFamily="34" charset="-122"/>
+                <a:cs typeface="Arial" pitchFamily="34" charset="-120"/>
+              </a:rPr>
+              <a:t>Consume the vendor's ConMon evidence — track their POA&amp;M, not your patch queue</a:t>
+            </a:r>
+            <a:endParaRPr lang="en-US" sz="900" dirty="0"/>
+          </a:p>
+          <a:p>
+            <a:pPr marL="342900" indent="-342900">
+              <a:spcAft>
+                <a:spcPts val="500"/>
+              </a:spcAft>
+              <a:buSzPct val="100000"/>
+              <a:buChar char="•"/>
+            </a:pPr>
+            <a:r>
+              <a:rPr lang="en-US" sz="900" dirty="0">
+                <a:solidFill>
+                  <a:srgbClr val="1E293B"/>
+                </a:solidFill>
+                <a:latin typeface="Arial" pitchFamily="34" charset="0"/>
+                <a:ea typeface="Arial" pitchFamily="34" charset="-122"/>
+                <a:cs typeface="Arial" pitchFamily="34" charset="-120"/>
+              </a:rPr>
+              <a:t>Manage YOUR configuration posture: SSPM / CSPM</a:t>
+            </a:r>
+            <a:endParaRPr lang="en-US" sz="900" dirty="0"/>
+          </a:p>
+          <a:p>
+            <a:pPr marL="342900" indent="-342900">
+              <a:spcAft>
+                <a:spcPts val="500"/>
+              </a:spcAft>
+              <a:buSzPct val="100000"/>
+              <a:buChar char="•"/>
+            </a:pPr>
+            <a:r>
+              <a:rPr lang="en-US" sz="900" dirty="0">
+                <a:solidFill>
+                  <a:srgbClr val="1E293B"/>
+                </a:solidFill>
+                <a:latin typeface="Arial" pitchFamily="34" charset="0"/>
+                <a:ea typeface="Arial" pitchFamily="34" charset="-122"/>
+                <a:cs typeface="Arial" pitchFamily="34" charset="-120"/>
+              </a:rPr>
+              <a:t>In federal M365: SCuBA baselines (CISA, mandated by BOD 25-01) + drift monitoring</a:t>
+            </a:r>
+            <a:endParaRPr lang="en-US" sz="900" dirty="0"/>
+          </a:p>
+          <a:p>
+            <a:pPr marL="342900" indent="-342900">
+              <a:spcAft>
+                <a:spcPts val="500"/>
+              </a:spcAft>
+              <a:buSzPct val="100000"/>
+              <a:buChar char="•"/>
+            </a:pPr>
+            <a:r>
+              <a:rPr lang="en-US" sz="900" dirty="0">
+                <a:solidFill>
+                  <a:srgbClr val="1E293B"/>
+                </a:solidFill>
+                <a:latin typeface="Arial" pitchFamily="34" charset="0"/>
+                <a:ea typeface="Arial" pitchFamily="34" charset="-122"/>
+                <a:cs typeface="Arial" pitchFamily="34" charset="-120"/>
+              </a:rPr>
+              <a:t>Cloud resource posture: Defender for Cloud, or Wiz / Prisma / Orca</a:t>
+            </a:r>
+            <a:endParaRPr lang="en-US" sz="900" dirty="0"/>
+          </a:p>
+        </p:txBody>
+      </p:sp>
+      <p:sp>
+        <p:nvSpPr>
+          <p:cNvPr id="14" name="Shape 12"/>
+          <p:cNvSpPr/>
+          <p:nvPr/>
+        </p:nvSpPr>
+        <p:spPr>
+          <a:xfrm>
+            <a:off x="502920" y="3712464"/>
+            <a:ext cx="8229600" cy="603504"/>
+          </a:xfrm>
+          <a:prstGeom prst="roundRect">
+            <a:avLst>
+              <a:gd name="adj" fmla="val 10606"/>
             </a:avLst>
           </a:prstGeom>
           <a:solidFill>
@@ -12934,14 +12739,14 @@
       </p:sp>
       <p:sp>
         <p:nvSpPr>
-          <p:cNvPr id="19" name="Text 17"/>
-          <p:cNvSpPr/>
-          <p:nvPr/>
-        </p:nvSpPr>
-        <p:spPr>
-          <a:xfrm>
-            <a:off x="731520" y="4261104"/>
-            <a:ext cx="7772400" cy="548640"/>
+          <p:cNvPr id="15" name="Text 13"/>
+          <p:cNvSpPr/>
+          <p:nvPr/>
+        </p:nvSpPr>
+        <p:spPr>
+          <a:xfrm>
+            <a:off x="731520" y="3712464"/>
+            <a:ext cx="7772400" cy="603504"/>
           </a:xfrm>
           <a:prstGeom prst="rect">
             <a:avLst/>
@@ -12965,7 +12770,7 @@
                 <a:ea typeface="Arial" pitchFamily="34" charset="-122"/>
                 <a:cs typeface="Arial" pitchFamily="34" charset="-120"/>
               </a:rPr>
-              <a:t>The five assessment artifacts, all script-produced: </a:t>
+              <a:t>Scope boundary: </a:t>
             </a:r>
             <a:pPr indent="0" marL="0">
               <a:buNone/>
@@ -12979,7 +12784,87 @@
                 <a:ea typeface="Arial" pitchFamily="34" charset="-122"/>
                 <a:cs typeface="Arial" pitchFamily="34" charset="-120"/>
               </a:rPr>
-              <a:t>the daily patch queue, the daily compliance summary, the 90-day trend, the Arc-vs-MDE coverage cross-check, and the SQL version/CU inventory. No manual assembly for any assessment request.</a:t>
+              <a:t>Book 11 owns server + endpoint CVE remediation. SaaS configuration posture lives in the SCuBA / ScubaDrift stream and feeds Book 13 (detection) and Book 19 (the ConMon package). The KEV pipeline still ingests any findings on agent-bearing SaaS-adjacent hosts — but a SaaS control plane is governed by configuration baselines, not patch SLAs.</a:t>
+            </a:r>
+            <a:endParaRPr lang="en-US" sz="950" dirty="0"/>
+          </a:p>
+        </p:txBody>
+      </p:sp>
+      <p:sp>
+        <p:nvSpPr>
+          <p:cNvPr id="16" name="Shape 14"/>
+          <p:cNvSpPr/>
+          <p:nvPr/>
+        </p:nvSpPr>
+        <p:spPr>
+          <a:xfrm>
+            <a:off x="502920" y="4370832"/>
+            <a:ext cx="8229600" cy="438912"/>
+          </a:xfrm>
+          <a:prstGeom prst="roundRect">
+            <a:avLst>
+              <a:gd name="adj" fmla="val 14583"/>
+            </a:avLst>
+          </a:prstGeom>
+          <a:solidFill>
+            <a:srgbClr val="F9EAE8"/>
+          </a:solidFill>
+          <a:ln w="9525">
+            <a:solidFill>
+              <a:srgbClr val="C9D4E0"/>
+            </a:solidFill>
+            <a:prstDash val="solid"/>
+          </a:ln>
+        </p:spPr>
+      </p:sp>
+      <p:sp>
+        <p:nvSpPr>
+          <p:cNvPr id="17" name="Text 15"/>
+          <p:cNvSpPr/>
+          <p:nvPr/>
+        </p:nvSpPr>
+        <p:spPr>
+          <a:xfrm>
+            <a:off x="731520" y="4370832"/>
+            <a:ext cx="7772400" cy="438912"/>
+          </a:xfrm>
+          <a:prstGeom prst="rect">
+            <a:avLst/>
+          </a:prstGeom>
+          <a:noFill/>
+          <a:ln/>
+        </p:spPr>
+        <p:txBody>
+          <a:bodyPr wrap="square" lIns="0" tIns="0" rIns="0" bIns="0" rtlCol="0" anchor="ctr"/>
+          <a:lstStyle/>
+          <a:p>
+            <a:pPr indent="0" marL="0">
+              <a:buNone/>
+            </a:pPr>
+            <a:r>
+              <a:rPr lang="en-US" sz="950" b="1" dirty="0">
+                <a:solidFill>
+                  <a:srgbClr val="C0392B"/>
+                </a:solidFill>
+                <a:latin typeface="Arial" pitchFamily="34" charset="0"/>
+                <a:ea typeface="Arial" pitchFamily="34" charset="-122"/>
+                <a:cs typeface="Arial" pitchFamily="34" charset="-120"/>
+              </a:rPr>
+              <a:t>Two failure modes to avoid: </a:t>
+            </a:r>
+            <a:pPr indent="0" marL="0">
+              <a:buNone/>
+            </a:pPr>
+            <a:r>
+              <a:rPr lang="en-US" sz="950" dirty="0">
+                <a:solidFill>
+                  <a:srgbClr val="1E293B"/>
+                </a:solidFill>
+                <a:latin typeface="Arial" pitchFamily="34" charset="0"/>
+                <a:ea typeface="Arial" pitchFamily="34" charset="-122"/>
+                <a:cs typeface="Arial" pitchFamily="34" charset="-120"/>
+              </a:rPr>
+              <a:t>treating a SaaS platform like a server you patch (you can't reach the CVEs) — or ignoring it because "the vendor handles it" (you still own configuration and evidence consumption).</a:t>
             </a:r>
             <a:endParaRPr lang="en-US" sz="950" dirty="0"/>
           </a:p>
@@ -13128,7 +13013,7 @@
                 <a:ea typeface="Arial" pitchFamily="34" charset="-122"/>
                 <a:cs typeface="Arial" pitchFamily="34" charset="-120"/>
               </a:rPr>
-              <a:t>Federal AAN — Book 11 Vulnerability Management · CSI Team Draft — Internal · FedRAMP Moderate · Date Code 2026-07-08 13:21 ET</a:t>
+              <a:t>Federal AAN — Book 11 Vulnerability Management · CSI Team Draft — Internal · FedRAMP Moderate · Date Code 2026-07-08 13:32 ET</a:t>
             </a:r>
             <a:endParaRPr lang="en-US" sz="800" dirty="0"/>
           </a:p>
@@ -14002,7 +13887,7 @@
                 <a:ea typeface="Arial" pitchFamily="34" charset="-122"/>
                 <a:cs typeface="Arial" pitchFamily="34" charset="-120"/>
               </a:rPr>
-              <a:t>THE COMPLIANCE HALF</a:t>
+              <a:t>THE DOCTRINE, STATED FOR THIS LAYER</a:t>
             </a:r>
             <a:endParaRPr lang="en-US" sz="1100" dirty="0"/>
           </a:p>
@@ -14033,7 +13918,7 @@
               <a:buNone/>
             </a:pPr>
             <a:r>
-              <a:rPr lang="en-US" sz="2400" b="1" dirty="0">
+              <a:rPr lang="en-US" sz="2100" b="1" dirty="0">
                 <a:solidFill>
                   <a:srgbClr val="1F3A5F"/>
                 </a:solidFill>
@@ -14041,9 +13926,9 @@
                 <a:ea typeface="Arial" pitchFamily="34" charset="-122"/>
                 <a:cs typeface="Arial" pitchFamily="34" charset="-120"/>
               </a:rPr>
-              <a:t>NIST SP 800-53 Rev 5 control closure — Part 11</a:t>
-            </a:r>
-            <a:endParaRPr lang="en-US" sz="2400" dirty="0"/>
+              <a:t>Mechanism, not product: the contract is fixed, the tools are swappable</a:t>
+            </a:r>
+            <a:endParaRPr lang="en-US" sz="2100" dirty="0"/>
           </a:p>
         </p:txBody>
       </p:sp>
@@ -14080,7 +13965,7 @@
                 <a:ea typeface="Arial" pitchFamily="34" charset="-122"/>
                 <a:cs typeface="Arial" pitchFamily="34" charset="-120"/>
               </a:rPr>
-              <a:t>Federal AAN — Book 11 Vulnerability Management · CSI Team Draft — Internal · FedRAMP Moderate · Date Code 2026-07-08 13:21 ET</a:t>
+              <a:t>Federal AAN — Book 11 Vulnerability Management · CSI Team Draft — Internal · FedRAMP Moderate · Date Code 2026-07-08 13:32 ET</a:t>
             </a:r>
             <a:endParaRPr lang="en-US" sz="800" dirty="0"/>
           </a:p>
@@ -14128,6 +14013,3346 @@
       <p:graphicFrame>
         <p:nvGraphicFramePr>
           <p:cNvPr id="21" name="Table 0"/>
+          <p:cNvGraphicFramePr>
+            <a:graphicFrameLocks noGrp="1"/>
+          </p:cNvGraphicFramePr>
+          <p:nvPr>
+            <p:extLst>
+              <p:ext uri="{D42A27DB-BD31-4B8C-83A1-F6EECF244321}">
+                <p14:modId xmlns:p14="http://schemas.microsoft.com/office/powerpoint/2010/main" val="1579011935"/>
+              </p:ext>
+            </p:extLst>
+          </p:nvPr>
+        </p:nvGraphicFramePr>
+        <p:xfrm>
+          <a:off x="502920" y="1280160"/>
+          <a:ext cx="8229600" cy="914400"/>
+        </p:xfrm>
+        <a:graphic>
+          <a:graphicData uri="http://schemas.openxmlformats.org/drawingml/2006/table">
+            <a:tbl>
+              <a:tblPr/>
+              <a:tblGrid>
+                <a:gridCol w="2651760"/>
+                <a:gridCol w="2286000"/>
+                <a:gridCol w="3291840"/>
+              </a:tblGrid>
+              <a:tr h="457200">
+                <a:tc>
+                  <a:txBody>
+                    <a:bodyPr/>
+                    <a:lstStyle/>
+                    <a:p>
+                      <a:pPr indent="0" marL="0">
+                        <a:buNone/>
+                      </a:pPr>
+                      <a:r>
+                        <a:rPr lang="en-US" sz="1000" b="1" dirty="0">
+                          <a:solidFill>
+                            <a:srgbClr val="FFFFFF"/>
+                          </a:solidFill>
+                          <a:latin typeface="Arial" pitchFamily="34" charset="0"/>
+                          <a:ea typeface="Arial" pitchFamily="34" charset="-122"/>
+                          <a:cs typeface="Arial" pitchFamily="34" charset="-120"/>
+                        </a:rPr>
+                        <a:t>Layer (mechanism)</a:t>
+                      </a:r>
+                      <a:endParaRPr lang="en-US" sz="1000" dirty="0">
+                        <a:latin typeface="Arial" charset="0"/>
+                        <a:ea typeface="Arial" charset="0"/>
+                        <a:cs typeface="Arial" charset="0"/>
+                      </a:endParaRPr>
+                    </a:p>
+                  </a:txBody>
+                  <a:tcPr marL="36576" marR="36576" marT="36576" marB="36576" anchor="ctr">
+                    <a:lnL w="9525" cap="flat" cmpd="sng" algn="ctr">
+                      <a:solidFill>
+                        <a:srgbClr val="C9D4E0"/>
+                      </a:solidFill>
+                      <a:prstDash val="solid"/>
+                      <a:round/>
+                      <a:headEnd type="none" w="med" len="med"/>
+                      <a:tailEnd type="none" w="med" len="med"/>
+                    </a:lnL>
+                    <a:lnR w="9525" cap="flat" cmpd="sng" algn="ctr">
+                      <a:solidFill>
+                        <a:srgbClr val="C9D4E0"/>
+                      </a:solidFill>
+                      <a:prstDash val="solid"/>
+                      <a:round/>
+                      <a:headEnd type="none" w="med" len="med"/>
+                      <a:tailEnd type="none" w="med" len="med"/>
+                    </a:lnR>
+                    <a:lnT w="9525" cap="flat" cmpd="sng" algn="ctr">
+                      <a:solidFill>
+                        <a:srgbClr val="C9D4E0"/>
+                      </a:solidFill>
+                      <a:prstDash val="solid"/>
+                      <a:round/>
+                      <a:headEnd type="none" w="med" len="med"/>
+                      <a:tailEnd type="none" w="med" len="med"/>
+                    </a:lnT>
+                    <a:lnB w="9525" cap="flat" cmpd="sng" algn="ctr">
+                      <a:solidFill>
+                        <a:srgbClr val="C9D4E0"/>
+                      </a:solidFill>
+                      <a:prstDash val="solid"/>
+                      <a:round/>
+                      <a:headEnd type="none" w="med" len="med"/>
+                      <a:tailEnd type="none" w="med" len="med"/>
+                    </a:lnB>
+                    <a:solidFill>
+                      <a:srgbClr val="1F3A5F"/>
+                    </a:solidFill>
+                  </a:tcPr>
+                </a:tc>
+                <a:tc>
+                  <a:txBody>
+                    <a:bodyPr/>
+                    <a:lstStyle/>
+                    <a:p>
+                      <a:pPr indent="0" marL="0">
+                        <a:buNone/>
+                      </a:pPr>
+                      <a:r>
+                        <a:rPr lang="en-US" sz="1000" b="1" dirty="0">
+                          <a:solidFill>
+                            <a:srgbClr val="FFFFFF"/>
+                          </a:solidFill>
+                          <a:latin typeface="Arial" pitchFamily="34" charset="0"/>
+                          <a:ea typeface="Arial" pitchFamily="34" charset="-122"/>
+                          <a:cs typeface="Arial" pitchFamily="34" charset="-120"/>
+                        </a:rPr>
+                        <a:t>Deployed example</a:t>
+                      </a:r>
+                      <a:endParaRPr lang="en-US" sz="1000" dirty="0">
+                        <a:latin typeface="Arial" charset="0"/>
+                        <a:ea typeface="Arial" charset="0"/>
+                        <a:cs typeface="Arial" charset="0"/>
+                      </a:endParaRPr>
+                    </a:p>
+                  </a:txBody>
+                  <a:tcPr marL="36576" marR="36576" marT="36576" marB="36576" anchor="ctr">
+                    <a:lnL w="9525" cap="flat" cmpd="sng" algn="ctr">
+                      <a:solidFill>
+                        <a:srgbClr val="C9D4E0"/>
+                      </a:solidFill>
+                      <a:prstDash val="solid"/>
+                      <a:round/>
+                      <a:headEnd type="none" w="med" len="med"/>
+                      <a:tailEnd type="none" w="med" len="med"/>
+                    </a:lnL>
+                    <a:lnR w="9525" cap="flat" cmpd="sng" algn="ctr">
+                      <a:solidFill>
+                        <a:srgbClr val="C9D4E0"/>
+                      </a:solidFill>
+                      <a:prstDash val="solid"/>
+                      <a:round/>
+                      <a:headEnd type="none" w="med" len="med"/>
+                      <a:tailEnd type="none" w="med" len="med"/>
+                    </a:lnR>
+                    <a:lnT w="9525" cap="flat" cmpd="sng" algn="ctr">
+                      <a:solidFill>
+                        <a:srgbClr val="C9D4E0"/>
+                      </a:solidFill>
+                      <a:prstDash val="solid"/>
+                      <a:round/>
+                      <a:headEnd type="none" w="med" len="med"/>
+                      <a:tailEnd type="none" w="med" len="med"/>
+                    </a:lnT>
+                    <a:lnB w="9525" cap="flat" cmpd="sng" algn="ctr">
+                      <a:solidFill>
+                        <a:srgbClr val="C9D4E0"/>
+                      </a:solidFill>
+                      <a:prstDash val="solid"/>
+                      <a:round/>
+                      <a:headEnd type="none" w="med" len="med"/>
+                      <a:tailEnd type="none" w="med" len="med"/>
+                    </a:lnB>
+                    <a:solidFill>
+                      <a:srgbClr val="1F3A5F"/>
+                    </a:solidFill>
+                  </a:tcPr>
+                </a:tc>
+                <a:tc>
+                  <a:txBody>
+                    <a:bodyPr/>
+                    <a:lstStyle/>
+                    <a:p>
+                      <a:pPr indent="0" marL="0">
+                        <a:buNone/>
+                      </a:pPr>
+                      <a:r>
+                        <a:rPr lang="en-US" sz="1000" b="1" dirty="0">
+                          <a:solidFill>
+                            <a:srgbClr val="FFFFFF"/>
+                          </a:solidFill>
+                          <a:latin typeface="Arial" pitchFamily="34" charset="0"/>
+                          <a:ea typeface="Arial" pitchFamily="34" charset="-122"/>
+                          <a:cs typeface="Arial" pitchFamily="34" charset="-120"/>
+                        </a:rPr>
+                        <a:t>FedRAMP-authorized alternatives</a:t>
+                      </a:r>
+                      <a:endParaRPr lang="en-US" sz="1000" dirty="0">
+                        <a:latin typeface="Arial" charset="0"/>
+                        <a:ea typeface="Arial" charset="0"/>
+                        <a:cs typeface="Arial" charset="0"/>
+                      </a:endParaRPr>
+                    </a:p>
+                  </a:txBody>
+                  <a:tcPr marL="36576" marR="36576" marT="36576" marB="36576" anchor="ctr">
+                    <a:lnL w="9525" cap="flat" cmpd="sng" algn="ctr">
+                      <a:solidFill>
+                        <a:srgbClr val="C9D4E0"/>
+                      </a:solidFill>
+                      <a:prstDash val="solid"/>
+                      <a:round/>
+                      <a:headEnd type="none" w="med" len="med"/>
+                      <a:tailEnd type="none" w="med" len="med"/>
+                    </a:lnL>
+                    <a:lnR w="9525" cap="flat" cmpd="sng" algn="ctr">
+                      <a:solidFill>
+                        <a:srgbClr val="C9D4E0"/>
+                      </a:solidFill>
+                      <a:prstDash val="solid"/>
+                      <a:round/>
+                      <a:headEnd type="none" w="med" len="med"/>
+                      <a:tailEnd type="none" w="med" len="med"/>
+                    </a:lnR>
+                    <a:lnT w="9525" cap="flat" cmpd="sng" algn="ctr">
+                      <a:solidFill>
+                        <a:srgbClr val="C9D4E0"/>
+                      </a:solidFill>
+                      <a:prstDash val="solid"/>
+                      <a:round/>
+                      <a:headEnd type="none" w="med" len="med"/>
+                      <a:tailEnd type="none" w="med" len="med"/>
+                    </a:lnT>
+                    <a:lnB w="9525" cap="flat" cmpd="sng" algn="ctr">
+                      <a:solidFill>
+                        <a:srgbClr val="C9D4E0"/>
+                      </a:solidFill>
+                      <a:prstDash val="solid"/>
+                      <a:round/>
+                      <a:headEnd type="none" w="med" len="med"/>
+                      <a:tailEnd type="none" w="med" len="med"/>
+                    </a:lnB>
+                    <a:solidFill>
+                      <a:srgbClr val="1F3A5F"/>
+                    </a:solidFill>
+                  </a:tcPr>
+                </a:tc>
+              </a:tr>
+              <a:tr h="457200">
+                <a:tc>
+                  <a:txBody>
+                    <a:bodyPr/>
+                    <a:lstStyle/>
+                    <a:p>
+                      <a:pPr indent="0" marL="0">
+                        <a:buNone/>
+                      </a:pPr>
+                      <a:r>
+                        <a:rPr lang="en-US" sz="850" b="1" dirty="0">
+                          <a:solidFill>
+                            <a:srgbClr val="1F3A5F"/>
+                          </a:solidFill>
+                          <a:latin typeface="Arial" pitchFamily="34" charset="0"/>
+                          <a:ea typeface="Arial" pitchFamily="34" charset="-122"/>
+                          <a:cs typeface="Arial" pitchFamily="34" charset="-120"/>
+                        </a:rPr>
+                        <a:t>Continuous scanning (RA-5)</a:t>
+                      </a:r>
+                      <a:endParaRPr lang="en-US" sz="850" dirty="0">
+                        <a:latin typeface="Arial" charset="0"/>
+                        <a:ea typeface="Arial" charset="0"/>
+                        <a:cs typeface="Arial" charset="0"/>
+                      </a:endParaRPr>
+                    </a:p>
+                  </a:txBody>
+                  <a:tcPr marL="36576" marR="36576" marT="36576" marB="36576" anchor="ctr">
+                    <a:lnL w="9525" cap="flat" cmpd="sng" algn="ctr">
+                      <a:solidFill>
+                        <a:srgbClr val="C9D4E0"/>
+                      </a:solidFill>
+                      <a:prstDash val="solid"/>
+                      <a:round/>
+                      <a:headEnd type="none" w="med" len="med"/>
+                      <a:tailEnd type="none" w="med" len="med"/>
+                    </a:lnL>
+                    <a:lnR w="9525" cap="flat" cmpd="sng" algn="ctr">
+                      <a:solidFill>
+                        <a:srgbClr val="C9D4E0"/>
+                      </a:solidFill>
+                      <a:prstDash val="solid"/>
+                      <a:round/>
+                      <a:headEnd type="none" w="med" len="med"/>
+                      <a:tailEnd type="none" w="med" len="med"/>
+                    </a:lnR>
+                    <a:lnT w="9525" cap="flat" cmpd="sng" algn="ctr">
+                      <a:solidFill>
+                        <a:srgbClr val="C9D4E0"/>
+                      </a:solidFill>
+                      <a:prstDash val="solid"/>
+                      <a:round/>
+                      <a:headEnd type="none" w="med" len="med"/>
+                      <a:tailEnd type="none" w="med" len="med"/>
+                    </a:lnT>
+                    <a:lnB w="9525" cap="flat" cmpd="sng" algn="ctr">
+                      <a:solidFill>
+                        <a:srgbClr val="C9D4E0"/>
+                      </a:solidFill>
+                      <a:prstDash val="solid"/>
+                      <a:round/>
+                      <a:headEnd type="none" w="med" len="med"/>
+                      <a:tailEnd type="none" w="med" len="med"/>
+                    </a:lnB>
+                    <a:solidFill>
+                      <a:srgbClr val="FFFFFF"/>
+                    </a:solidFill>
+                  </a:tcPr>
+                </a:tc>
+                <a:tc>
+                  <a:txBody>
+                    <a:bodyPr/>
+                    <a:lstStyle/>
+                    <a:p>
+                      <a:pPr indent="0" marL="0">
+                        <a:buNone/>
+                      </a:pPr>
+                      <a:r>
+                        <a:rPr lang="en-US" sz="850" dirty="0">
+                          <a:solidFill>
+                            <a:srgbClr val="1E293B"/>
+                          </a:solidFill>
+                          <a:latin typeface="Arial" pitchFamily="34" charset="0"/>
+                          <a:ea typeface="Arial" pitchFamily="34" charset="-122"/>
+                          <a:cs typeface="Arial" pitchFamily="34" charset="-120"/>
+                        </a:rPr>
+                        <a:t>Defender Vulnerability Mgmt</a:t>
+                      </a:r>
+                      <a:endParaRPr lang="en-US" sz="850" dirty="0">
+                        <a:latin typeface="Arial" charset="0"/>
+                        <a:ea typeface="Arial" charset="0"/>
+                        <a:cs typeface="Arial" charset="0"/>
+                      </a:endParaRPr>
+                    </a:p>
+                  </a:txBody>
+                  <a:tcPr marL="36576" marR="36576" marT="36576" marB="36576" anchor="ctr">
+                    <a:lnL w="9525" cap="flat" cmpd="sng" algn="ctr">
+                      <a:solidFill>
+                        <a:srgbClr val="C9D4E0"/>
+                      </a:solidFill>
+                      <a:prstDash val="solid"/>
+                      <a:round/>
+                      <a:headEnd type="none" w="med" len="med"/>
+                      <a:tailEnd type="none" w="med" len="med"/>
+                    </a:lnL>
+                    <a:lnR w="9525" cap="flat" cmpd="sng" algn="ctr">
+                      <a:solidFill>
+                        <a:srgbClr val="C9D4E0"/>
+                      </a:solidFill>
+                      <a:prstDash val="solid"/>
+                      <a:round/>
+                      <a:headEnd type="none" w="med" len="med"/>
+                      <a:tailEnd type="none" w="med" len="med"/>
+                    </a:lnR>
+                    <a:lnT w="9525" cap="flat" cmpd="sng" algn="ctr">
+                      <a:solidFill>
+                        <a:srgbClr val="C9D4E0"/>
+                      </a:solidFill>
+                      <a:prstDash val="solid"/>
+                      <a:round/>
+                      <a:headEnd type="none" w="med" len="med"/>
+                      <a:tailEnd type="none" w="med" len="med"/>
+                    </a:lnT>
+                    <a:lnB w="9525" cap="flat" cmpd="sng" algn="ctr">
+                      <a:solidFill>
+                        <a:srgbClr val="C9D4E0"/>
+                      </a:solidFill>
+                      <a:prstDash val="solid"/>
+                      <a:round/>
+                      <a:headEnd type="none" w="med" len="med"/>
+                      <a:tailEnd type="none" w="med" len="med"/>
+                    </a:lnB>
+                    <a:solidFill>
+                      <a:srgbClr val="FFFFFF"/>
+                    </a:solidFill>
+                  </a:tcPr>
+                </a:tc>
+                <a:tc>
+                  <a:txBody>
+                    <a:bodyPr/>
+                    <a:lstStyle/>
+                    <a:p>
+                      <a:pPr indent="0" marL="0">
+                        <a:buNone/>
+                      </a:pPr>
+                      <a:r>
+                        <a:rPr lang="en-US" sz="850" dirty="0">
+                          <a:solidFill>
+                            <a:srgbClr val="1E293B"/>
+                          </a:solidFill>
+                          <a:latin typeface="Arial" pitchFamily="34" charset="0"/>
+                          <a:ea typeface="Arial" pitchFamily="34" charset="-122"/>
+                          <a:cs typeface="Arial" pitchFamily="34" charset="-120"/>
+                        </a:rPr>
+                        <a:t>Tenable.io / Nessus; Qualys VMDR; Rapid7 InsightVM</a:t>
+                      </a:r>
+                      <a:endParaRPr lang="en-US" sz="850" dirty="0">
+                        <a:latin typeface="Arial" charset="0"/>
+                        <a:ea typeface="Arial" charset="0"/>
+                        <a:cs typeface="Arial" charset="0"/>
+                      </a:endParaRPr>
+                    </a:p>
+                  </a:txBody>
+                  <a:tcPr marL="36576" marR="36576" marT="36576" marB="36576" anchor="ctr">
+                    <a:lnL w="9525" cap="flat" cmpd="sng" algn="ctr">
+                      <a:solidFill>
+                        <a:srgbClr val="C9D4E0"/>
+                      </a:solidFill>
+                      <a:prstDash val="solid"/>
+                      <a:round/>
+                      <a:headEnd type="none" w="med" len="med"/>
+                      <a:tailEnd type="none" w="med" len="med"/>
+                    </a:lnL>
+                    <a:lnR w="9525" cap="flat" cmpd="sng" algn="ctr">
+                      <a:solidFill>
+                        <a:srgbClr val="C9D4E0"/>
+                      </a:solidFill>
+                      <a:prstDash val="solid"/>
+                      <a:round/>
+                      <a:headEnd type="none" w="med" len="med"/>
+                      <a:tailEnd type="none" w="med" len="med"/>
+                    </a:lnR>
+                    <a:lnT w="9525" cap="flat" cmpd="sng" algn="ctr">
+                      <a:solidFill>
+                        <a:srgbClr val="C9D4E0"/>
+                      </a:solidFill>
+                      <a:prstDash val="solid"/>
+                      <a:round/>
+                      <a:headEnd type="none" w="med" len="med"/>
+                      <a:tailEnd type="none" w="med" len="med"/>
+                    </a:lnT>
+                    <a:lnB w="9525" cap="flat" cmpd="sng" algn="ctr">
+                      <a:solidFill>
+                        <a:srgbClr val="C9D4E0"/>
+                      </a:solidFill>
+                      <a:prstDash val="solid"/>
+                      <a:round/>
+                      <a:headEnd type="none" w="med" len="med"/>
+                      <a:tailEnd type="none" w="med" len="med"/>
+                    </a:lnB>
+                    <a:solidFill>
+                      <a:srgbClr val="E6F5F2"/>
+                    </a:solidFill>
+                  </a:tcPr>
+                </a:tc>
+              </a:tr>
+              <a:tr h="457200">
+                <a:tc>
+                  <a:txBody>
+                    <a:bodyPr/>
+                    <a:lstStyle/>
+                    <a:p>
+                      <a:pPr indent="0" marL="0">
+                        <a:buNone/>
+                      </a:pPr>
+                      <a:r>
+                        <a:rPr lang="en-US" sz="850" b="1" dirty="0">
+                          <a:solidFill>
+                            <a:srgbClr val="1F3A5F"/>
+                          </a:solidFill>
+                          <a:latin typeface="Arial" pitchFamily="34" charset="0"/>
+                          <a:ea typeface="Arial" pitchFamily="34" charset="-122"/>
+                          <a:cs typeface="Arial" pitchFamily="34" charset="-120"/>
+                        </a:rPr>
+                        <a:t>Windows remediation (SI-2)</a:t>
+                      </a:r>
+                      <a:endParaRPr lang="en-US" sz="850" dirty="0">
+                        <a:latin typeface="Arial" charset="0"/>
+                        <a:ea typeface="Arial" charset="0"/>
+                        <a:cs typeface="Arial" charset="0"/>
+                      </a:endParaRPr>
+                    </a:p>
+                  </a:txBody>
+                  <a:tcPr marL="36576" marR="36576" marT="36576" marB="36576" anchor="ctr">
+                    <a:lnL w="9525" cap="flat" cmpd="sng" algn="ctr">
+                      <a:solidFill>
+                        <a:srgbClr val="C9D4E0"/>
+                      </a:solidFill>
+                      <a:prstDash val="solid"/>
+                      <a:round/>
+                      <a:headEnd type="none" w="med" len="med"/>
+                      <a:tailEnd type="none" w="med" len="med"/>
+                    </a:lnL>
+                    <a:lnR w="9525" cap="flat" cmpd="sng" algn="ctr">
+                      <a:solidFill>
+                        <a:srgbClr val="C9D4E0"/>
+                      </a:solidFill>
+                      <a:prstDash val="solid"/>
+                      <a:round/>
+                      <a:headEnd type="none" w="med" len="med"/>
+                      <a:tailEnd type="none" w="med" len="med"/>
+                    </a:lnR>
+                    <a:lnT w="9525" cap="flat" cmpd="sng" algn="ctr">
+                      <a:solidFill>
+                        <a:srgbClr val="C9D4E0"/>
+                      </a:solidFill>
+                      <a:prstDash val="solid"/>
+                      <a:round/>
+                      <a:headEnd type="none" w="med" len="med"/>
+                      <a:tailEnd type="none" w="med" len="med"/>
+                    </a:lnT>
+                    <a:lnB w="9525" cap="flat" cmpd="sng" algn="ctr">
+                      <a:solidFill>
+                        <a:srgbClr val="C9D4E0"/>
+                      </a:solidFill>
+                      <a:prstDash val="solid"/>
+                      <a:round/>
+                      <a:headEnd type="none" w="med" len="med"/>
+                      <a:tailEnd type="none" w="med" len="med"/>
+                    </a:lnB>
+                    <a:solidFill>
+                      <a:srgbClr val="F3F5F8"/>
+                    </a:solidFill>
+                  </a:tcPr>
+                </a:tc>
+                <a:tc>
+                  <a:txBody>
+                    <a:bodyPr/>
+                    <a:lstStyle/>
+                    <a:p>
+                      <a:pPr indent="0" marL="0">
+                        <a:buNone/>
+                      </a:pPr>
+                      <a:r>
+                        <a:rPr lang="en-US" sz="850" dirty="0">
+                          <a:solidFill>
+                            <a:srgbClr val="1E293B"/>
+                          </a:solidFill>
+                          <a:latin typeface="Arial" pitchFamily="34" charset="0"/>
+                          <a:ea typeface="Arial" pitchFamily="34" charset="-122"/>
+                          <a:cs typeface="Arial" pitchFamily="34" charset="-120"/>
+                        </a:rPr>
+                        <a:t>Intune WUfB</a:t>
+                      </a:r>
+                      <a:endParaRPr lang="en-US" sz="850" dirty="0">
+                        <a:latin typeface="Arial" charset="0"/>
+                        <a:ea typeface="Arial" charset="0"/>
+                        <a:cs typeface="Arial" charset="0"/>
+                      </a:endParaRPr>
+                    </a:p>
+                  </a:txBody>
+                  <a:tcPr marL="36576" marR="36576" marT="36576" marB="36576" anchor="ctr">
+                    <a:lnL w="9525" cap="flat" cmpd="sng" algn="ctr">
+                      <a:solidFill>
+                        <a:srgbClr val="C9D4E0"/>
+                      </a:solidFill>
+                      <a:prstDash val="solid"/>
+                      <a:round/>
+                      <a:headEnd type="none" w="med" len="med"/>
+                      <a:tailEnd type="none" w="med" len="med"/>
+                    </a:lnL>
+                    <a:lnR w="9525" cap="flat" cmpd="sng" algn="ctr">
+                      <a:solidFill>
+                        <a:srgbClr val="C9D4E0"/>
+                      </a:solidFill>
+                      <a:prstDash val="solid"/>
+                      <a:round/>
+                      <a:headEnd type="none" w="med" len="med"/>
+                      <a:tailEnd type="none" w="med" len="med"/>
+                    </a:lnR>
+                    <a:lnT w="9525" cap="flat" cmpd="sng" algn="ctr">
+                      <a:solidFill>
+                        <a:srgbClr val="C9D4E0"/>
+                      </a:solidFill>
+                      <a:prstDash val="solid"/>
+                      <a:round/>
+                      <a:headEnd type="none" w="med" len="med"/>
+                      <a:tailEnd type="none" w="med" len="med"/>
+                    </a:lnT>
+                    <a:lnB w="9525" cap="flat" cmpd="sng" algn="ctr">
+                      <a:solidFill>
+                        <a:srgbClr val="C9D4E0"/>
+                      </a:solidFill>
+                      <a:prstDash val="solid"/>
+                      <a:round/>
+                      <a:headEnd type="none" w="med" len="med"/>
+                      <a:tailEnd type="none" w="med" len="med"/>
+                    </a:lnB>
+                    <a:solidFill>
+                      <a:srgbClr val="F3F5F8"/>
+                    </a:solidFill>
+                  </a:tcPr>
+                </a:tc>
+                <a:tc>
+                  <a:txBody>
+                    <a:bodyPr/>
+                    <a:lstStyle/>
+                    <a:p>
+                      <a:pPr indent="0" marL="0">
+                        <a:buNone/>
+                      </a:pPr>
+                      <a:r>
+                        <a:rPr lang="en-US" sz="850" dirty="0">
+                          <a:solidFill>
+                            <a:srgbClr val="1E293B"/>
+                          </a:solidFill>
+                          <a:latin typeface="Arial" pitchFamily="34" charset="0"/>
+                          <a:ea typeface="Arial" pitchFamily="34" charset="-122"/>
+                          <a:cs typeface="Arial" pitchFamily="34" charset="-120"/>
+                        </a:rPr>
+                        <a:t>WSUS; BigFix; Automox</a:t>
+                      </a:r>
+                      <a:endParaRPr lang="en-US" sz="850" dirty="0">
+                        <a:latin typeface="Arial" charset="0"/>
+                        <a:ea typeface="Arial" charset="0"/>
+                        <a:cs typeface="Arial" charset="0"/>
+                      </a:endParaRPr>
+                    </a:p>
+                  </a:txBody>
+                  <a:tcPr marL="36576" marR="36576" marT="36576" marB="36576" anchor="ctr">
+                    <a:lnL w="9525" cap="flat" cmpd="sng" algn="ctr">
+                      <a:solidFill>
+                        <a:srgbClr val="C9D4E0"/>
+                      </a:solidFill>
+                      <a:prstDash val="solid"/>
+                      <a:round/>
+                      <a:headEnd type="none" w="med" len="med"/>
+                      <a:tailEnd type="none" w="med" len="med"/>
+                    </a:lnL>
+                    <a:lnR w="9525" cap="flat" cmpd="sng" algn="ctr">
+                      <a:solidFill>
+                        <a:srgbClr val="C9D4E0"/>
+                      </a:solidFill>
+                      <a:prstDash val="solid"/>
+                      <a:round/>
+                      <a:headEnd type="none" w="med" len="med"/>
+                      <a:tailEnd type="none" w="med" len="med"/>
+                    </a:lnR>
+                    <a:lnT w="9525" cap="flat" cmpd="sng" algn="ctr">
+                      <a:solidFill>
+                        <a:srgbClr val="C9D4E0"/>
+                      </a:solidFill>
+                      <a:prstDash val="solid"/>
+                      <a:round/>
+                      <a:headEnd type="none" w="med" len="med"/>
+                      <a:tailEnd type="none" w="med" len="med"/>
+                    </a:lnT>
+                    <a:lnB w="9525" cap="flat" cmpd="sng" algn="ctr">
+                      <a:solidFill>
+                        <a:srgbClr val="C9D4E0"/>
+                      </a:solidFill>
+                      <a:prstDash val="solid"/>
+                      <a:round/>
+                      <a:headEnd type="none" w="med" len="med"/>
+                      <a:tailEnd type="none" w="med" len="med"/>
+                    </a:lnB>
+                    <a:solidFill>
+                      <a:srgbClr val="E6F5F2"/>
+                    </a:solidFill>
+                  </a:tcPr>
+                </a:tc>
+              </a:tr>
+              <a:tr h="457200">
+                <a:tc>
+                  <a:txBody>
+                    <a:bodyPr/>
+                    <a:lstStyle/>
+                    <a:p>
+                      <a:pPr indent="0" marL="0">
+                        <a:buNone/>
+                      </a:pPr>
+                      <a:r>
+                        <a:rPr lang="en-US" sz="850" b="1" dirty="0">
+                          <a:solidFill>
+                            <a:srgbClr val="1F3A5F"/>
+                          </a:solidFill>
+                          <a:latin typeface="Arial" pitchFamily="34" charset="0"/>
+                          <a:ea typeface="Arial" pitchFamily="34" charset="-122"/>
+                          <a:cs typeface="Arial" pitchFamily="34" charset="-120"/>
+                        </a:rPr>
+                        <a:t>Linux remediation (SI-2)</a:t>
+                      </a:r>
+                      <a:endParaRPr lang="en-US" sz="850" dirty="0">
+                        <a:latin typeface="Arial" charset="0"/>
+                        <a:ea typeface="Arial" charset="0"/>
+                        <a:cs typeface="Arial" charset="0"/>
+                      </a:endParaRPr>
+                    </a:p>
+                  </a:txBody>
+                  <a:tcPr marL="36576" marR="36576" marT="36576" marB="36576" anchor="ctr">
+                    <a:lnL w="9525" cap="flat" cmpd="sng" algn="ctr">
+                      <a:solidFill>
+                        <a:srgbClr val="C9D4E0"/>
+                      </a:solidFill>
+                      <a:prstDash val="solid"/>
+                      <a:round/>
+                      <a:headEnd type="none" w="med" len="med"/>
+                      <a:tailEnd type="none" w="med" len="med"/>
+                    </a:lnL>
+                    <a:lnR w="9525" cap="flat" cmpd="sng" algn="ctr">
+                      <a:solidFill>
+                        <a:srgbClr val="C9D4E0"/>
+                      </a:solidFill>
+                      <a:prstDash val="solid"/>
+                      <a:round/>
+                      <a:headEnd type="none" w="med" len="med"/>
+                      <a:tailEnd type="none" w="med" len="med"/>
+                    </a:lnR>
+                    <a:lnT w="9525" cap="flat" cmpd="sng" algn="ctr">
+                      <a:solidFill>
+                        <a:srgbClr val="C9D4E0"/>
+                      </a:solidFill>
+                      <a:prstDash val="solid"/>
+                      <a:round/>
+                      <a:headEnd type="none" w="med" len="med"/>
+                      <a:tailEnd type="none" w="med" len="med"/>
+                    </a:lnT>
+                    <a:lnB w="9525" cap="flat" cmpd="sng" algn="ctr">
+                      <a:solidFill>
+                        <a:srgbClr val="C9D4E0"/>
+                      </a:solidFill>
+                      <a:prstDash val="solid"/>
+                      <a:round/>
+                      <a:headEnd type="none" w="med" len="med"/>
+                      <a:tailEnd type="none" w="med" len="med"/>
+                    </a:lnB>
+                    <a:solidFill>
+                      <a:srgbClr val="FFFFFF"/>
+                    </a:solidFill>
+                  </a:tcPr>
+                </a:tc>
+                <a:tc>
+                  <a:txBody>
+                    <a:bodyPr/>
+                    <a:lstStyle/>
+                    <a:p>
+                      <a:pPr indent="0" marL="0">
+                        <a:buNone/>
+                      </a:pPr>
+                      <a:r>
+                        <a:rPr lang="en-US" sz="850" dirty="0">
+                          <a:solidFill>
+                            <a:srgbClr val="1E293B"/>
+                          </a:solidFill>
+                          <a:latin typeface="Arial" pitchFamily="34" charset="0"/>
+                          <a:ea typeface="Arial" pitchFamily="34" charset="-122"/>
+                          <a:cs typeface="Arial" pitchFamily="34" charset="-120"/>
+                        </a:rPr>
+                        <a:t>Azure Update Manager</a:t>
+                      </a:r>
+                      <a:endParaRPr lang="en-US" sz="850" dirty="0">
+                        <a:latin typeface="Arial" charset="0"/>
+                        <a:ea typeface="Arial" charset="0"/>
+                        <a:cs typeface="Arial" charset="0"/>
+                      </a:endParaRPr>
+                    </a:p>
+                  </a:txBody>
+                  <a:tcPr marL="36576" marR="36576" marT="36576" marB="36576" anchor="ctr">
+                    <a:lnL w="9525" cap="flat" cmpd="sng" algn="ctr">
+                      <a:solidFill>
+                        <a:srgbClr val="C9D4E0"/>
+                      </a:solidFill>
+                      <a:prstDash val="solid"/>
+                      <a:round/>
+                      <a:headEnd type="none" w="med" len="med"/>
+                      <a:tailEnd type="none" w="med" len="med"/>
+                    </a:lnL>
+                    <a:lnR w="9525" cap="flat" cmpd="sng" algn="ctr">
+                      <a:solidFill>
+                        <a:srgbClr val="C9D4E0"/>
+                      </a:solidFill>
+                      <a:prstDash val="solid"/>
+                      <a:round/>
+                      <a:headEnd type="none" w="med" len="med"/>
+                      <a:tailEnd type="none" w="med" len="med"/>
+                    </a:lnR>
+                    <a:lnT w="9525" cap="flat" cmpd="sng" algn="ctr">
+                      <a:solidFill>
+                        <a:srgbClr val="C9D4E0"/>
+                      </a:solidFill>
+                      <a:prstDash val="solid"/>
+                      <a:round/>
+                      <a:headEnd type="none" w="med" len="med"/>
+                      <a:tailEnd type="none" w="med" len="med"/>
+                    </a:lnT>
+                    <a:lnB w="9525" cap="flat" cmpd="sng" algn="ctr">
+                      <a:solidFill>
+                        <a:srgbClr val="C9D4E0"/>
+                      </a:solidFill>
+                      <a:prstDash val="solid"/>
+                      <a:round/>
+                      <a:headEnd type="none" w="med" len="med"/>
+                      <a:tailEnd type="none" w="med" len="med"/>
+                    </a:lnB>
+                    <a:solidFill>
+                      <a:srgbClr val="FFFFFF"/>
+                    </a:solidFill>
+                  </a:tcPr>
+                </a:tc>
+                <a:tc>
+                  <a:txBody>
+                    <a:bodyPr/>
+                    <a:lstStyle/>
+                    <a:p>
+                      <a:pPr indent="0" marL="0">
+                        <a:buNone/>
+                      </a:pPr>
+                      <a:r>
+                        <a:rPr lang="en-US" sz="850" dirty="0">
+                          <a:solidFill>
+                            <a:srgbClr val="1E293B"/>
+                          </a:solidFill>
+                          <a:latin typeface="Arial" pitchFamily="34" charset="0"/>
+                          <a:ea typeface="Arial" pitchFamily="34" charset="-122"/>
+                          <a:cs typeface="Arial" pitchFamily="34" charset="-120"/>
+                        </a:rPr>
+                        <a:t>Red Hat Satellite; Ansible; Ubuntu Landscape</a:t>
+                      </a:r>
+                      <a:endParaRPr lang="en-US" sz="850" dirty="0">
+                        <a:latin typeface="Arial" charset="0"/>
+                        <a:ea typeface="Arial" charset="0"/>
+                        <a:cs typeface="Arial" charset="0"/>
+                      </a:endParaRPr>
+                    </a:p>
+                  </a:txBody>
+                  <a:tcPr marL="36576" marR="36576" marT="36576" marB="36576" anchor="ctr">
+                    <a:lnL w="9525" cap="flat" cmpd="sng" algn="ctr">
+                      <a:solidFill>
+                        <a:srgbClr val="C9D4E0"/>
+                      </a:solidFill>
+                      <a:prstDash val="solid"/>
+                      <a:round/>
+                      <a:headEnd type="none" w="med" len="med"/>
+                      <a:tailEnd type="none" w="med" len="med"/>
+                    </a:lnL>
+                    <a:lnR w="9525" cap="flat" cmpd="sng" algn="ctr">
+                      <a:solidFill>
+                        <a:srgbClr val="C9D4E0"/>
+                      </a:solidFill>
+                      <a:prstDash val="solid"/>
+                      <a:round/>
+                      <a:headEnd type="none" w="med" len="med"/>
+                      <a:tailEnd type="none" w="med" len="med"/>
+                    </a:lnR>
+                    <a:lnT w="9525" cap="flat" cmpd="sng" algn="ctr">
+                      <a:solidFill>
+                        <a:srgbClr val="C9D4E0"/>
+                      </a:solidFill>
+                      <a:prstDash val="solid"/>
+                      <a:round/>
+                      <a:headEnd type="none" w="med" len="med"/>
+                      <a:tailEnd type="none" w="med" len="med"/>
+                    </a:lnT>
+                    <a:lnB w="9525" cap="flat" cmpd="sng" algn="ctr">
+                      <a:solidFill>
+                        <a:srgbClr val="C9D4E0"/>
+                      </a:solidFill>
+                      <a:prstDash val="solid"/>
+                      <a:round/>
+                      <a:headEnd type="none" w="med" len="med"/>
+                      <a:tailEnd type="none" w="med" len="med"/>
+                    </a:lnB>
+                    <a:solidFill>
+                      <a:srgbClr val="E6F5F2"/>
+                    </a:solidFill>
+                  </a:tcPr>
+                </a:tc>
+              </a:tr>
+              <a:tr h="457200">
+                <a:tc>
+                  <a:txBody>
+                    <a:bodyPr/>
+                    <a:lstStyle/>
+                    <a:p>
+                      <a:pPr indent="0" marL="0">
+                        <a:buNone/>
+                      </a:pPr>
+                      <a:r>
+                        <a:rPr lang="en-US" sz="850" b="1" dirty="0">
+                          <a:solidFill>
+                            <a:srgbClr val="1F3A5F"/>
+                          </a:solidFill>
+                          <a:latin typeface="Arial" pitchFamily="34" charset="0"/>
+                          <a:ea typeface="Arial" pitchFamily="34" charset="-122"/>
+                          <a:cs typeface="Arial" pitchFamily="34" charset="-120"/>
+                        </a:rPr>
+                        <a:t>Cloud / SaaS posture (CM, RA)</a:t>
+                      </a:r>
+                      <a:endParaRPr lang="en-US" sz="850" dirty="0">
+                        <a:latin typeface="Arial" charset="0"/>
+                        <a:ea typeface="Arial" charset="0"/>
+                        <a:cs typeface="Arial" charset="0"/>
+                      </a:endParaRPr>
+                    </a:p>
+                  </a:txBody>
+                  <a:tcPr marL="36576" marR="36576" marT="36576" marB="36576" anchor="ctr">
+                    <a:lnL w="9525" cap="flat" cmpd="sng" algn="ctr">
+                      <a:solidFill>
+                        <a:srgbClr val="C9D4E0"/>
+                      </a:solidFill>
+                      <a:prstDash val="solid"/>
+                      <a:round/>
+                      <a:headEnd type="none" w="med" len="med"/>
+                      <a:tailEnd type="none" w="med" len="med"/>
+                    </a:lnL>
+                    <a:lnR w="9525" cap="flat" cmpd="sng" algn="ctr">
+                      <a:solidFill>
+                        <a:srgbClr val="C9D4E0"/>
+                      </a:solidFill>
+                      <a:prstDash val="solid"/>
+                      <a:round/>
+                      <a:headEnd type="none" w="med" len="med"/>
+                      <a:tailEnd type="none" w="med" len="med"/>
+                    </a:lnR>
+                    <a:lnT w="9525" cap="flat" cmpd="sng" algn="ctr">
+                      <a:solidFill>
+                        <a:srgbClr val="C9D4E0"/>
+                      </a:solidFill>
+                      <a:prstDash val="solid"/>
+                      <a:round/>
+                      <a:headEnd type="none" w="med" len="med"/>
+                      <a:tailEnd type="none" w="med" len="med"/>
+                    </a:lnT>
+                    <a:lnB w="9525" cap="flat" cmpd="sng" algn="ctr">
+                      <a:solidFill>
+                        <a:srgbClr val="C9D4E0"/>
+                      </a:solidFill>
+                      <a:prstDash val="solid"/>
+                      <a:round/>
+                      <a:headEnd type="none" w="med" len="med"/>
+                      <a:tailEnd type="none" w="med" len="med"/>
+                    </a:lnB>
+                    <a:solidFill>
+                      <a:srgbClr val="F3F5F8"/>
+                    </a:solidFill>
+                  </a:tcPr>
+                </a:tc>
+                <a:tc>
+                  <a:txBody>
+                    <a:bodyPr/>
+                    <a:lstStyle/>
+                    <a:p>
+                      <a:pPr indent="0" marL="0">
+                        <a:buNone/>
+                      </a:pPr>
+                      <a:r>
+                        <a:rPr lang="en-US" sz="850" dirty="0">
+                          <a:solidFill>
+                            <a:srgbClr val="1E293B"/>
+                          </a:solidFill>
+                          <a:latin typeface="Arial" pitchFamily="34" charset="0"/>
+                          <a:ea typeface="Arial" pitchFamily="34" charset="-122"/>
+                          <a:cs typeface="Arial" pitchFamily="34" charset="-120"/>
+                        </a:rPr>
+                        <a:t>Defender for Cloud + SCuBA</a:t>
+                      </a:r>
+                      <a:endParaRPr lang="en-US" sz="850" dirty="0">
+                        <a:latin typeface="Arial" charset="0"/>
+                        <a:ea typeface="Arial" charset="0"/>
+                        <a:cs typeface="Arial" charset="0"/>
+                      </a:endParaRPr>
+                    </a:p>
+                  </a:txBody>
+                  <a:tcPr marL="36576" marR="36576" marT="36576" marB="36576" anchor="ctr">
+                    <a:lnL w="9525" cap="flat" cmpd="sng" algn="ctr">
+                      <a:solidFill>
+                        <a:srgbClr val="C9D4E0"/>
+                      </a:solidFill>
+                      <a:prstDash val="solid"/>
+                      <a:round/>
+                      <a:headEnd type="none" w="med" len="med"/>
+                      <a:tailEnd type="none" w="med" len="med"/>
+                    </a:lnL>
+                    <a:lnR w="9525" cap="flat" cmpd="sng" algn="ctr">
+                      <a:solidFill>
+                        <a:srgbClr val="C9D4E0"/>
+                      </a:solidFill>
+                      <a:prstDash val="solid"/>
+                      <a:round/>
+                      <a:headEnd type="none" w="med" len="med"/>
+                      <a:tailEnd type="none" w="med" len="med"/>
+                    </a:lnR>
+                    <a:lnT w="9525" cap="flat" cmpd="sng" algn="ctr">
+                      <a:solidFill>
+                        <a:srgbClr val="C9D4E0"/>
+                      </a:solidFill>
+                      <a:prstDash val="solid"/>
+                      <a:round/>
+                      <a:headEnd type="none" w="med" len="med"/>
+                      <a:tailEnd type="none" w="med" len="med"/>
+                    </a:lnT>
+                    <a:lnB w="9525" cap="flat" cmpd="sng" algn="ctr">
+                      <a:solidFill>
+                        <a:srgbClr val="C9D4E0"/>
+                      </a:solidFill>
+                      <a:prstDash val="solid"/>
+                      <a:round/>
+                      <a:headEnd type="none" w="med" len="med"/>
+                      <a:tailEnd type="none" w="med" len="med"/>
+                    </a:lnB>
+                    <a:solidFill>
+                      <a:srgbClr val="F3F5F8"/>
+                    </a:solidFill>
+                  </a:tcPr>
+                </a:tc>
+                <a:tc>
+                  <a:txBody>
+                    <a:bodyPr/>
+                    <a:lstStyle/>
+                    <a:p>
+                      <a:pPr indent="0" marL="0">
+                        <a:buNone/>
+                      </a:pPr>
+                      <a:r>
+                        <a:rPr lang="en-US" sz="850" dirty="0">
+                          <a:solidFill>
+                            <a:srgbClr val="1E293B"/>
+                          </a:solidFill>
+                          <a:latin typeface="Arial" pitchFamily="34" charset="0"/>
+                          <a:ea typeface="Arial" pitchFamily="34" charset="-122"/>
+                          <a:cs typeface="Arial" pitchFamily="34" charset="-120"/>
+                        </a:rPr>
+                        <a:t>Wiz; Prisma Cloud; Orca; ScubaGear/ScubaDrift (M365)</a:t>
+                      </a:r>
+                      <a:endParaRPr lang="en-US" sz="850" dirty="0">
+                        <a:latin typeface="Arial" charset="0"/>
+                        <a:ea typeface="Arial" charset="0"/>
+                        <a:cs typeface="Arial" charset="0"/>
+                      </a:endParaRPr>
+                    </a:p>
+                  </a:txBody>
+                  <a:tcPr marL="36576" marR="36576" marT="36576" marB="36576" anchor="ctr">
+                    <a:lnL w="9525" cap="flat" cmpd="sng" algn="ctr">
+                      <a:solidFill>
+                        <a:srgbClr val="C9D4E0"/>
+                      </a:solidFill>
+                      <a:prstDash val="solid"/>
+                      <a:round/>
+                      <a:headEnd type="none" w="med" len="med"/>
+                      <a:tailEnd type="none" w="med" len="med"/>
+                    </a:lnL>
+                    <a:lnR w="9525" cap="flat" cmpd="sng" algn="ctr">
+                      <a:solidFill>
+                        <a:srgbClr val="C9D4E0"/>
+                      </a:solidFill>
+                      <a:prstDash val="solid"/>
+                      <a:round/>
+                      <a:headEnd type="none" w="med" len="med"/>
+                      <a:tailEnd type="none" w="med" len="med"/>
+                    </a:lnR>
+                    <a:lnT w="9525" cap="flat" cmpd="sng" algn="ctr">
+                      <a:solidFill>
+                        <a:srgbClr val="C9D4E0"/>
+                      </a:solidFill>
+                      <a:prstDash val="solid"/>
+                      <a:round/>
+                      <a:headEnd type="none" w="med" len="med"/>
+                      <a:tailEnd type="none" w="med" len="med"/>
+                    </a:lnT>
+                    <a:lnB w="9525" cap="flat" cmpd="sng" algn="ctr">
+                      <a:solidFill>
+                        <a:srgbClr val="C9D4E0"/>
+                      </a:solidFill>
+                      <a:prstDash val="solid"/>
+                      <a:round/>
+                      <a:headEnd type="none" w="med" len="med"/>
+                      <a:tailEnd type="none" w="med" len="med"/>
+                    </a:lnB>
+                    <a:solidFill>
+                      <a:srgbClr val="E6F5F2"/>
+                    </a:solidFill>
+                  </a:tcPr>
+                </a:tc>
+              </a:tr>
+              <a:tr h="457200">
+                <a:tc>
+                  <a:txBody>
+                    <a:bodyPr/>
+                    <a:lstStyle/>
+                    <a:p>
+                      <a:pPr indent="0" marL="0">
+                        <a:buNone/>
+                      </a:pPr>
+                      <a:r>
+                        <a:rPr lang="en-US" sz="850" b="1" dirty="0">
+                          <a:solidFill>
+                            <a:srgbClr val="1F3A5F"/>
+                          </a:solidFill>
+                          <a:latin typeface="Arial" pitchFamily="34" charset="0"/>
+                          <a:ea typeface="Arial" pitchFamily="34" charset="-122"/>
+                          <a:cs typeface="Arial" pitchFamily="34" charset="-120"/>
+                        </a:rPr>
+                        <a:t>Evidence / KSI (CA-7)</a:t>
+                      </a:r>
+                      <a:endParaRPr lang="en-US" sz="850" dirty="0">
+                        <a:latin typeface="Arial" charset="0"/>
+                        <a:ea typeface="Arial" charset="0"/>
+                        <a:cs typeface="Arial" charset="0"/>
+                      </a:endParaRPr>
+                    </a:p>
+                  </a:txBody>
+                  <a:tcPr marL="36576" marR="36576" marT="36576" marB="36576" anchor="ctr">
+                    <a:lnL w="9525" cap="flat" cmpd="sng" algn="ctr">
+                      <a:solidFill>
+                        <a:srgbClr val="C9D4E0"/>
+                      </a:solidFill>
+                      <a:prstDash val="solid"/>
+                      <a:round/>
+                      <a:headEnd type="none" w="med" len="med"/>
+                      <a:tailEnd type="none" w="med" len="med"/>
+                    </a:lnL>
+                    <a:lnR w="9525" cap="flat" cmpd="sng" algn="ctr">
+                      <a:solidFill>
+                        <a:srgbClr val="C9D4E0"/>
+                      </a:solidFill>
+                      <a:prstDash val="solid"/>
+                      <a:round/>
+                      <a:headEnd type="none" w="med" len="med"/>
+                      <a:tailEnd type="none" w="med" len="med"/>
+                    </a:lnR>
+                    <a:lnT w="9525" cap="flat" cmpd="sng" algn="ctr">
+                      <a:solidFill>
+                        <a:srgbClr val="C9D4E0"/>
+                      </a:solidFill>
+                      <a:prstDash val="solid"/>
+                      <a:round/>
+                      <a:headEnd type="none" w="med" len="med"/>
+                      <a:tailEnd type="none" w="med" len="med"/>
+                    </a:lnT>
+                    <a:lnB w="9525" cap="flat" cmpd="sng" algn="ctr">
+                      <a:solidFill>
+                        <a:srgbClr val="C9D4E0"/>
+                      </a:solidFill>
+                      <a:prstDash val="solid"/>
+                      <a:round/>
+                      <a:headEnd type="none" w="med" len="med"/>
+                      <a:tailEnd type="none" w="med" len="med"/>
+                    </a:lnB>
+                    <a:solidFill>
+                      <a:srgbClr val="FFFFFF"/>
+                    </a:solidFill>
+                  </a:tcPr>
+                </a:tc>
+                <a:tc>
+                  <a:txBody>
+                    <a:bodyPr/>
+                    <a:lstStyle/>
+                    <a:p>
+                      <a:pPr indent="0" marL="0">
+                        <a:buNone/>
+                      </a:pPr>
+                      <a:r>
+                        <a:rPr lang="en-US" sz="850" dirty="0">
+                          <a:solidFill>
+                            <a:srgbClr val="1E293B"/>
+                          </a:solidFill>
+                          <a:latin typeface="Arial" pitchFamily="34" charset="0"/>
+                          <a:ea typeface="Arial" pitchFamily="34" charset="-122"/>
+                          <a:cs typeface="Arial" pitchFamily="34" charset="-120"/>
+                        </a:rPr>
+                        <a:t>Daily JSON + Log Analytics</a:t>
+                      </a:r>
+                      <a:endParaRPr lang="en-US" sz="850" dirty="0">
+                        <a:latin typeface="Arial" charset="0"/>
+                        <a:ea typeface="Arial" charset="0"/>
+                        <a:cs typeface="Arial" charset="0"/>
+                      </a:endParaRPr>
+                    </a:p>
+                  </a:txBody>
+                  <a:tcPr marL="36576" marR="36576" marT="36576" marB="36576" anchor="ctr">
+                    <a:lnL w="9525" cap="flat" cmpd="sng" algn="ctr">
+                      <a:solidFill>
+                        <a:srgbClr val="C9D4E0"/>
+                      </a:solidFill>
+                      <a:prstDash val="solid"/>
+                      <a:round/>
+                      <a:headEnd type="none" w="med" len="med"/>
+                      <a:tailEnd type="none" w="med" len="med"/>
+                    </a:lnL>
+                    <a:lnR w="9525" cap="flat" cmpd="sng" algn="ctr">
+                      <a:solidFill>
+                        <a:srgbClr val="C9D4E0"/>
+                      </a:solidFill>
+                      <a:prstDash val="solid"/>
+                      <a:round/>
+                      <a:headEnd type="none" w="med" len="med"/>
+                      <a:tailEnd type="none" w="med" len="med"/>
+                    </a:lnR>
+                    <a:lnT w="9525" cap="flat" cmpd="sng" algn="ctr">
+                      <a:solidFill>
+                        <a:srgbClr val="C9D4E0"/>
+                      </a:solidFill>
+                      <a:prstDash val="solid"/>
+                      <a:round/>
+                      <a:headEnd type="none" w="med" len="med"/>
+                      <a:tailEnd type="none" w="med" len="med"/>
+                    </a:lnT>
+                    <a:lnB w="9525" cap="flat" cmpd="sng" algn="ctr">
+                      <a:solidFill>
+                        <a:srgbClr val="C9D4E0"/>
+                      </a:solidFill>
+                      <a:prstDash val="solid"/>
+                      <a:round/>
+                      <a:headEnd type="none" w="med" len="med"/>
+                      <a:tailEnd type="none" w="med" len="med"/>
+                    </a:lnB>
+                    <a:solidFill>
+                      <a:srgbClr val="FFFFFF"/>
+                    </a:solidFill>
+                  </a:tcPr>
+                </a:tc>
+                <a:tc>
+                  <a:txBody>
+                    <a:bodyPr/>
+                    <a:lstStyle/>
+                    <a:p>
+                      <a:pPr indent="0" marL="0">
+                        <a:buNone/>
+                      </a:pPr>
+                      <a:r>
+                        <a:rPr lang="en-US" sz="850" dirty="0">
+                          <a:solidFill>
+                            <a:srgbClr val="1E293B"/>
+                          </a:solidFill>
+                          <a:latin typeface="Arial" pitchFamily="34" charset="0"/>
+                          <a:ea typeface="Arial" pitchFamily="34" charset="-122"/>
+                          <a:cs typeface="Arial" pitchFamily="34" charset="-120"/>
+                        </a:rPr>
+                        <a:t>Splunk; Elastic — the KSI format is stable</a:t>
+                      </a:r>
+                      <a:endParaRPr lang="en-US" sz="850" dirty="0">
+                        <a:latin typeface="Arial" charset="0"/>
+                        <a:ea typeface="Arial" charset="0"/>
+                        <a:cs typeface="Arial" charset="0"/>
+                      </a:endParaRPr>
+                    </a:p>
+                  </a:txBody>
+                  <a:tcPr marL="36576" marR="36576" marT="36576" marB="36576" anchor="ctr">
+                    <a:lnL w="9525" cap="flat" cmpd="sng" algn="ctr">
+                      <a:solidFill>
+                        <a:srgbClr val="C9D4E0"/>
+                      </a:solidFill>
+                      <a:prstDash val="solid"/>
+                      <a:round/>
+                      <a:headEnd type="none" w="med" len="med"/>
+                      <a:tailEnd type="none" w="med" len="med"/>
+                    </a:lnL>
+                    <a:lnR w="9525" cap="flat" cmpd="sng" algn="ctr">
+                      <a:solidFill>
+                        <a:srgbClr val="C9D4E0"/>
+                      </a:solidFill>
+                      <a:prstDash val="solid"/>
+                      <a:round/>
+                      <a:headEnd type="none" w="med" len="med"/>
+                      <a:tailEnd type="none" w="med" len="med"/>
+                    </a:lnR>
+                    <a:lnT w="9525" cap="flat" cmpd="sng" algn="ctr">
+                      <a:solidFill>
+                        <a:srgbClr val="C9D4E0"/>
+                      </a:solidFill>
+                      <a:prstDash val="solid"/>
+                      <a:round/>
+                      <a:headEnd type="none" w="med" len="med"/>
+                      <a:tailEnd type="none" w="med" len="med"/>
+                    </a:lnT>
+                    <a:lnB w="9525" cap="flat" cmpd="sng" algn="ctr">
+                      <a:solidFill>
+                        <a:srgbClr val="C9D4E0"/>
+                      </a:solidFill>
+                      <a:prstDash val="solid"/>
+                      <a:round/>
+                      <a:headEnd type="none" w="med" len="med"/>
+                      <a:tailEnd type="none" w="med" len="med"/>
+                    </a:lnB>
+                    <a:solidFill>
+                      <a:srgbClr val="E6F5F2"/>
+                    </a:solidFill>
+                  </a:tcPr>
+                </a:tc>
+              </a:tr>
+            </a:tbl>
+          </a:graphicData>
+        </a:graphic>
+      </p:graphicFrame>
+      <p:sp>
+        <p:nvSpPr>
+          <p:cNvPr id="7" name="Shape 4"/>
+          <p:cNvSpPr/>
+          <p:nvPr/>
+        </p:nvSpPr>
+        <p:spPr>
+          <a:xfrm>
+            <a:off x="502920" y="4023360"/>
+            <a:ext cx="8229600" cy="786384"/>
+          </a:xfrm>
+          <a:prstGeom prst="roundRect">
+            <a:avLst>
+              <a:gd name="adj" fmla="val 8140"/>
+            </a:avLst>
+          </a:prstGeom>
+          <a:solidFill>
+            <a:srgbClr val="EDF3F9"/>
+          </a:solidFill>
+          <a:ln w="9525">
+            <a:solidFill>
+              <a:srgbClr val="C9D4E0"/>
+            </a:solidFill>
+            <a:prstDash val="solid"/>
+          </a:ln>
+        </p:spPr>
+      </p:sp>
+      <p:sp>
+        <p:nvSpPr>
+          <p:cNvPr id="8" name="Text 5"/>
+          <p:cNvSpPr/>
+          <p:nvPr/>
+        </p:nvSpPr>
+        <p:spPr>
+          <a:xfrm>
+            <a:off x="731520" y="4023360"/>
+            <a:ext cx="7772400" cy="786384"/>
+          </a:xfrm>
+          <a:prstGeom prst="rect">
+            <a:avLst/>
+          </a:prstGeom>
+          <a:noFill/>
+          <a:ln/>
+        </p:spPr>
+        <p:txBody>
+          <a:bodyPr wrap="square" lIns="0" tIns="0" rIns="0" bIns="0" rtlCol="0" anchor="ctr"/>
+          <a:lstStyle/>
+          <a:p>
+            <a:pPr indent="0" marL="0">
+              <a:buNone/>
+            </a:pPr>
+            <a:r>
+              <a:rPr lang="en-US" sz="1000" b="1" dirty="0">
+                <a:solidFill>
+                  <a:srgbClr val="1F3A5F"/>
+                </a:solidFill>
+                <a:latin typeface="Arial" pitchFamily="34" charset="0"/>
+                <a:ea typeface="Arial" pitchFamily="34" charset="-122"/>
+                <a:cs typeface="Arial" pitchFamily="34" charset="-120"/>
+              </a:rPr>
+              <a:t>The contract does not move: </a:t>
+            </a:r>
+            <a:pPr indent="0" marL="0">
+              <a:buNone/>
+            </a:pPr>
+            <a:r>
+              <a:rPr lang="en-US" sz="1000" dirty="0">
+                <a:solidFill>
+                  <a:srgbClr val="1E293B"/>
+                </a:solidFill>
+                <a:latin typeface="Arial" pitchFamily="34" charset="0"/>
+                <a:ea typeface="Arial" pitchFamily="34" charset="-122"/>
+                <a:cs typeface="Arial" pitchFamily="34" charset="-120"/>
+              </a:rPr>
+              <a:t>inventory-bound continuous scan → CISA KEV cross-reference → automated remediation → machine-readable evidence. Every product above is a deployed EXAMPLE of a layer in that contract, not the layer itself. The Microsoft stack is this agency's example because it is already deployed on the Arc estate — verify each candidate's current FedRAMP Marketplace authorization at procurement time.</a:t>
+            </a:r>
+            <a:endParaRPr lang="en-US" sz="1000" dirty="0"/>
+          </a:p>
+        </p:txBody>
+      </p:sp>
+    </p:spTree>
+  </p:cSld>
+  <p:clrMapOvr>
+    <a:masterClrMapping/>
+  </p:clrMapOvr>
+</p:sld>
+</file>
+
+<file path=ppt/slides/slide21.xml><?xml version="1.0" encoding="utf-8"?>
+<p:sld xmlns:a="http://schemas.openxmlformats.org/drawingml/2006/main" xmlns:r="http://schemas.openxmlformats.org/officeDocument/2006/relationships" xmlns:p="http://schemas.openxmlformats.org/presentationml/2006/main">
+  <p:cSld name="Slide 21">
+    <p:bg>
+      <p:bgPr>
+        <a:solidFill>
+          <a:srgbClr val="FFFFFF"/>
+        </a:solidFill>
+      </p:bgPr>
+    </p:bg>
+    <p:spTree>
+      <p:nvGrpSpPr>
+        <p:cNvPr id="1" name=""/>
+        <p:cNvGrpSpPr/>
+        <p:nvPr/>
+      </p:nvGrpSpPr>
+      <p:grpSpPr>
+        <a:xfrm>
+          <a:off x="0" y="0"/>
+          <a:ext cx="0" cy="0"/>
+          <a:chOff x="0" y="0"/>
+          <a:chExt cx="0" cy="0"/>
+        </a:xfrm>
+      </p:grpSpPr>
+      <p:sp>
+        <p:nvSpPr>
+          <p:cNvPr id="2" name="Text 0"/>
+          <p:cNvSpPr/>
+          <p:nvPr/>
+        </p:nvSpPr>
+        <p:spPr>
+          <a:xfrm>
+            <a:off x="502920" y="256032"/>
+            <a:ext cx="8229600" cy="274320"/>
+          </a:xfrm>
+          <a:prstGeom prst="rect">
+            <a:avLst/>
+          </a:prstGeom>
+          <a:noFill/>
+          <a:ln/>
+        </p:spPr>
+        <p:txBody>
+          <a:bodyPr wrap="square" lIns="0" tIns="0" rIns="0" bIns="0" rtlCol="0" anchor="ctr"/>
+          <a:lstStyle/>
+          <a:p>
+            <a:pPr indent="0" marL="0">
+              <a:buNone/>
+            </a:pPr>
+            <a:r>
+              <a:rPr lang="en-US" sz="1100" b="1" spc="200" kern="0" dirty="0">
+                <a:solidFill>
+                  <a:srgbClr val="1A9E8F"/>
+                </a:solidFill>
+                <a:latin typeface="Arial" pitchFamily="34" charset="0"/>
+                <a:ea typeface="Arial" pitchFamily="34" charset="-122"/>
+                <a:cs typeface="Arial" pitchFamily="34" charset="-120"/>
+              </a:rPr>
+              <a:t>THE EVIDENCE HALF</a:t>
+            </a:r>
+            <a:endParaRPr lang="en-US" sz="1100" dirty="0"/>
+          </a:p>
+        </p:txBody>
+      </p:sp>
+      <p:sp>
+        <p:nvSpPr>
+          <p:cNvPr id="3" name="Text 1"/>
+          <p:cNvSpPr/>
+          <p:nvPr/>
+        </p:nvSpPr>
+        <p:spPr>
+          <a:xfrm>
+            <a:off x="502920" y="512064"/>
+            <a:ext cx="8138160" cy="566928"/>
+          </a:xfrm>
+          <a:prstGeom prst="rect">
+            <a:avLst/>
+          </a:prstGeom>
+          <a:noFill/>
+          <a:ln/>
+        </p:spPr>
+        <p:txBody>
+          <a:bodyPr wrap="square" lIns="0" tIns="0" rIns="0" bIns="0" rtlCol="0" anchor="ctr"/>
+          <a:lstStyle/>
+          <a:p>
+            <a:pPr indent="0" marL="0">
+              <a:buNone/>
+            </a:pPr>
+            <a:r>
+              <a:rPr lang="en-US" sz="2200" b="1" dirty="0">
+                <a:solidFill>
+                  <a:srgbClr val="1F3A5F"/>
+                </a:solidFill>
+                <a:latin typeface="Arial" pitchFamily="34" charset="0"/>
+                <a:ea typeface="Arial" pitchFamily="34" charset="-122"/>
+                <a:cs typeface="Arial" pitchFamily="34" charset="-120"/>
+              </a:rPr>
+              <a:t>The daily compliance record: the RA-5 / SI-2 KSI artifact</a:t>
+            </a:r>
+            <a:endParaRPr lang="en-US" sz="2200" dirty="0"/>
+          </a:p>
+        </p:txBody>
+      </p:sp>
+      <p:sp>
+        <p:nvSpPr>
+          <p:cNvPr id="4" name="Text 2"/>
+          <p:cNvSpPr/>
+          <p:nvPr/>
+        </p:nvSpPr>
+        <p:spPr>
+          <a:xfrm>
+            <a:off x="502920" y="4864608"/>
+            <a:ext cx="7315200" cy="219456"/>
+          </a:xfrm>
+          <a:prstGeom prst="rect">
+            <a:avLst/>
+          </a:prstGeom>
+          <a:noFill/>
+          <a:ln/>
+        </p:spPr>
+        <p:txBody>
+          <a:bodyPr wrap="square" lIns="0" tIns="0" rIns="0" bIns="0" rtlCol="0" anchor="ctr"/>
+          <a:lstStyle/>
+          <a:p>
+            <a:pPr indent="0" marL="0">
+              <a:buNone/>
+            </a:pPr>
+            <a:r>
+              <a:rPr lang="en-US" sz="800" dirty="0">
+                <a:solidFill>
+                  <a:srgbClr val="5B6B7C"/>
+                </a:solidFill>
+                <a:latin typeface="Arial" pitchFamily="34" charset="0"/>
+                <a:ea typeface="Arial" pitchFamily="34" charset="-122"/>
+                <a:cs typeface="Arial" pitchFamily="34" charset="-120"/>
+              </a:rPr>
+              <a:t>Federal AAN — Book 11 Vulnerability Management · CSI Team Draft — Internal · FedRAMP Moderate · Date Code 2026-07-08 13:32 ET</a:t>
+            </a:r>
+            <a:endParaRPr lang="en-US" sz="800" dirty="0"/>
+          </a:p>
+        </p:txBody>
+      </p:sp>
+      <p:sp>
+        <p:nvSpPr>
+          <p:cNvPr id="5" name="Text 3"/>
+          <p:cNvSpPr/>
+          <p:nvPr/>
+        </p:nvSpPr>
+        <p:spPr>
+          <a:xfrm>
+            <a:off x="8412480" y="4864608"/>
+            <a:ext cx="320040" cy="219456"/>
+          </a:xfrm>
+          <a:prstGeom prst="rect">
+            <a:avLst/>
+          </a:prstGeom>
+          <a:noFill/>
+          <a:ln/>
+        </p:spPr>
+        <p:txBody>
+          <a:bodyPr wrap="square" lIns="0" tIns="0" rIns="0" bIns="0" rtlCol="0" anchor="ctr"/>
+          <a:lstStyle/>
+          <a:p>
+            <a:pPr algn="r" indent="0" marL="0">
+              <a:buNone/>
+            </a:pPr>
+            <a:r>
+              <a:rPr lang="en-US" sz="800" dirty="0">
+                <a:solidFill>
+                  <a:srgbClr val="5B6B7C"/>
+                </a:solidFill>
+                <a:latin typeface="Arial" pitchFamily="34" charset="0"/>
+                <a:ea typeface="Arial" pitchFamily="34" charset="-122"/>
+                <a:cs typeface="Arial" pitchFamily="34" charset="-120"/>
+              </a:rPr>
+              <a:t>21</a:t>
+            </a:r>
+            <a:endParaRPr lang="en-US" sz="800" dirty="0"/>
+          </a:p>
+        </p:txBody>
+      </p:sp>
+      <p:sp>
+        <p:nvSpPr>
+          <p:cNvPr id="6" name="Shape 4"/>
+          <p:cNvSpPr/>
+          <p:nvPr/>
+        </p:nvSpPr>
+        <p:spPr>
+          <a:xfrm>
+            <a:off x="502920" y="1325880"/>
+            <a:ext cx="4041648" cy="2743200"/>
+          </a:xfrm>
+          <a:prstGeom prst="roundRect">
+            <a:avLst>
+              <a:gd name="adj" fmla="val 2333"/>
+            </a:avLst>
+          </a:prstGeom>
+          <a:solidFill>
+            <a:srgbClr val="F3F5F8"/>
+          </a:solidFill>
+          <a:ln w="9525">
+            <a:solidFill>
+              <a:srgbClr val="C9D4E0"/>
+            </a:solidFill>
+            <a:prstDash val="solid"/>
+          </a:ln>
+        </p:spPr>
+      </p:sp>
+      <p:sp>
+        <p:nvSpPr>
+          <p:cNvPr id="7" name="Text 5"/>
+          <p:cNvSpPr/>
+          <p:nvPr/>
+        </p:nvSpPr>
+        <p:spPr>
+          <a:xfrm>
+            <a:off x="640080" y="1417320"/>
+            <a:ext cx="3767328" cy="274320"/>
+          </a:xfrm>
+          <a:prstGeom prst="rect">
+            <a:avLst/>
+          </a:prstGeom>
+          <a:noFill/>
+          <a:ln/>
+        </p:spPr>
+        <p:txBody>
+          <a:bodyPr wrap="square" lIns="0" tIns="0" rIns="0" bIns="0" rtlCol="0" anchor="ctr"/>
+          <a:lstStyle/>
+          <a:p>
+            <a:pPr indent="0" marL="0">
+              <a:buNone/>
+            </a:pPr>
+            <a:r>
+              <a:rPr lang="en-US" sz="1000" b="1" dirty="0">
+                <a:solidFill>
+                  <a:srgbClr val="1F3A5F"/>
+                </a:solidFill>
+                <a:latin typeface="Consolas" pitchFamily="34" charset="0"/>
+                <a:ea typeface="Consolas" pitchFamily="34" charset="-122"/>
+                <a:cs typeface="Consolas" pitchFamily="34" charset="-120"/>
+              </a:rPr>
+              <a:t>compliance-summary-&lt;date&gt;.json</a:t>
+            </a:r>
+            <a:endParaRPr lang="en-US" sz="1000" dirty="0"/>
+          </a:p>
+        </p:txBody>
+      </p:sp>
+      <p:sp>
+        <p:nvSpPr>
+          <p:cNvPr id="8" name="Text 6"/>
+          <p:cNvSpPr/>
+          <p:nvPr/>
+        </p:nvSpPr>
+        <p:spPr>
+          <a:xfrm>
+            <a:off x="658368" y="1755648"/>
+            <a:ext cx="2468880" cy="256032"/>
+          </a:xfrm>
+          <a:prstGeom prst="rect">
+            <a:avLst/>
+          </a:prstGeom>
+          <a:noFill/>
+          <a:ln/>
+        </p:spPr>
+        <p:txBody>
+          <a:bodyPr wrap="square" lIns="0" tIns="0" rIns="0" bIns="0" rtlCol="0" anchor="ctr"/>
+          <a:lstStyle/>
+          <a:p>
+            <a:pPr indent="0" marL="0">
+              <a:buNone/>
+            </a:pPr>
+            <a:r>
+              <a:rPr lang="en-US" sz="950" dirty="0">
+                <a:solidFill>
+                  <a:srgbClr val="5B6B7C"/>
+                </a:solidFill>
+                <a:latin typeface="Consolas" pitchFamily="34" charset="0"/>
+                <a:ea typeface="Consolas" pitchFamily="34" charset="-122"/>
+                <a:cs typeface="Consolas" pitchFamily="34" charset="-120"/>
+              </a:rPr>
+              <a:t>TotalFindings</a:t>
+            </a:r>
+            <a:endParaRPr lang="en-US" sz="950" dirty="0"/>
+          </a:p>
+        </p:txBody>
+      </p:sp>
+      <p:sp>
+        <p:nvSpPr>
+          <p:cNvPr id="9" name="Text 7"/>
+          <p:cNvSpPr/>
+          <p:nvPr/>
+        </p:nvSpPr>
+        <p:spPr>
+          <a:xfrm>
+            <a:off x="3108960" y="1755648"/>
+            <a:ext cx="1325880" cy="256032"/>
+          </a:xfrm>
+          <a:prstGeom prst="rect">
+            <a:avLst/>
+          </a:prstGeom>
+          <a:noFill/>
+          <a:ln/>
+        </p:spPr>
+        <p:txBody>
+          <a:bodyPr wrap="square" lIns="0" tIns="0" rIns="0" bIns="0" rtlCol="0" anchor="ctr"/>
+          <a:lstStyle/>
+          <a:p>
+            <a:pPr algn="r" indent="0" marL="0">
+              <a:buNone/>
+            </a:pPr>
+            <a:r>
+              <a:rPr lang="en-US" sz="950" b="1" dirty="0">
+                <a:solidFill>
+                  <a:srgbClr val="1E293B"/>
+                </a:solidFill>
+                <a:latin typeface="Consolas" pitchFamily="34" charset="0"/>
+                <a:ea typeface="Consolas" pitchFamily="34" charset="-122"/>
+                <a:cs typeface="Consolas" pitchFamily="34" charset="-120"/>
+              </a:rPr>
+              <a:t>847</a:t>
+            </a:r>
+            <a:endParaRPr lang="en-US" sz="950" dirty="0"/>
+          </a:p>
+        </p:txBody>
+      </p:sp>
+      <p:sp>
+        <p:nvSpPr>
+          <p:cNvPr id="10" name="Text 8"/>
+          <p:cNvSpPr/>
+          <p:nvPr/>
+        </p:nvSpPr>
+        <p:spPr>
+          <a:xfrm>
+            <a:off x="658368" y="2039112"/>
+            <a:ext cx="2468880" cy="256032"/>
+          </a:xfrm>
+          <a:prstGeom prst="rect">
+            <a:avLst/>
+          </a:prstGeom>
+          <a:noFill/>
+          <a:ln/>
+        </p:spPr>
+        <p:txBody>
+          <a:bodyPr wrap="square" lIns="0" tIns="0" rIns="0" bIns="0" rtlCol="0" anchor="ctr"/>
+          <a:lstStyle/>
+          <a:p>
+            <a:pPr indent="0" marL="0">
+              <a:buNone/>
+            </a:pPr>
+            <a:r>
+              <a:rPr lang="en-US" sz="950" dirty="0">
+                <a:solidFill>
+                  <a:srgbClr val="5B6B7C"/>
+                </a:solidFill>
+                <a:latin typeface="Consolas" pitchFamily="34" charset="0"/>
+                <a:ea typeface="Consolas" pitchFamily="34" charset="-122"/>
+                <a:cs typeface="Consolas" pitchFamily="34" charset="-120"/>
+              </a:rPr>
+              <a:t>KEVFindings</a:t>
+            </a:r>
+            <a:endParaRPr lang="en-US" sz="950" dirty="0"/>
+          </a:p>
+        </p:txBody>
+      </p:sp>
+      <p:sp>
+        <p:nvSpPr>
+          <p:cNvPr id="11" name="Text 9"/>
+          <p:cNvSpPr/>
+          <p:nvPr/>
+        </p:nvSpPr>
+        <p:spPr>
+          <a:xfrm>
+            <a:off x="3108960" y="2039112"/>
+            <a:ext cx="1325880" cy="256032"/>
+          </a:xfrm>
+          <a:prstGeom prst="rect">
+            <a:avLst/>
+          </a:prstGeom>
+          <a:noFill/>
+          <a:ln/>
+        </p:spPr>
+        <p:txBody>
+          <a:bodyPr wrap="square" lIns="0" tIns="0" rIns="0" bIns="0" rtlCol="0" anchor="ctr"/>
+          <a:lstStyle/>
+          <a:p>
+            <a:pPr algn="r" indent="0" marL="0">
+              <a:buNone/>
+            </a:pPr>
+            <a:r>
+              <a:rPr lang="en-US" sz="950" b="1" dirty="0">
+                <a:solidFill>
+                  <a:srgbClr val="C0392B"/>
+                </a:solidFill>
+                <a:latin typeface="Consolas" pitchFamily="34" charset="0"/>
+                <a:ea typeface="Consolas" pitchFamily="34" charset="-122"/>
+                <a:cs typeface="Consolas" pitchFamily="34" charset="-120"/>
+              </a:rPr>
+              <a:t>23</a:t>
+            </a:r>
+            <a:endParaRPr lang="en-US" sz="950" dirty="0"/>
+          </a:p>
+        </p:txBody>
+      </p:sp>
+      <p:sp>
+        <p:nvSpPr>
+          <p:cNvPr id="12" name="Text 10"/>
+          <p:cNvSpPr/>
+          <p:nvPr/>
+        </p:nvSpPr>
+        <p:spPr>
+          <a:xfrm>
+            <a:off x="658368" y="2322576"/>
+            <a:ext cx="2468880" cy="256032"/>
+          </a:xfrm>
+          <a:prstGeom prst="rect">
+            <a:avLst/>
+          </a:prstGeom>
+          <a:noFill/>
+          <a:ln/>
+        </p:spPr>
+        <p:txBody>
+          <a:bodyPr wrap="square" lIns="0" tIns="0" rIns="0" bIns="0" rtlCol="0" anchor="ctr"/>
+          <a:lstStyle/>
+          <a:p>
+            <a:pPr indent="0" marL="0">
+              <a:buNone/>
+            </a:pPr>
+            <a:r>
+              <a:rPr lang="en-US" sz="950" dirty="0">
+                <a:solidFill>
+                  <a:srgbClr val="5B6B7C"/>
+                </a:solidFill>
+                <a:latin typeface="Consolas" pitchFamily="34" charset="0"/>
+                <a:ea typeface="Consolas" pitchFamily="34" charset="-122"/>
+                <a:cs typeface="Consolas" pitchFamily="34" charset="-120"/>
+              </a:rPr>
+              <a:t>P0_KEV_Internet</a:t>
+            </a:r>
+            <a:endParaRPr lang="en-US" sz="950" dirty="0"/>
+          </a:p>
+        </p:txBody>
+      </p:sp>
+      <p:sp>
+        <p:nvSpPr>
+          <p:cNvPr id="13" name="Text 11"/>
+          <p:cNvSpPr/>
+          <p:nvPr/>
+        </p:nvSpPr>
+        <p:spPr>
+          <a:xfrm>
+            <a:off x="3108960" y="2322576"/>
+            <a:ext cx="1325880" cy="256032"/>
+          </a:xfrm>
+          <a:prstGeom prst="rect">
+            <a:avLst/>
+          </a:prstGeom>
+          <a:noFill/>
+          <a:ln/>
+        </p:spPr>
+        <p:txBody>
+          <a:bodyPr wrap="square" lIns="0" tIns="0" rIns="0" bIns="0" rtlCol="0" anchor="ctr"/>
+          <a:lstStyle/>
+          <a:p>
+            <a:pPr algn="r" indent="0" marL="0">
+              <a:buNone/>
+            </a:pPr>
+            <a:r>
+              <a:rPr lang="en-US" sz="950" b="1" dirty="0">
+                <a:solidFill>
+                  <a:srgbClr val="C0392B"/>
+                </a:solidFill>
+                <a:latin typeface="Consolas" pitchFamily="34" charset="0"/>
+                <a:ea typeface="Consolas" pitchFamily="34" charset="-122"/>
+                <a:cs typeface="Consolas" pitchFamily="34" charset="-120"/>
+              </a:rPr>
+              <a:t>3</a:t>
+            </a:r>
+            <a:endParaRPr lang="en-US" sz="950" dirty="0"/>
+          </a:p>
+        </p:txBody>
+      </p:sp>
+      <p:sp>
+        <p:nvSpPr>
+          <p:cNvPr id="14" name="Text 12"/>
+          <p:cNvSpPr/>
+          <p:nvPr/>
+        </p:nvSpPr>
+        <p:spPr>
+          <a:xfrm>
+            <a:off x="658368" y="2606040"/>
+            <a:ext cx="2468880" cy="256032"/>
+          </a:xfrm>
+          <a:prstGeom prst="rect">
+            <a:avLst/>
+          </a:prstGeom>
+          <a:noFill/>
+          <a:ln/>
+        </p:spPr>
+        <p:txBody>
+          <a:bodyPr wrap="square" lIns="0" tIns="0" rIns="0" bIns="0" rtlCol="0" anchor="ctr"/>
+          <a:lstStyle/>
+          <a:p>
+            <a:pPr indent="0" marL="0">
+              <a:buNone/>
+            </a:pPr>
+            <a:r>
+              <a:rPr lang="en-US" sz="950" dirty="0">
+                <a:solidFill>
+                  <a:srgbClr val="5B6B7C"/>
+                </a:solidFill>
+                <a:latin typeface="Consolas" pitchFamily="34" charset="0"/>
+                <a:ea typeface="Consolas" pitchFamily="34" charset="-122"/>
+                <a:cs typeface="Consolas" pitchFamily="34" charset="-120"/>
+              </a:rPr>
+              <a:t>P1_KEV_Internal</a:t>
+            </a:r>
+            <a:endParaRPr lang="en-US" sz="950" dirty="0"/>
+          </a:p>
+        </p:txBody>
+      </p:sp>
+      <p:sp>
+        <p:nvSpPr>
+          <p:cNvPr id="15" name="Text 13"/>
+          <p:cNvSpPr/>
+          <p:nvPr/>
+        </p:nvSpPr>
+        <p:spPr>
+          <a:xfrm>
+            <a:off x="3108960" y="2606040"/>
+            <a:ext cx="1325880" cy="256032"/>
+          </a:xfrm>
+          <a:prstGeom prst="rect">
+            <a:avLst/>
+          </a:prstGeom>
+          <a:noFill/>
+          <a:ln/>
+        </p:spPr>
+        <p:txBody>
+          <a:bodyPr wrap="square" lIns="0" tIns="0" rIns="0" bIns="0" rtlCol="0" anchor="ctr"/>
+          <a:lstStyle/>
+          <a:p>
+            <a:pPr algn="r" indent="0" marL="0">
+              <a:buNone/>
+            </a:pPr>
+            <a:r>
+              <a:rPr lang="en-US" sz="950" b="1" dirty="0">
+                <a:solidFill>
+                  <a:srgbClr val="D4860B"/>
+                </a:solidFill>
+                <a:latin typeface="Consolas" pitchFamily="34" charset="0"/>
+                <a:ea typeface="Consolas" pitchFamily="34" charset="-122"/>
+                <a:cs typeface="Consolas" pitchFamily="34" charset="-120"/>
+              </a:rPr>
+              <a:t>20</a:t>
+            </a:r>
+            <a:endParaRPr lang="en-US" sz="950" dirty="0"/>
+          </a:p>
+        </p:txBody>
+      </p:sp>
+      <p:sp>
+        <p:nvSpPr>
+          <p:cNvPr id="16" name="Text 14"/>
+          <p:cNvSpPr/>
+          <p:nvPr/>
+        </p:nvSpPr>
+        <p:spPr>
+          <a:xfrm>
+            <a:off x="658368" y="2889504"/>
+            <a:ext cx="2468880" cy="256032"/>
+          </a:xfrm>
+          <a:prstGeom prst="rect">
+            <a:avLst/>
+          </a:prstGeom>
+          <a:noFill/>
+          <a:ln/>
+        </p:spPr>
+        <p:txBody>
+          <a:bodyPr wrap="square" lIns="0" tIns="0" rIns="0" bIns="0" rtlCol="0" anchor="ctr"/>
+          <a:lstStyle/>
+          <a:p>
+            <a:pPr indent="0" marL="0">
+              <a:buNone/>
+            </a:pPr>
+            <a:r>
+              <a:rPr lang="en-US" sz="950" dirty="0">
+                <a:solidFill>
+                  <a:srgbClr val="5B6B7C"/>
+                </a:solidFill>
+                <a:latin typeface="Consolas" pitchFamily="34" charset="0"/>
+                <a:ea typeface="Consolas" pitchFamily="34" charset="-122"/>
+                <a:cs typeface="Consolas" pitchFamily="34" charset="-120"/>
+              </a:rPr>
+              <a:t>SLABreached</a:t>
+            </a:r>
+            <a:endParaRPr lang="en-US" sz="950" dirty="0"/>
+          </a:p>
+        </p:txBody>
+      </p:sp>
+      <p:sp>
+        <p:nvSpPr>
+          <p:cNvPr id="17" name="Text 15"/>
+          <p:cNvSpPr/>
+          <p:nvPr/>
+        </p:nvSpPr>
+        <p:spPr>
+          <a:xfrm>
+            <a:off x="3108960" y="2889504"/>
+            <a:ext cx="1325880" cy="256032"/>
+          </a:xfrm>
+          <a:prstGeom prst="rect">
+            <a:avLst/>
+          </a:prstGeom>
+          <a:noFill/>
+          <a:ln/>
+        </p:spPr>
+        <p:txBody>
+          <a:bodyPr wrap="square" lIns="0" tIns="0" rIns="0" bIns="0" rtlCol="0" anchor="ctr"/>
+          <a:lstStyle/>
+          <a:p>
+            <a:pPr algn="r" indent="0" marL="0">
+              <a:buNone/>
+            </a:pPr>
+            <a:r>
+              <a:rPr lang="en-US" sz="950" b="1" dirty="0">
+                <a:solidFill>
+                  <a:srgbClr val="D4860B"/>
+                </a:solidFill>
+                <a:latin typeface="Consolas" pitchFamily="34" charset="0"/>
+                <a:ea typeface="Consolas" pitchFamily="34" charset="-122"/>
+                <a:cs typeface="Consolas" pitchFamily="34" charset="-120"/>
+              </a:rPr>
+              <a:t>12</a:t>
+            </a:r>
+            <a:endParaRPr lang="en-US" sz="950" dirty="0"/>
+          </a:p>
+        </p:txBody>
+      </p:sp>
+      <p:sp>
+        <p:nvSpPr>
+          <p:cNvPr id="18" name="Text 16"/>
+          <p:cNvSpPr/>
+          <p:nvPr/>
+        </p:nvSpPr>
+        <p:spPr>
+          <a:xfrm>
+            <a:off x="658368" y="3172968"/>
+            <a:ext cx="2468880" cy="256032"/>
+          </a:xfrm>
+          <a:prstGeom prst="rect">
+            <a:avLst/>
+          </a:prstGeom>
+          <a:noFill/>
+          <a:ln/>
+        </p:spPr>
+        <p:txBody>
+          <a:bodyPr wrap="square" lIns="0" tIns="0" rIns="0" bIns="0" rtlCol="0" anchor="ctr"/>
+          <a:lstStyle/>
+          <a:p>
+            <a:pPr indent="0" marL="0">
+              <a:buNone/>
+            </a:pPr>
+            <a:r>
+              <a:rPr lang="en-US" sz="950" dirty="0">
+                <a:solidFill>
+                  <a:srgbClr val="5B6B7C"/>
+                </a:solidFill>
+                <a:latin typeface="Consolas" pitchFamily="34" charset="0"/>
+                <a:ea typeface="Consolas" pitchFamily="34" charset="-122"/>
+                <a:cs typeface="Consolas" pitchFamily="34" charset="-120"/>
+              </a:rPr>
+              <a:t>SLABreachedKEV</a:t>
+            </a:r>
+            <a:endParaRPr lang="en-US" sz="950" dirty="0"/>
+          </a:p>
+        </p:txBody>
+      </p:sp>
+      <p:sp>
+        <p:nvSpPr>
+          <p:cNvPr id="19" name="Text 17"/>
+          <p:cNvSpPr/>
+          <p:nvPr/>
+        </p:nvSpPr>
+        <p:spPr>
+          <a:xfrm>
+            <a:off x="3108960" y="3172968"/>
+            <a:ext cx="1325880" cy="256032"/>
+          </a:xfrm>
+          <a:prstGeom prst="rect">
+            <a:avLst/>
+          </a:prstGeom>
+          <a:noFill/>
+          <a:ln/>
+        </p:spPr>
+        <p:txBody>
+          <a:bodyPr wrap="square" lIns="0" tIns="0" rIns="0" bIns="0" rtlCol="0" anchor="ctr"/>
+          <a:lstStyle/>
+          <a:p>
+            <a:pPr algn="r" indent="0" marL="0">
+              <a:buNone/>
+            </a:pPr>
+            <a:r>
+              <a:rPr lang="en-US" sz="950" b="1" dirty="0">
+                <a:solidFill>
+                  <a:srgbClr val="1A9E8F"/>
+                </a:solidFill>
+                <a:latin typeface="Consolas" pitchFamily="34" charset="0"/>
+                <a:ea typeface="Consolas" pitchFamily="34" charset="-122"/>
+                <a:cs typeface="Consolas" pitchFamily="34" charset="-120"/>
+              </a:rPr>
+              <a:t>0</a:t>
+            </a:r>
+            <a:endParaRPr lang="en-US" sz="950" dirty="0"/>
+          </a:p>
+        </p:txBody>
+      </p:sp>
+      <p:sp>
+        <p:nvSpPr>
+          <p:cNvPr id="20" name="Text 18"/>
+          <p:cNvSpPr/>
+          <p:nvPr/>
+        </p:nvSpPr>
+        <p:spPr>
+          <a:xfrm>
+            <a:off x="658368" y="3456432"/>
+            <a:ext cx="2468880" cy="256032"/>
+          </a:xfrm>
+          <a:prstGeom prst="rect">
+            <a:avLst/>
+          </a:prstGeom>
+          <a:noFill/>
+          <a:ln/>
+        </p:spPr>
+        <p:txBody>
+          <a:bodyPr wrap="square" lIns="0" tIns="0" rIns="0" bIns="0" rtlCol="0" anchor="ctr"/>
+          <a:lstStyle/>
+          <a:p>
+            <a:pPr indent="0" marL="0">
+              <a:buNone/>
+            </a:pPr>
+            <a:r>
+              <a:rPr lang="en-US" sz="950" dirty="0">
+                <a:solidFill>
+                  <a:srgbClr val="5B6B7C"/>
+                </a:solidFill>
+                <a:latin typeface="Consolas" pitchFamily="34" charset="0"/>
+                <a:ea typeface="Consolas" pitchFamily="34" charset="-122"/>
+                <a:cs typeface="Consolas" pitchFamily="34" charset="-120"/>
+              </a:rPr>
+              <a:t>PatchComplianceRate</a:t>
+            </a:r>
+            <a:endParaRPr lang="en-US" sz="950" dirty="0"/>
+          </a:p>
+        </p:txBody>
+      </p:sp>
+      <p:sp>
+        <p:nvSpPr>
+          <p:cNvPr id="21" name="Text 19"/>
+          <p:cNvSpPr/>
+          <p:nvPr/>
+        </p:nvSpPr>
+        <p:spPr>
+          <a:xfrm>
+            <a:off x="3108960" y="3456432"/>
+            <a:ext cx="1325880" cy="256032"/>
+          </a:xfrm>
+          <a:prstGeom prst="rect">
+            <a:avLst/>
+          </a:prstGeom>
+          <a:noFill/>
+          <a:ln/>
+        </p:spPr>
+        <p:txBody>
+          <a:bodyPr wrap="square" lIns="0" tIns="0" rIns="0" bIns="0" rtlCol="0" anchor="ctr"/>
+          <a:lstStyle/>
+          <a:p>
+            <a:pPr algn="r" indent="0" marL="0">
+              <a:buNone/>
+            </a:pPr>
+            <a:r>
+              <a:rPr lang="en-US" sz="950" b="1" dirty="0">
+                <a:solidFill>
+                  <a:srgbClr val="1A9E8F"/>
+                </a:solidFill>
+                <a:latin typeface="Consolas" pitchFamily="34" charset="0"/>
+                <a:ea typeface="Consolas" pitchFamily="34" charset="-122"/>
+                <a:cs typeface="Consolas" pitchFamily="34" charset="-120"/>
+              </a:rPr>
+              <a:t>98.6%</a:t>
+            </a:r>
+            <a:endParaRPr lang="en-US" sz="950" dirty="0"/>
+          </a:p>
+        </p:txBody>
+      </p:sp>
+      <p:sp>
+        <p:nvSpPr>
+          <p:cNvPr id="22" name="Text 20"/>
+          <p:cNvSpPr/>
+          <p:nvPr/>
+        </p:nvSpPr>
+        <p:spPr>
+          <a:xfrm>
+            <a:off x="658368" y="3739896"/>
+            <a:ext cx="2468880" cy="256032"/>
+          </a:xfrm>
+          <a:prstGeom prst="rect">
+            <a:avLst/>
+          </a:prstGeom>
+          <a:noFill/>
+          <a:ln/>
+        </p:spPr>
+        <p:txBody>
+          <a:bodyPr wrap="square" lIns="0" tIns="0" rIns="0" bIns="0" rtlCol="0" anchor="ctr"/>
+          <a:lstStyle/>
+          <a:p>
+            <a:pPr indent="0" marL="0">
+              <a:buNone/>
+            </a:pPr>
+            <a:r>
+              <a:rPr lang="en-US" sz="950" dirty="0">
+                <a:solidFill>
+                  <a:srgbClr val="5B6B7C"/>
+                </a:solidFill>
+                <a:latin typeface="Consolas" pitchFamily="34" charset="0"/>
+                <a:ea typeface="Consolas" pitchFamily="34" charset="-122"/>
+                <a:cs typeface="Consolas" pitchFamily="34" charset="-120"/>
+              </a:rPr>
+              <a:t>KEVCatalogSize</a:t>
+            </a:r>
+            <a:endParaRPr lang="en-US" sz="950" dirty="0"/>
+          </a:p>
+        </p:txBody>
+      </p:sp>
+      <p:sp>
+        <p:nvSpPr>
+          <p:cNvPr id="23" name="Text 21"/>
+          <p:cNvSpPr/>
+          <p:nvPr/>
+        </p:nvSpPr>
+        <p:spPr>
+          <a:xfrm>
+            <a:off x="3108960" y="3739896"/>
+            <a:ext cx="1325880" cy="256032"/>
+          </a:xfrm>
+          <a:prstGeom prst="rect">
+            <a:avLst/>
+          </a:prstGeom>
+          <a:noFill/>
+          <a:ln/>
+        </p:spPr>
+        <p:txBody>
+          <a:bodyPr wrap="square" lIns="0" tIns="0" rIns="0" bIns="0" rtlCol="0" anchor="ctr"/>
+          <a:lstStyle/>
+          <a:p>
+            <a:pPr algn="r" indent="0" marL="0">
+              <a:buNone/>
+            </a:pPr>
+            <a:r>
+              <a:rPr lang="en-US" sz="950" b="1" dirty="0">
+                <a:solidFill>
+                  <a:srgbClr val="5B6B7C"/>
+                </a:solidFill>
+                <a:latin typeface="Consolas" pitchFamily="34" charset="0"/>
+                <a:ea typeface="Consolas" pitchFamily="34" charset="-122"/>
+                <a:cs typeface="Consolas" pitchFamily="34" charset="-120"/>
+              </a:rPr>
+              <a:t>1148</a:t>
+            </a:r>
+            <a:endParaRPr lang="en-US" sz="950" dirty="0"/>
+          </a:p>
+        </p:txBody>
+      </p:sp>
+      <p:sp>
+        <p:nvSpPr>
+          <p:cNvPr id="24" name="Shape 22"/>
+          <p:cNvSpPr/>
+          <p:nvPr/>
+        </p:nvSpPr>
+        <p:spPr>
+          <a:xfrm>
+            <a:off x="4690872" y="1325880"/>
+            <a:ext cx="4041648" cy="1298448"/>
+          </a:xfrm>
+          <a:prstGeom prst="roundRect">
+            <a:avLst>
+              <a:gd name="adj" fmla="val 4930"/>
+            </a:avLst>
+          </a:prstGeom>
+          <a:solidFill>
+            <a:srgbClr val="E6F5F2"/>
+          </a:solidFill>
+          <a:ln w="9525">
+            <a:solidFill>
+              <a:srgbClr val="C9D4E0"/>
+            </a:solidFill>
+            <a:prstDash val="solid"/>
+          </a:ln>
+        </p:spPr>
+      </p:sp>
+      <p:sp>
+        <p:nvSpPr>
+          <p:cNvPr id="25" name="Text 23"/>
+          <p:cNvSpPr/>
+          <p:nvPr/>
+        </p:nvSpPr>
+        <p:spPr>
+          <a:xfrm>
+            <a:off x="4846320" y="1435608"/>
+            <a:ext cx="3749040" cy="1097280"/>
+          </a:xfrm>
+          <a:prstGeom prst="rect">
+            <a:avLst/>
+          </a:prstGeom>
+          <a:noFill/>
+          <a:ln/>
+        </p:spPr>
+        <p:txBody>
+          <a:bodyPr wrap="square" lIns="0" tIns="0" rIns="0" bIns="0" rtlCol="0" anchor="ctr"/>
+          <a:lstStyle/>
+          <a:p>
+            <a:pPr indent="0" marL="0">
+              <a:buNone/>
+            </a:pPr>
+            <a:r>
+              <a:rPr lang="en-US" sz="1300" b="1" dirty="0">
+                <a:solidFill>
+                  <a:srgbClr val="1A9E8F"/>
+                </a:solidFill>
+                <a:latin typeface="Arial" pitchFamily="34" charset="0"/>
+                <a:ea typeface="Arial" pitchFamily="34" charset="-122"/>
+                <a:cs typeface="Arial" pitchFamily="34" charset="-120"/>
+              </a:rPr>
+              <a:t>SLABreachedKEV = 0
+</a:t>
+            </a:r>
+            <a:pPr indent="0" marL="0">
+              <a:buNone/>
+            </a:pPr>
+            <a:r>
+              <a:rPr lang="en-US" sz="950" dirty="0">
+                <a:solidFill>
+                  <a:srgbClr val="1E293B"/>
+                </a:solidFill>
+                <a:latin typeface="Arial" pitchFamily="34" charset="0"/>
+                <a:ea typeface="Arial" pitchFamily="34" charset="-122"/>
+                <a:cs typeface="Arial" pitchFamily="34" charset="-120"/>
+              </a:rPr>
+              <a:t>The BOD 22-01 pass/fail. Any non-zero value is a mandatory CISA reporting event — this field must stay at zero.</a:t>
+            </a:r>
+            <a:endParaRPr lang="en-US" sz="1300" dirty="0"/>
+          </a:p>
+        </p:txBody>
+      </p:sp>
+      <p:sp>
+        <p:nvSpPr>
+          <p:cNvPr id="26" name="Shape 24"/>
+          <p:cNvSpPr/>
+          <p:nvPr/>
+        </p:nvSpPr>
+        <p:spPr>
+          <a:xfrm>
+            <a:off x="4690872" y="2770632"/>
+            <a:ext cx="4041648" cy="1298448"/>
+          </a:xfrm>
+          <a:prstGeom prst="roundRect">
+            <a:avLst>
+              <a:gd name="adj" fmla="val 4930"/>
+            </a:avLst>
+          </a:prstGeom>
+          <a:solidFill>
+            <a:srgbClr val="EDF3F9"/>
+          </a:solidFill>
+          <a:ln w="9525">
+            <a:solidFill>
+              <a:srgbClr val="C9D4E0"/>
+            </a:solidFill>
+            <a:prstDash val="solid"/>
+          </a:ln>
+        </p:spPr>
+      </p:sp>
+      <p:sp>
+        <p:nvSpPr>
+          <p:cNvPr id="27" name="Text 25"/>
+          <p:cNvSpPr/>
+          <p:nvPr/>
+        </p:nvSpPr>
+        <p:spPr>
+          <a:xfrm>
+            <a:off x="4846320" y="2880360"/>
+            <a:ext cx="3749040" cy="1097280"/>
+          </a:xfrm>
+          <a:prstGeom prst="rect">
+            <a:avLst/>
+          </a:prstGeom>
+          <a:noFill/>
+          <a:ln/>
+        </p:spPr>
+        <p:txBody>
+          <a:bodyPr wrap="square" lIns="0" tIns="0" rIns="0" bIns="0" rtlCol="0" anchor="ctr"/>
+          <a:lstStyle/>
+          <a:p>
+            <a:pPr indent="0" marL="0">
+              <a:buNone/>
+            </a:pPr>
+            <a:r>
+              <a:rPr lang="en-US" sz="1300" b="1" dirty="0">
+                <a:solidFill>
+                  <a:srgbClr val="1F3A5F"/>
+                </a:solidFill>
+                <a:latin typeface="Arial" pitchFamily="34" charset="0"/>
+                <a:ea typeface="Arial" pitchFamily="34" charset="-122"/>
+                <a:cs typeface="Arial" pitchFamily="34" charset="-120"/>
+              </a:rPr>
+              <a:t>PatchComplianceRate ≥ 95%
+</a:t>
+            </a:r>
+            <a:pPr indent="0" marL="0">
+              <a:buNone/>
+            </a:pPr>
+            <a:r>
+              <a:rPr lang="en-US" sz="950" dirty="0">
+                <a:solidFill>
+                  <a:srgbClr val="1E293B"/>
+                </a:solidFill>
+                <a:latin typeface="Arial" pitchFamily="34" charset="0"/>
+                <a:ea typeface="Arial" pitchFamily="34" charset="-122"/>
+                <a:cs typeface="Arial" pitchFamily="34" charset="-120"/>
+              </a:rPr>
+              <a:t>The FedRAMP 20x SI-2 target across the Critical + High population, on a 30-day rolling window.</a:t>
+            </a:r>
+            <a:endParaRPr lang="en-US" sz="1300" dirty="0"/>
+          </a:p>
+        </p:txBody>
+      </p:sp>
+      <p:sp>
+        <p:nvSpPr>
+          <p:cNvPr id="28" name="Shape 26"/>
+          <p:cNvSpPr/>
+          <p:nvPr/>
+        </p:nvSpPr>
+        <p:spPr>
+          <a:xfrm>
+            <a:off x="502920" y="4224528"/>
+            <a:ext cx="8229600" cy="585216"/>
+          </a:xfrm>
+          <a:prstGeom prst="roundRect">
+            <a:avLst>
+              <a:gd name="adj" fmla="val 10938"/>
+            </a:avLst>
+          </a:prstGeom>
+          <a:solidFill>
+            <a:srgbClr val="EDF3F9"/>
+          </a:solidFill>
+          <a:ln w="9525">
+            <a:solidFill>
+              <a:srgbClr val="C9D4E0"/>
+            </a:solidFill>
+            <a:prstDash val="solid"/>
+          </a:ln>
+        </p:spPr>
+      </p:sp>
+      <p:sp>
+        <p:nvSpPr>
+          <p:cNvPr id="29" name="Text 27"/>
+          <p:cNvSpPr/>
+          <p:nvPr/>
+        </p:nvSpPr>
+        <p:spPr>
+          <a:xfrm>
+            <a:off x="731520" y="4224528"/>
+            <a:ext cx="7772400" cy="585216"/>
+          </a:xfrm>
+          <a:prstGeom prst="rect">
+            <a:avLst/>
+          </a:prstGeom>
+          <a:noFill/>
+          <a:ln/>
+        </p:spPr>
+        <p:txBody>
+          <a:bodyPr wrap="square" lIns="0" tIns="0" rIns="0" bIns="0" rtlCol="0" anchor="ctr"/>
+          <a:lstStyle/>
+          <a:p>
+            <a:pPr indent="0" marL="0">
+              <a:buNone/>
+            </a:pPr>
+            <a:r>
+              <a:rPr lang="en-US" sz="1000" b="1" dirty="0">
+                <a:solidFill>
+                  <a:srgbClr val="1F3A5F"/>
+                </a:solidFill>
+                <a:latin typeface="Arial" pitchFamily="34" charset="0"/>
+                <a:ea typeface="Arial" pitchFamily="34" charset="-122"/>
+                <a:cs typeface="Arial" pitchFamily="34" charset="-120"/>
+              </a:rPr>
+              <a:t>This is the artifact the assessor's third question needs: </a:t>
+            </a:r>
+            <a:pPr indent="0" marL="0">
+              <a:buNone/>
+            </a:pPr>
+            <a:r>
+              <a:rPr lang="en-US" sz="1000" dirty="0">
+                <a:solidFill>
+                  <a:srgbClr val="1E293B"/>
+                </a:solidFill>
+                <a:latin typeface="Arial" pitchFamily="34" charset="0"/>
+                <a:ea typeface="Arial" pitchFamily="34" charset="-122"/>
+                <a:cs typeface="Arial" pitchFamily="34" charset="-120"/>
+              </a:rPr>
+              <a:t>produced every day, no human assembly, answering RA-5 and SI-2 as a query against a file that already exists.</a:t>
+            </a:r>
+            <a:endParaRPr lang="en-US" sz="1000" dirty="0"/>
+          </a:p>
+        </p:txBody>
+      </p:sp>
+    </p:spTree>
+  </p:cSld>
+  <p:clrMapOvr>
+    <a:masterClrMapping/>
+  </p:clrMapOvr>
+</p:sld>
+</file>
+
+<file path=ppt/slides/slide22.xml><?xml version="1.0" encoding="utf-8"?>
+<p:sld xmlns:a="http://schemas.openxmlformats.org/drawingml/2006/main" xmlns:r="http://schemas.openxmlformats.org/officeDocument/2006/relationships" xmlns:p="http://schemas.openxmlformats.org/presentationml/2006/main">
+  <p:cSld name="Slide 22">
+    <p:bg>
+      <p:bgPr>
+        <a:solidFill>
+          <a:srgbClr val="FFFFFF"/>
+        </a:solidFill>
+      </p:bgPr>
+    </p:bg>
+    <p:spTree>
+      <p:nvGrpSpPr>
+        <p:cNvPr id="1" name=""/>
+        <p:cNvGrpSpPr/>
+        <p:nvPr/>
+      </p:nvGrpSpPr>
+      <p:grpSpPr>
+        <a:xfrm>
+          <a:off x="0" y="0"/>
+          <a:ext cx="0" cy="0"/>
+          <a:chOff x="0" y="0"/>
+          <a:chExt cx="0" cy="0"/>
+        </a:xfrm>
+      </p:grpSpPr>
+      <p:sp>
+        <p:nvSpPr>
+          <p:cNvPr id="2" name="Text 0"/>
+          <p:cNvSpPr/>
+          <p:nvPr/>
+        </p:nvSpPr>
+        <p:spPr>
+          <a:xfrm>
+            <a:off x="502920" y="256032"/>
+            <a:ext cx="8229600" cy="274320"/>
+          </a:xfrm>
+          <a:prstGeom prst="rect">
+            <a:avLst/>
+          </a:prstGeom>
+          <a:noFill/>
+          <a:ln/>
+        </p:spPr>
+        <p:txBody>
+          <a:bodyPr wrap="square" lIns="0" tIns="0" rIns="0" bIns="0" rtlCol="0" anchor="ctr"/>
+          <a:lstStyle/>
+          <a:p>
+            <a:pPr indent="0" marL="0">
+              <a:buNone/>
+            </a:pPr>
+            <a:r>
+              <a:rPr lang="en-US" sz="1100" b="1" spc="200" kern="0" dirty="0">
+                <a:solidFill>
+                  <a:srgbClr val="1A9E8F"/>
+                </a:solidFill>
+                <a:latin typeface="Arial" pitchFamily="34" charset="0"/>
+                <a:ea typeface="Arial" pitchFamily="34" charset="-122"/>
+                <a:cs typeface="Arial" pitchFamily="34" charset="-120"/>
+              </a:rPr>
+              <a:t>THE EVIDENCE HALF — RETENTION &amp; OPERATIONS</a:t>
+            </a:r>
+            <a:endParaRPr lang="en-US" sz="1100" dirty="0"/>
+          </a:p>
+        </p:txBody>
+      </p:sp>
+      <p:sp>
+        <p:nvSpPr>
+          <p:cNvPr id="3" name="Text 1"/>
+          <p:cNvSpPr/>
+          <p:nvPr/>
+        </p:nvSpPr>
+        <p:spPr>
+          <a:xfrm>
+            <a:off x="502920" y="512064"/>
+            <a:ext cx="8138160" cy="566928"/>
+          </a:xfrm>
+          <a:prstGeom prst="rect">
+            <a:avLst/>
+          </a:prstGeom>
+          <a:noFill/>
+          <a:ln/>
+        </p:spPr>
+        <p:txBody>
+          <a:bodyPr wrap="square" lIns="0" tIns="0" rIns="0" bIns="0" rtlCol="0" anchor="ctr"/>
+          <a:lstStyle/>
+          <a:p>
+            <a:pPr indent="0" marL="0">
+              <a:buNone/>
+            </a:pPr>
+            <a:r>
+              <a:rPr lang="en-US" sz="2200" b="1" dirty="0">
+                <a:solidFill>
+                  <a:srgbClr val="1F3A5F"/>
+                </a:solidFill>
+                <a:latin typeface="Arial" pitchFamily="34" charset="0"/>
+                <a:ea typeface="Arial" pitchFamily="34" charset="-122"/>
+                <a:cs typeface="Arial" pitchFamily="34" charset="-120"/>
+              </a:rPr>
+              <a:t>From daily record to 90-day history and a live dashboard</a:t>
+            </a:r>
+            <a:endParaRPr lang="en-US" sz="2200" dirty="0"/>
+          </a:p>
+        </p:txBody>
+      </p:sp>
+      <p:sp>
+        <p:nvSpPr>
+          <p:cNvPr id="4" name="Text 2"/>
+          <p:cNvSpPr/>
+          <p:nvPr/>
+        </p:nvSpPr>
+        <p:spPr>
+          <a:xfrm>
+            <a:off x="502920" y="4864608"/>
+            <a:ext cx="7315200" cy="219456"/>
+          </a:xfrm>
+          <a:prstGeom prst="rect">
+            <a:avLst/>
+          </a:prstGeom>
+          <a:noFill/>
+          <a:ln/>
+        </p:spPr>
+        <p:txBody>
+          <a:bodyPr wrap="square" lIns="0" tIns="0" rIns="0" bIns="0" rtlCol="0" anchor="ctr"/>
+          <a:lstStyle/>
+          <a:p>
+            <a:pPr indent="0" marL="0">
+              <a:buNone/>
+            </a:pPr>
+            <a:r>
+              <a:rPr lang="en-US" sz="800" dirty="0">
+                <a:solidFill>
+                  <a:srgbClr val="5B6B7C"/>
+                </a:solidFill>
+                <a:latin typeface="Arial" pitchFamily="34" charset="0"/>
+                <a:ea typeface="Arial" pitchFamily="34" charset="-122"/>
+                <a:cs typeface="Arial" pitchFamily="34" charset="-120"/>
+              </a:rPr>
+              <a:t>Federal AAN — Book 11 Vulnerability Management · CSI Team Draft — Internal · FedRAMP Moderate · Date Code 2026-07-08 13:32 ET</a:t>
+            </a:r>
+            <a:endParaRPr lang="en-US" sz="800" dirty="0"/>
+          </a:p>
+        </p:txBody>
+      </p:sp>
+      <p:sp>
+        <p:nvSpPr>
+          <p:cNvPr id="5" name="Text 3"/>
+          <p:cNvSpPr/>
+          <p:nvPr/>
+        </p:nvSpPr>
+        <p:spPr>
+          <a:xfrm>
+            <a:off x="8412480" y="4864608"/>
+            <a:ext cx="320040" cy="219456"/>
+          </a:xfrm>
+          <a:prstGeom prst="rect">
+            <a:avLst/>
+          </a:prstGeom>
+          <a:noFill/>
+          <a:ln/>
+        </p:spPr>
+        <p:txBody>
+          <a:bodyPr wrap="square" lIns="0" tIns="0" rIns="0" bIns="0" rtlCol="0" anchor="ctr"/>
+          <a:lstStyle/>
+          <a:p>
+            <a:pPr algn="r" indent="0" marL="0">
+              <a:buNone/>
+            </a:pPr>
+            <a:r>
+              <a:rPr lang="en-US" sz="800" dirty="0">
+                <a:solidFill>
+                  <a:srgbClr val="5B6B7C"/>
+                </a:solidFill>
+                <a:latin typeface="Arial" pitchFamily="34" charset="0"/>
+                <a:ea typeface="Arial" pitchFamily="34" charset="-122"/>
+                <a:cs typeface="Arial" pitchFamily="34" charset="-120"/>
+              </a:rPr>
+              <a:t>22</a:t>
+            </a:r>
+            <a:endParaRPr lang="en-US" sz="800" dirty="0"/>
+          </a:p>
+        </p:txBody>
+      </p:sp>
+      <p:sp>
+        <p:nvSpPr>
+          <p:cNvPr id="6" name="Shape 4"/>
+          <p:cNvSpPr/>
+          <p:nvPr/>
+        </p:nvSpPr>
+        <p:spPr>
+          <a:xfrm>
+            <a:off x="502920" y="1298448"/>
+            <a:ext cx="8229600" cy="850392"/>
+          </a:xfrm>
+          <a:prstGeom prst="roundRect">
+            <a:avLst>
+              <a:gd name="adj" fmla="val 7527"/>
+            </a:avLst>
+          </a:prstGeom>
+          <a:solidFill>
+            <a:srgbClr val="FFFFFF"/>
+          </a:solidFill>
+          <a:ln w="9525">
+            <a:solidFill>
+              <a:srgbClr val="C9D4E0"/>
+            </a:solidFill>
+            <a:prstDash val="solid"/>
+          </a:ln>
+        </p:spPr>
+      </p:sp>
+      <p:sp>
+        <p:nvSpPr>
+          <p:cNvPr id="7" name="Shape 5"/>
+          <p:cNvSpPr/>
+          <p:nvPr/>
+        </p:nvSpPr>
+        <p:spPr>
+          <a:xfrm>
+            <a:off x="685800" y="1554480"/>
+            <a:ext cx="329184" cy="329184"/>
+          </a:xfrm>
+          <a:prstGeom prst="ellipse">
+            <a:avLst/>
+          </a:prstGeom>
+          <a:solidFill>
+            <a:srgbClr val="1F3A5F"/>
+          </a:solidFill>
+          <a:ln/>
+        </p:spPr>
+      </p:sp>
+      <p:sp>
+        <p:nvSpPr>
+          <p:cNvPr id="8" name="Text 6"/>
+          <p:cNvSpPr/>
+          <p:nvPr/>
+        </p:nvSpPr>
+        <p:spPr>
+          <a:xfrm>
+            <a:off x="685800" y="1540764"/>
+            <a:ext cx="329184" cy="329184"/>
+          </a:xfrm>
+          <a:prstGeom prst="rect">
+            <a:avLst/>
+          </a:prstGeom>
+          <a:noFill/>
+          <a:ln/>
+        </p:spPr>
+        <p:txBody>
+          <a:bodyPr wrap="square" lIns="0" tIns="0" rIns="0" bIns="0" rtlCol="0" anchor="ctr"/>
+          <a:lstStyle/>
+          <a:p>
+            <a:pPr algn="ctr" indent="0" marL="0">
+              <a:buNone/>
+            </a:pPr>
+            <a:r>
+              <a:rPr lang="en-US" sz="1300" b="1" dirty="0">
+                <a:solidFill>
+                  <a:srgbClr val="FFFFFF"/>
+                </a:solidFill>
+                <a:latin typeface="Arial" pitchFamily="34" charset="0"/>
+                <a:ea typeface="Arial" pitchFamily="34" charset="-122"/>
+                <a:cs typeface="Arial" pitchFamily="34" charset="-120"/>
+              </a:rPr>
+              <a:t>1</a:t>
+            </a:r>
+            <a:endParaRPr lang="en-US" sz="1300" dirty="0"/>
+          </a:p>
+        </p:txBody>
+      </p:sp>
+      <p:sp>
+        <p:nvSpPr>
+          <p:cNvPr id="9" name="Text 7"/>
+          <p:cNvSpPr/>
+          <p:nvPr/>
+        </p:nvSpPr>
+        <p:spPr>
+          <a:xfrm>
+            <a:off x="1170432" y="1371600"/>
+            <a:ext cx="7360920" cy="713232"/>
+          </a:xfrm>
+          <a:prstGeom prst="rect">
+            <a:avLst/>
+          </a:prstGeom>
+          <a:noFill/>
+          <a:ln/>
+        </p:spPr>
+        <p:txBody>
+          <a:bodyPr wrap="square" lIns="0" tIns="0" rIns="0" bIns="0" rtlCol="0" anchor="ctr"/>
+          <a:lstStyle/>
+          <a:p>
+            <a:pPr indent="0" marL="0">
+              <a:buNone/>
+            </a:pPr>
+            <a:r>
+              <a:rPr lang="en-US" sz="1100" b="1" dirty="0">
+                <a:solidFill>
+                  <a:srgbClr val="1F3A5F"/>
+                </a:solidFill>
+                <a:latin typeface="Arial" pitchFamily="34" charset="0"/>
+                <a:ea typeface="Arial" pitchFamily="34" charset="-122"/>
+                <a:cs typeface="Arial" pitchFamily="34" charset="-120"/>
+              </a:rPr>
+              <a:t>Archive daily   </a:t>
+            </a:r>
+            <a:pPr indent="0" marL="0">
+              <a:buNone/>
+            </a:pPr>
+            <a:r>
+              <a:rPr lang="en-US" sz="900" dirty="0">
+                <a:solidFill>
+                  <a:srgbClr val="1E293B"/>
+                </a:solidFill>
+                <a:latin typeface="Arial" pitchFamily="34" charset="0"/>
+                <a:ea typeface="Arial" pitchFamily="34" charset="-122"/>
+                <a:cs typeface="Arial" pitchFamily="34" charset="-120"/>
+              </a:rPr>
+              <a:t>Each daily summary is written to Azure Blob Storage via Managed Identity — the durable, tamper-evident compliance history.</a:t>
+            </a:r>
+            <a:endParaRPr lang="en-US" sz="1100" dirty="0"/>
+          </a:p>
+        </p:txBody>
+      </p:sp>
+      <p:sp>
+        <p:nvSpPr>
+          <p:cNvPr id="10" name="Shape 8"/>
+          <p:cNvSpPr/>
+          <p:nvPr/>
+        </p:nvSpPr>
+        <p:spPr>
+          <a:xfrm>
+            <a:off x="502920" y="2258568"/>
+            <a:ext cx="8229600" cy="850392"/>
+          </a:xfrm>
+          <a:prstGeom prst="roundRect">
+            <a:avLst>
+              <a:gd name="adj" fmla="val 7527"/>
+            </a:avLst>
+          </a:prstGeom>
+          <a:solidFill>
+            <a:srgbClr val="F3F5F8"/>
+          </a:solidFill>
+          <a:ln w="9525">
+            <a:solidFill>
+              <a:srgbClr val="C9D4E0"/>
+            </a:solidFill>
+            <a:prstDash val="solid"/>
+          </a:ln>
+        </p:spPr>
+      </p:sp>
+      <p:sp>
+        <p:nvSpPr>
+          <p:cNvPr id="11" name="Shape 9"/>
+          <p:cNvSpPr/>
+          <p:nvPr/>
+        </p:nvSpPr>
+        <p:spPr>
+          <a:xfrm>
+            <a:off x="685800" y="2514600"/>
+            <a:ext cx="329184" cy="329184"/>
+          </a:xfrm>
+          <a:prstGeom prst="ellipse">
+            <a:avLst/>
+          </a:prstGeom>
+          <a:solidFill>
+            <a:srgbClr val="1A9E8F"/>
+          </a:solidFill>
+          <a:ln/>
+        </p:spPr>
+      </p:sp>
+      <p:sp>
+        <p:nvSpPr>
+          <p:cNvPr id="12" name="Text 10"/>
+          <p:cNvSpPr/>
+          <p:nvPr/>
+        </p:nvSpPr>
+        <p:spPr>
+          <a:xfrm>
+            <a:off x="685800" y="2500884"/>
+            <a:ext cx="329184" cy="329184"/>
+          </a:xfrm>
+          <a:prstGeom prst="rect">
+            <a:avLst/>
+          </a:prstGeom>
+          <a:noFill/>
+          <a:ln/>
+        </p:spPr>
+        <p:txBody>
+          <a:bodyPr wrap="square" lIns="0" tIns="0" rIns="0" bIns="0" rtlCol="0" anchor="ctr"/>
+          <a:lstStyle/>
+          <a:p>
+            <a:pPr algn="ctr" indent="0" marL="0">
+              <a:buNone/>
+            </a:pPr>
+            <a:r>
+              <a:rPr lang="en-US" sz="1300" b="1" dirty="0">
+                <a:solidFill>
+                  <a:srgbClr val="FFFFFF"/>
+                </a:solidFill>
+                <a:latin typeface="Arial" pitchFamily="34" charset="0"/>
+                <a:ea typeface="Arial" pitchFamily="34" charset="-122"/>
+                <a:cs typeface="Arial" pitchFamily="34" charset="-120"/>
+              </a:rPr>
+              <a:t>2</a:t>
+            </a:r>
+            <a:endParaRPr lang="en-US" sz="1300" dirty="0"/>
+          </a:p>
+        </p:txBody>
+      </p:sp>
+      <p:sp>
+        <p:nvSpPr>
+          <p:cNvPr id="13" name="Text 11"/>
+          <p:cNvSpPr/>
+          <p:nvPr/>
+        </p:nvSpPr>
+        <p:spPr>
+          <a:xfrm>
+            <a:off x="1170432" y="2331720"/>
+            <a:ext cx="7360920" cy="713232"/>
+          </a:xfrm>
+          <a:prstGeom prst="rect">
+            <a:avLst/>
+          </a:prstGeom>
+          <a:noFill/>
+          <a:ln/>
+        </p:spPr>
+        <p:txBody>
+          <a:bodyPr wrap="square" lIns="0" tIns="0" rIns="0" bIns="0" rtlCol="0" anchor="ctr"/>
+          <a:lstStyle/>
+          <a:p>
+            <a:pPr indent="0" marL="0">
+              <a:buNone/>
+            </a:pPr>
+            <a:r>
+              <a:rPr lang="en-US" sz="1100" b="1" dirty="0">
+                <a:solidFill>
+                  <a:srgbClr val="1A9E8F"/>
+                </a:solidFill>
+                <a:latin typeface="Arial" pitchFamily="34" charset="0"/>
+                <a:ea typeface="Arial" pitchFamily="34" charset="-122"/>
+                <a:cs typeface="Arial" pitchFamily="34" charset="-120"/>
+              </a:rPr>
+              <a:t>90-day trend on demand   </a:t>
+            </a:r>
+            <a:pPr indent="0" marL="0">
+              <a:buNone/>
+            </a:pPr>
+            <a:r>
+              <a:rPr lang="en-US" sz="900" dirty="0">
+                <a:solidFill>
+                  <a:srgbClr val="1E293B"/>
+                </a:solidFill>
+                <a:latin typeface="Arial" pitchFamily="34" charset="0"/>
+                <a:ea typeface="Arial" pitchFamily="34" charset="-122"/>
+                <a:cs typeface="Arial" pitchFamily="34" charset="-120"/>
+              </a:rPr>
+              <a:t>Assessors typically request a 90- or 180-day record. A trend query reads the stored summaries into a compliance-rate time series — already retained, not reconstructed.</a:t>
+            </a:r>
+            <a:endParaRPr lang="en-US" sz="1100" dirty="0"/>
+          </a:p>
+        </p:txBody>
+      </p:sp>
+      <p:sp>
+        <p:nvSpPr>
+          <p:cNvPr id="14" name="Shape 12"/>
+          <p:cNvSpPr/>
+          <p:nvPr/>
+        </p:nvSpPr>
+        <p:spPr>
+          <a:xfrm>
+            <a:off x="502920" y="3218688"/>
+            <a:ext cx="8229600" cy="850392"/>
+          </a:xfrm>
+          <a:prstGeom prst="roundRect">
+            <a:avLst>
+              <a:gd name="adj" fmla="val 7527"/>
+            </a:avLst>
+          </a:prstGeom>
+          <a:solidFill>
+            <a:srgbClr val="FFFFFF"/>
+          </a:solidFill>
+          <a:ln w="9525">
+            <a:solidFill>
+              <a:srgbClr val="C9D4E0"/>
+            </a:solidFill>
+            <a:prstDash val="solid"/>
+          </a:ln>
+        </p:spPr>
+      </p:sp>
+      <p:sp>
+        <p:nvSpPr>
+          <p:cNvPr id="15" name="Shape 13"/>
+          <p:cNvSpPr/>
+          <p:nvPr/>
+        </p:nvSpPr>
+        <p:spPr>
+          <a:xfrm>
+            <a:off x="685800" y="3474720"/>
+            <a:ext cx="329184" cy="329184"/>
+          </a:xfrm>
+          <a:prstGeom prst="ellipse">
+            <a:avLst/>
+          </a:prstGeom>
+          <a:solidFill>
+            <a:srgbClr val="D4860B"/>
+          </a:solidFill>
+          <a:ln/>
+        </p:spPr>
+      </p:sp>
+      <p:sp>
+        <p:nvSpPr>
+          <p:cNvPr id="16" name="Text 14"/>
+          <p:cNvSpPr/>
+          <p:nvPr/>
+        </p:nvSpPr>
+        <p:spPr>
+          <a:xfrm>
+            <a:off x="685800" y="3461004"/>
+            <a:ext cx="329184" cy="329184"/>
+          </a:xfrm>
+          <a:prstGeom prst="rect">
+            <a:avLst/>
+          </a:prstGeom>
+          <a:noFill/>
+          <a:ln/>
+        </p:spPr>
+        <p:txBody>
+          <a:bodyPr wrap="square" lIns="0" tIns="0" rIns="0" bIns="0" rtlCol="0" anchor="ctr"/>
+          <a:lstStyle/>
+          <a:p>
+            <a:pPr algn="ctr" indent="0" marL="0">
+              <a:buNone/>
+            </a:pPr>
+            <a:r>
+              <a:rPr lang="en-US" sz="1300" b="1" dirty="0">
+                <a:solidFill>
+                  <a:srgbClr val="FFFFFF"/>
+                </a:solidFill>
+                <a:latin typeface="Arial" pitchFamily="34" charset="0"/>
+                <a:ea typeface="Arial" pitchFamily="34" charset="-122"/>
+                <a:cs typeface="Arial" pitchFamily="34" charset="-120"/>
+              </a:rPr>
+              <a:t>3</a:t>
+            </a:r>
+            <a:endParaRPr lang="en-US" sz="1300" dirty="0"/>
+          </a:p>
+        </p:txBody>
+      </p:sp>
+      <p:sp>
+        <p:nvSpPr>
+          <p:cNvPr id="17" name="Text 15"/>
+          <p:cNvSpPr/>
+          <p:nvPr/>
+        </p:nvSpPr>
+        <p:spPr>
+          <a:xfrm>
+            <a:off x="1170432" y="3291840"/>
+            <a:ext cx="7360920" cy="713232"/>
+          </a:xfrm>
+          <a:prstGeom prst="rect">
+            <a:avLst/>
+          </a:prstGeom>
+          <a:noFill/>
+          <a:ln/>
+        </p:spPr>
+        <p:txBody>
+          <a:bodyPr wrap="square" lIns="0" tIns="0" rIns="0" bIns="0" rtlCol="0" anchor="ctr"/>
+          <a:lstStyle/>
+          <a:p>
+            <a:pPr indent="0" marL="0">
+              <a:buNone/>
+            </a:pPr>
+            <a:r>
+              <a:rPr lang="en-US" sz="1100" b="1" dirty="0">
+                <a:solidFill>
+                  <a:srgbClr val="D4860B"/>
+                </a:solidFill>
+                <a:latin typeface="Arial" pitchFamily="34" charset="0"/>
+                <a:ea typeface="Arial" pitchFamily="34" charset="-122"/>
+                <a:cs typeface="Arial" pitchFamily="34" charset="-120"/>
+              </a:rPr>
+              <a:t>Live operations dashboard   </a:t>
+            </a:r>
+            <a:pPr indent="0" marL="0">
+              <a:buNone/>
+            </a:pPr>
+            <a:r>
+              <a:rPr lang="en-US" sz="900" dirty="0">
+                <a:solidFill>
+                  <a:srgbClr val="1E293B"/>
+                </a:solidFill>
+                <a:latin typeface="Arial" pitchFamily="34" charset="0"/>
+                <a:ea typeface="Arial" pitchFamily="34" charset="-122"/>
+                <a:cs typeface="Arial" pitchFamily="34" charset="-120"/>
+              </a:rPr>
+              <a:t>The daily JSON ingests into a Log Analytics custom table; an Azure Monitor Workbook surfaces compliance-rate trend, KEV counts, and SLA-breach alerts — no JSON parsing for the ops team.</a:t>
+            </a:r>
+            <a:endParaRPr lang="en-US" sz="1100" dirty="0"/>
+          </a:p>
+        </p:txBody>
+      </p:sp>
+      <p:sp>
+        <p:nvSpPr>
+          <p:cNvPr id="18" name="Shape 16"/>
+          <p:cNvSpPr/>
+          <p:nvPr/>
+        </p:nvSpPr>
+        <p:spPr>
+          <a:xfrm>
+            <a:off x="502920" y="4261104"/>
+            <a:ext cx="8229600" cy="548640"/>
+          </a:xfrm>
+          <a:prstGeom prst="roundRect">
+            <a:avLst>
+              <a:gd name="adj" fmla="val 11667"/>
+            </a:avLst>
+          </a:prstGeom>
+          <a:solidFill>
+            <a:srgbClr val="EDF3F9"/>
+          </a:solidFill>
+          <a:ln w="9525">
+            <a:solidFill>
+              <a:srgbClr val="C9D4E0"/>
+            </a:solidFill>
+            <a:prstDash val="solid"/>
+          </a:ln>
+        </p:spPr>
+      </p:sp>
+      <p:sp>
+        <p:nvSpPr>
+          <p:cNvPr id="19" name="Text 17"/>
+          <p:cNvSpPr/>
+          <p:nvPr/>
+        </p:nvSpPr>
+        <p:spPr>
+          <a:xfrm>
+            <a:off x="731520" y="4261104"/>
+            <a:ext cx="7772400" cy="548640"/>
+          </a:xfrm>
+          <a:prstGeom prst="rect">
+            <a:avLst/>
+          </a:prstGeom>
+          <a:noFill/>
+          <a:ln/>
+        </p:spPr>
+        <p:txBody>
+          <a:bodyPr wrap="square" lIns="0" tIns="0" rIns="0" bIns="0" rtlCol="0" anchor="ctr"/>
+          <a:lstStyle/>
+          <a:p>
+            <a:pPr indent="0" marL="0">
+              <a:buNone/>
+            </a:pPr>
+            <a:r>
+              <a:rPr lang="en-US" sz="950" b="1" dirty="0">
+                <a:solidFill>
+                  <a:srgbClr val="1F3A5F"/>
+                </a:solidFill>
+                <a:latin typeface="Arial" pitchFamily="34" charset="0"/>
+                <a:ea typeface="Arial" pitchFamily="34" charset="-122"/>
+                <a:cs typeface="Arial" pitchFamily="34" charset="-120"/>
+              </a:rPr>
+              <a:t>The five assessment artifacts, all script-produced: </a:t>
+            </a:r>
+            <a:pPr indent="0" marL="0">
+              <a:buNone/>
+            </a:pPr>
+            <a:r>
+              <a:rPr lang="en-US" sz="950" dirty="0">
+                <a:solidFill>
+                  <a:srgbClr val="1E293B"/>
+                </a:solidFill>
+                <a:latin typeface="Arial" pitchFamily="34" charset="0"/>
+                <a:ea typeface="Arial" pitchFamily="34" charset="-122"/>
+                <a:cs typeface="Arial" pitchFamily="34" charset="-120"/>
+              </a:rPr>
+              <a:t>the daily patch queue, the daily compliance summary, the 90-day trend, the Arc-vs-MDE coverage cross-check, and the SQL version/CU inventory. No manual assembly for any assessment request.</a:t>
+            </a:r>
+            <a:endParaRPr lang="en-US" sz="950" dirty="0"/>
+          </a:p>
+        </p:txBody>
+      </p:sp>
+    </p:spTree>
+  </p:cSld>
+  <p:clrMapOvr>
+    <a:masterClrMapping/>
+  </p:clrMapOvr>
+</p:sld>
+</file>
+
+<file path=ppt/slides/slide23.xml><?xml version="1.0" encoding="utf-8"?>
+<p:sld xmlns:a="http://schemas.openxmlformats.org/drawingml/2006/main" xmlns:r="http://schemas.openxmlformats.org/officeDocument/2006/relationships" xmlns:p="http://schemas.openxmlformats.org/presentationml/2006/main">
+  <p:cSld name="Slide 23">
+    <p:bg>
+      <p:bgPr>
+        <a:solidFill>
+          <a:srgbClr val="FFFFFF"/>
+        </a:solidFill>
+      </p:bgPr>
+    </p:bg>
+    <p:spTree>
+      <p:nvGrpSpPr>
+        <p:cNvPr id="1" name=""/>
+        <p:cNvGrpSpPr/>
+        <p:nvPr/>
+      </p:nvGrpSpPr>
+      <p:grpSpPr>
+        <a:xfrm>
+          <a:off x="0" y="0"/>
+          <a:ext cx="0" cy="0"/>
+          <a:chOff x="0" y="0"/>
+          <a:chExt cx="0" cy="0"/>
+        </a:xfrm>
+      </p:grpSpPr>
+      <p:sp>
+        <p:nvSpPr>
+          <p:cNvPr id="2" name="Text 0"/>
+          <p:cNvSpPr/>
+          <p:nvPr/>
+        </p:nvSpPr>
+        <p:spPr>
+          <a:xfrm>
+            <a:off x="502920" y="256032"/>
+            <a:ext cx="8229600" cy="274320"/>
+          </a:xfrm>
+          <a:prstGeom prst="rect">
+            <a:avLst/>
+          </a:prstGeom>
+          <a:noFill/>
+          <a:ln/>
+        </p:spPr>
+        <p:txBody>
+          <a:bodyPr wrap="square" lIns="0" tIns="0" rIns="0" bIns="0" rtlCol="0" anchor="ctr"/>
+          <a:lstStyle/>
+          <a:p>
+            <a:pPr indent="0" marL="0">
+              <a:buNone/>
+            </a:pPr>
+            <a:r>
+              <a:rPr lang="en-US" sz="1100" b="1" spc="200" kern="0" dirty="0">
+                <a:solidFill>
+                  <a:srgbClr val="1A9E8F"/>
+                </a:solidFill>
+                <a:latin typeface="Arial" pitchFamily="34" charset="0"/>
+                <a:ea typeface="Arial" pitchFamily="34" charset="-122"/>
+                <a:cs typeface="Arial" pitchFamily="34" charset="-120"/>
+              </a:rPr>
+              <a:t>THE COMPLIANCE HALF</a:t>
+            </a:r>
+            <a:endParaRPr lang="en-US" sz="1100" dirty="0"/>
+          </a:p>
+        </p:txBody>
+      </p:sp>
+      <p:sp>
+        <p:nvSpPr>
+          <p:cNvPr id="3" name="Text 1"/>
+          <p:cNvSpPr/>
+          <p:nvPr/>
+        </p:nvSpPr>
+        <p:spPr>
+          <a:xfrm>
+            <a:off x="502920" y="512064"/>
+            <a:ext cx="8138160" cy="566928"/>
+          </a:xfrm>
+          <a:prstGeom prst="rect">
+            <a:avLst/>
+          </a:prstGeom>
+          <a:noFill/>
+          <a:ln/>
+        </p:spPr>
+        <p:txBody>
+          <a:bodyPr wrap="square" lIns="0" tIns="0" rIns="0" bIns="0" rtlCol="0" anchor="ctr"/>
+          <a:lstStyle/>
+          <a:p>
+            <a:pPr indent="0" marL="0">
+              <a:buNone/>
+            </a:pPr>
+            <a:r>
+              <a:rPr lang="en-US" sz="2400" b="1" dirty="0">
+                <a:solidFill>
+                  <a:srgbClr val="1F3A5F"/>
+                </a:solidFill>
+                <a:latin typeface="Arial" pitchFamily="34" charset="0"/>
+                <a:ea typeface="Arial" pitchFamily="34" charset="-122"/>
+                <a:cs typeface="Arial" pitchFamily="34" charset="-120"/>
+              </a:rPr>
+              <a:t>NIST SP 800-53 Rev 5 control closure — Part 11</a:t>
+            </a:r>
+            <a:endParaRPr lang="en-US" sz="2400" dirty="0"/>
+          </a:p>
+        </p:txBody>
+      </p:sp>
+      <p:sp>
+        <p:nvSpPr>
+          <p:cNvPr id="4" name="Text 2"/>
+          <p:cNvSpPr/>
+          <p:nvPr/>
+        </p:nvSpPr>
+        <p:spPr>
+          <a:xfrm>
+            <a:off x="502920" y="4864608"/>
+            <a:ext cx="7315200" cy="219456"/>
+          </a:xfrm>
+          <a:prstGeom prst="rect">
+            <a:avLst/>
+          </a:prstGeom>
+          <a:noFill/>
+          <a:ln/>
+        </p:spPr>
+        <p:txBody>
+          <a:bodyPr wrap="square" lIns="0" tIns="0" rIns="0" bIns="0" rtlCol="0" anchor="ctr"/>
+          <a:lstStyle/>
+          <a:p>
+            <a:pPr indent="0" marL="0">
+              <a:buNone/>
+            </a:pPr>
+            <a:r>
+              <a:rPr lang="en-US" sz="800" dirty="0">
+                <a:solidFill>
+                  <a:srgbClr val="5B6B7C"/>
+                </a:solidFill>
+                <a:latin typeface="Arial" pitchFamily="34" charset="0"/>
+                <a:ea typeface="Arial" pitchFamily="34" charset="-122"/>
+                <a:cs typeface="Arial" pitchFamily="34" charset="-120"/>
+              </a:rPr>
+              <a:t>Federal AAN — Book 11 Vulnerability Management · CSI Team Draft — Internal · FedRAMP Moderate · Date Code 2026-07-08 13:32 ET</a:t>
+            </a:r>
+            <a:endParaRPr lang="en-US" sz="800" dirty="0"/>
+          </a:p>
+        </p:txBody>
+      </p:sp>
+      <p:sp>
+        <p:nvSpPr>
+          <p:cNvPr id="5" name="Text 3"/>
+          <p:cNvSpPr/>
+          <p:nvPr/>
+        </p:nvSpPr>
+        <p:spPr>
+          <a:xfrm>
+            <a:off x="8412480" y="4864608"/>
+            <a:ext cx="320040" cy="219456"/>
+          </a:xfrm>
+          <a:prstGeom prst="rect">
+            <a:avLst/>
+          </a:prstGeom>
+          <a:noFill/>
+          <a:ln/>
+        </p:spPr>
+        <p:txBody>
+          <a:bodyPr wrap="square" lIns="0" tIns="0" rIns="0" bIns="0" rtlCol="0" anchor="ctr"/>
+          <a:lstStyle/>
+          <a:p>
+            <a:pPr algn="r" indent="0" marL="0">
+              <a:buNone/>
+            </a:pPr>
+            <a:r>
+              <a:rPr lang="en-US" sz="800" dirty="0">
+                <a:solidFill>
+                  <a:srgbClr val="5B6B7C"/>
+                </a:solidFill>
+                <a:latin typeface="Arial" pitchFamily="34" charset="0"/>
+                <a:ea typeface="Arial" pitchFamily="34" charset="-122"/>
+                <a:cs typeface="Arial" pitchFamily="34" charset="-120"/>
+              </a:rPr>
+              <a:t>23</a:t>
+            </a:r>
+            <a:endParaRPr lang="en-US" sz="800" dirty="0"/>
+          </a:p>
+        </p:txBody>
+      </p:sp>
+      <p:graphicFrame>
+        <p:nvGraphicFramePr>
+          <p:cNvPr id="24" name="Table 0"/>
           <p:cNvGraphicFramePr>
             <a:graphicFrameLocks noGrp="1"/>
           </p:cNvGraphicFramePr>
@@ -15892,9 +19117,9 @@
 </p:sld>
 </file>
 
-<file path=ppt/slides/slide21.xml><?xml version="1.0" encoding="utf-8"?>
+<file path=ppt/slides/slide24.xml><?xml version="1.0" encoding="utf-8"?>
 <p:sld xmlns:a="http://schemas.openxmlformats.org/drawingml/2006/main" xmlns:r="http://schemas.openxmlformats.org/officeDocument/2006/relationships" xmlns:p="http://schemas.openxmlformats.org/presentationml/2006/main">
-  <p:cSld name="Slide 21">
+  <p:cSld name="Slide 24">
     <p:bg>
       <p:bgPr>
         <a:solidFill>
@@ -16027,7 +19252,7 @@
                 <a:ea typeface="Arial" pitchFamily="34" charset="-122"/>
                 <a:cs typeface="Arial" pitchFamily="34" charset="-120"/>
               </a:rPr>
-              <a:t>Federal AAN — Book 11 Vulnerability Management · CSI Team Draft — Internal · FedRAMP Moderate · Date Code 2026-07-08 13:21 ET</a:t>
+              <a:t>Federal AAN — Book 11 Vulnerability Management · CSI Team Draft — Internal · FedRAMP Moderate · Date Code 2026-07-08 13:32 ET</a:t>
             </a:r>
             <a:endParaRPr lang="en-US" sz="800" dirty="0"/>
           </a:p>
@@ -16066,7 +19291,7 @@
                 <a:ea typeface="Arial" pitchFamily="34" charset="-122"/>
                 <a:cs typeface="Arial" pitchFamily="34" charset="-120"/>
               </a:rPr>
-              <a:t>21</a:t>
+              <a:t>24</a:t>
             </a:r>
             <a:endParaRPr lang="en-US" sz="800" dirty="0"/>
           </a:p>
@@ -16891,9 +20116,9 @@
 </p:sld>
 </file>
 
-<file path=ppt/slides/slide22.xml><?xml version="1.0" encoding="utf-8"?>
+<file path=ppt/slides/slide25.xml><?xml version="1.0" encoding="utf-8"?>
 <p:sld xmlns:a="http://schemas.openxmlformats.org/drawingml/2006/main" xmlns:r="http://schemas.openxmlformats.org/officeDocument/2006/relationships" xmlns:p="http://schemas.openxmlformats.org/presentationml/2006/main">
-  <p:cSld name="Slide 22">
+  <p:cSld name="Slide 25">
     <p:bg>
       <p:bgPr>
         <a:solidFill>
@@ -17026,7 +20251,7 @@
                 <a:ea typeface="Arial" pitchFamily="34" charset="-122"/>
                 <a:cs typeface="Arial" pitchFamily="34" charset="-120"/>
               </a:rPr>
-              <a:t>Federal AAN — Book 11 Vulnerability Management · CSI Team Draft — Internal · FedRAMP Moderate · Date Code 2026-07-08 13:21 ET</a:t>
+              <a:t>Federal AAN — Book 11 Vulnerability Management · CSI Team Draft — Internal · FedRAMP Moderate · Date Code 2026-07-08 13:32 ET</a:t>
             </a:r>
             <a:endParaRPr lang="en-US" sz="800" dirty="0"/>
           </a:p>
@@ -17065,7 +20290,7 @@
                 <a:ea typeface="Arial" pitchFamily="34" charset="-122"/>
                 <a:cs typeface="Arial" pitchFamily="34" charset="-120"/>
               </a:rPr>
-              <a:t>22</a:t>
+              <a:t>25</a:t>
             </a:r>
             <a:endParaRPr lang="en-US" sz="800" dirty="0"/>
           </a:p>
@@ -17601,7 +20826,7 @@
                 <a:ea typeface="Arial" pitchFamily="34" charset="-122"/>
                 <a:cs typeface="Arial" pitchFamily="34" charset="-120"/>
               </a:rPr>
-              <a:t>Federal AAN — Book 11 Vulnerability Management · CSI Team Draft — Internal · FedRAMP Moderate · Date Code 2026-07-08 13:21 ET</a:t>
+              <a:t>Federal AAN — Book 11 Vulnerability Management · CSI Team Draft — Internal · FedRAMP Moderate · Date Code 2026-07-08 13:32 ET</a:t>
             </a:r>
             <a:endParaRPr lang="en-US" sz="800" dirty="0"/>
           </a:p>
@@ -18558,7 +21783,7 @@
                 <a:ea typeface="Arial" pitchFamily="34" charset="-122"/>
                 <a:cs typeface="Arial" pitchFamily="34" charset="-120"/>
               </a:rPr>
-              <a:t>Federal AAN — Book 11 Vulnerability Management · CSI Team Draft — Internal · FedRAMP Moderate · Date Code 2026-07-08 13:21 ET</a:t>
+              <a:t>Federal AAN — Book 11 Vulnerability Management · CSI Team Draft — Internal · FedRAMP Moderate · Date Code 2026-07-08 13:32 ET</a:t>
             </a:r>
             <a:endParaRPr lang="en-US" sz="800" dirty="0"/>
           </a:p>
@@ -19428,7 +22653,7 @@
                 <a:ea typeface="Arial" pitchFamily="34" charset="-122"/>
                 <a:cs typeface="Arial" pitchFamily="34" charset="-120"/>
               </a:rPr>
-              <a:t>Federal AAN — Book 11 Vulnerability Management · CSI Team Draft — Internal · FedRAMP Moderate · Date Code 2026-07-08 13:21 ET</a:t>
+              <a:t>Federal AAN — Book 11 Vulnerability Management · CSI Team Draft — Internal · FedRAMP Moderate · Date Code 2026-07-08 13:32 ET</a:t>
             </a:r>
             <a:endParaRPr lang="en-US" sz="800" dirty="0"/>
           </a:p>
@@ -20120,7 +23345,7 @@
                 <a:ea typeface="Arial" pitchFamily="34" charset="-122"/>
                 <a:cs typeface="Arial" pitchFamily="34" charset="-120"/>
               </a:rPr>
-              <a:t>Federal AAN — Book 11 Vulnerability Management · CSI Team Draft — Internal · FedRAMP Moderate · Date Code 2026-07-08 13:21 ET</a:t>
+              <a:t>Federal AAN — Book 11 Vulnerability Management · CSI Team Draft — Internal · FedRAMP Moderate · Date Code 2026-07-08 13:32 ET</a:t>
             </a:r>
             <a:endParaRPr lang="en-US" sz="800" dirty="0"/>
           </a:p>
@@ -20790,7 +24015,7 @@
                 <a:ea typeface="Arial" pitchFamily="34" charset="-122"/>
                 <a:cs typeface="Arial" pitchFamily="34" charset="-120"/>
               </a:rPr>
-              <a:t>Federal AAN — Book 11 Vulnerability Management · CSI Team Draft — Internal · FedRAMP Moderate · Date Code 2026-07-08 13:21 ET</a:t>
+              <a:t>Federal AAN — Book 11 Vulnerability Management · CSI Team Draft — Internal · FedRAMP Moderate · Date Code 2026-07-08 13:32 ET</a:t>
             </a:r>
             <a:endParaRPr lang="en-US" sz="800" dirty="0"/>
           </a:p>
@@ -21613,7 +24838,7 @@
                 <a:ea typeface="Arial" pitchFamily="34" charset="-122"/>
                 <a:cs typeface="Arial" pitchFamily="34" charset="-120"/>
               </a:rPr>
-              <a:t>Federal AAN — Book 11 Vulnerability Management · CSI Team Draft — Internal · FedRAMP Moderate · Date Code 2026-07-08 13:21 ET</a:t>
+              <a:t>Federal AAN — Book 11 Vulnerability Management · CSI Team Draft — Internal · FedRAMP Moderate · Date Code 2026-07-08 13:32 ET</a:t>
             </a:r>
             <a:endParaRPr lang="en-US" sz="800" dirty="0"/>
           </a:p>
@@ -23831,7 +27056,7 @@
                 <a:ea typeface="Arial" pitchFamily="34" charset="-122"/>
                 <a:cs typeface="Arial" pitchFamily="34" charset="-120"/>
               </a:rPr>
-              <a:t>Federal AAN — Book 11 Vulnerability Management · CSI Team Draft — Internal · FedRAMP Moderate · Date Code 2026-07-08 13:21 ET</a:t>
+              <a:t>Federal AAN — Book 11 Vulnerability Management · CSI Team Draft — Internal · FedRAMP Moderate · Date Code 2026-07-08 13:32 ET</a:t>
             </a:r>
             <a:endParaRPr lang="en-US" sz="800" dirty="0"/>
           </a:p>
